--- a/deck/AHC_VAD_submission.pptx
+++ b/deck/AHC_VAD_submission.pptx
@@ -591,7 +591,7 @@
           <a:p>
             <a:r>
               <a:rPr lang="en-US" dirty="0"/>
-              <a:t>47.0/100 on the public arena. Biggest remaining pool is D3 at 11.5 of 40 across only four videos. Negative results are reported deliberately: the zero-shot VLM and the organisers' label correction both measurably hurt, and we kept what the measurements supported rather than what we expected.</a:t>
+              <a:t>Standing private-set score 37.2/100. The three fixes are candidate widths matched to the IoU 0.5 gate, round-robin stratification across widths so the budget is not spent on the narrowest scale, and a class spray restricted to what the source collection can contain. Projections come from the public set, tuned on four videos per level, so they are directions rather than promises.</a:t>
             </a:r>
             <a:endParaRPr lang="en-US" dirty="0"/>
           </a:p>
@@ -2763,7 +2763,7 @@
                 <a:ea typeface="Cambria" pitchFamily="34" charset="-122"/>
                 <a:cs typeface="Cambria" pitchFamily="34" charset="-120"/>
               </a:rPr>
-              <a:t>Result: 47.0 / 100 — and four experiments that failed</a:t>
+              <a:t>Private set: 37.2 measured, 53.8 projected after three fixes</a:t>
             </a:r>
             <a:endParaRPr lang="en-US" sz="2700" dirty="0"/>
           </a:p>
@@ -2802,7 +2802,7 @@
                 <a:ea typeface="Calibri" pitchFamily="34" charset="-122"/>
                 <a:cs typeface="Calibri" pitchFamily="34" charset="-120"/>
               </a:rPr>
-              <a:t>Public arena run. Every number below is measured, not estimated.</a:t>
+              <a:t>Every number is measured on the public set or deduced from upload deltas. Projections are labelled as such.</a:t>
             </a:r>
             <a:endParaRPr lang="en-US" sz="1300" dirty="0"/>
           </a:p>
@@ -2817,11 +2817,11 @@
         <p:spPr>
           <a:xfrm>
             <a:off x="502920" y="1280160"/>
-            <a:ext cx="2578608" cy="1170432"/>
+            <a:ext cx="2578608" cy="1298448"/>
           </a:xfrm>
           <a:prstGeom prst="roundRect">
             <a:avLst>
-              <a:gd name="adj" fmla="val 4688"/>
+              <a:gd name="adj" fmla="val 4225"/>
             </a:avLst>
           </a:prstGeom>
           <a:solidFill>
@@ -2843,7 +2843,7 @@
         </p:nvSpPr>
         <p:spPr>
           <a:xfrm>
-            <a:off x="667512" y="1408176"/>
+            <a:off x="667512" y="1389888"/>
             <a:ext cx="2249424" cy="237744"/>
           </a:xfrm>
           <a:prstGeom prst="rect">
@@ -2882,8 +2882,8 @@
         </p:nvSpPr>
         <p:spPr>
           <a:xfrm>
-            <a:off x="667512" y="1737360"/>
-            <a:ext cx="2249424" cy="548640"/>
+            <a:off x="667512" y="1682496"/>
+            <a:ext cx="2249424" cy="512064"/>
           </a:xfrm>
           <a:prstGeom prst="rect">
             <a:avLst/>
@@ -2907,7 +2907,7 @@
                 <a:ea typeface="Cambria" pitchFamily="34" charset="-122"/>
                 <a:cs typeface="Cambria" pitchFamily="34" charset="-120"/>
               </a:rPr>
-              <a:t>12.9</a:t>
+              <a:t>12.0</a:t>
             </a:r>
             <a:pPr indent="0" marL="0">
               <a:buNone/>
@@ -2929,18 +2929,57 @@
       </p:sp>
       <p:sp>
         <p:nvSpPr>
-          <p:cNvPr id="7" name="Shape 5"/>
+          <p:cNvPr id="7" name="Text 5"/>
+          <p:cNvSpPr/>
+          <p:nvPr/>
+        </p:nvSpPr>
+        <p:spPr>
+          <a:xfrm>
+            <a:off x="667512" y="2231136"/>
+            <a:ext cx="2249424" cy="237744"/>
+          </a:xfrm>
+          <a:prstGeom prst="rect">
+            <a:avLst/>
+          </a:prstGeom>
+          <a:noFill/>
+          <a:ln/>
+        </p:spPr>
+        <p:txBody>
+          <a:bodyPr wrap="square" lIns="0" tIns="0" rIns="0" bIns="0" rtlCol="0" anchor="ctr"/>
+          <a:lstStyle/>
+          <a:p>
+            <a:pPr indent="0" marL="0">
+              <a:buNone/>
+            </a:pPr>
+            <a:r>
+              <a:rPr lang="en-US" sz="1000" dirty="0">
+                <a:solidFill>
+                  <a:srgbClr val="5FCB8E"/>
+                </a:solidFill>
+                <a:latin typeface="Calibri" pitchFamily="34" charset="0"/>
+                <a:ea typeface="Calibri" pitchFamily="34" charset="-122"/>
+                <a:cs typeface="Calibri" pitchFamily="34" charset="-120"/>
+              </a:rPr>
+              <a:t>projected  15.0</a:t>
+            </a:r>
+            <a:endParaRPr lang="en-US" sz="1000" dirty="0"/>
+          </a:p>
+        </p:txBody>
+      </p:sp>
+      <p:sp>
+        <p:nvSpPr>
+          <p:cNvPr id="8" name="Shape 6"/>
           <p:cNvSpPr/>
           <p:nvPr/>
         </p:nvSpPr>
         <p:spPr>
           <a:xfrm>
             <a:off x="3364992" y="1280160"/>
-            <a:ext cx="2578608" cy="1170432"/>
+            <a:ext cx="2578608" cy="1298448"/>
           </a:xfrm>
           <a:prstGeom prst="roundRect">
             <a:avLst>
-              <a:gd name="adj" fmla="val 4688"/>
+              <a:gd name="adj" fmla="val 4225"/>
             </a:avLst>
           </a:prstGeom>
           <a:solidFill>
@@ -2956,13 +2995,13 @@
       </p:sp>
       <p:sp>
         <p:nvSpPr>
-          <p:cNvPr id="8" name="Text 6"/>
-          <p:cNvSpPr/>
-          <p:nvPr/>
-        </p:nvSpPr>
-        <p:spPr>
-          <a:xfrm>
-            <a:off x="3529584" y="1408176"/>
+          <p:cNvPr id="9" name="Text 7"/>
+          <p:cNvSpPr/>
+          <p:nvPr/>
+        </p:nvSpPr>
+        <p:spPr>
+          <a:xfrm>
+            <a:off x="3529584" y="1389888"/>
             <a:ext cx="2249424" cy="237744"/>
           </a:xfrm>
           <a:prstGeom prst="rect">
@@ -2995,14 +3034,14 @@
       </p:sp>
       <p:sp>
         <p:nvSpPr>
-          <p:cNvPr id="9" name="Text 7"/>
-          <p:cNvSpPr/>
-          <p:nvPr/>
-        </p:nvSpPr>
-        <p:spPr>
-          <a:xfrm>
-            <a:off x="3529584" y="1737360"/>
-            <a:ext cx="2249424" cy="548640"/>
+          <p:cNvPr id="10" name="Text 8"/>
+          <p:cNvSpPr/>
+          <p:nvPr/>
+        </p:nvSpPr>
+        <p:spPr>
+          <a:xfrm>
+            <a:off x="3529584" y="1682496"/>
+            <a:ext cx="2249424" cy="512064"/>
           </a:xfrm>
           <a:prstGeom prst="rect">
             <a:avLst/>
@@ -3026,7 +3065,7 @@
                 <a:ea typeface="Cambria" pitchFamily="34" charset="-122"/>
                 <a:cs typeface="Cambria" pitchFamily="34" charset="-120"/>
               </a:rPr>
-              <a:t>22.6</a:t>
+              <a:t>14.0</a:t>
             </a:r>
             <a:pPr indent="0" marL="0">
               <a:buNone/>
@@ -3048,18 +3087,57 @@
       </p:sp>
       <p:sp>
         <p:nvSpPr>
-          <p:cNvPr id="10" name="Shape 8"/>
+          <p:cNvPr id="11" name="Text 9"/>
+          <p:cNvSpPr/>
+          <p:nvPr/>
+        </p:nvSpPr>
+        <p:spPr>
+          <a:xfrm>
+            <a:off x="3529584" y="2231136"/>
+            <a:ext cx="2249424" cy="237744"/>
+          </a:xfrm>
+          <a:prstGeom prst="rect">
+            <a:avLst/>
+          </a:prstGeom>
+          <a:noFill/>
+          <a:ln/>
+        </p:spPr>
+        <p:txBody>
+          <a:bodyPr wrap="square" lIns="0" tIns="0" rIns="0" bIns="0" rtlCol="0" anchor="ctr"/>
+          <a:lstStyle/>
+          <a:p>
+            <a:pPr indent="0" marL="0">
+              <a:buNone/>
+            </a:pPr>
+            <a:r>
+              <a:rPr lang="en-US" sz="1000" dirty="0">
+                <a:solidFill>
+                  <a:srgbClr val="5FCB8E"/>
+                </a:solidFill>
+                <a:latin typeface="Calibri" pitchFamily="34" charset="0"/>
+                <a:ea typeface="Calibri" pitchFamily="34" charset="-122"/>
+                <a:cs typeface="Calibri" pitchFamily="34" charset="-120"/>
+              </a:rPr>
+              <a:t>projected  22.3</a:t>
+            </a:r>
+            <a:endParaRPr lang="en-US" sz="1000" dirty="0"/>
+          </a:p>
+        </p:txBody>
+      </p:sp>
+      <p:sp>
+        <p:nvSpPr>
+          <p:cNvPr id="12" name="Shape 10"/>
           <p:cNvSpPr/>
           <p:nvPr/>
         </p:nvSpPr>
         <p:spPr>
           <a:xfrm>
             <a:off x="6227064" y="1280160"/>
-            <a:ext cx="2578608" cy="1170432"/>
+            <a:ext cx="2578608" cy="1298448"/>
           </a:xfrm>
           <a:prstGeom prst="roundRect">
             <a:avLst>
-              <a:gd name="adj" fmla="val 4688"/>
+              <a:gd name="adj" fmla="val 4225"/>
             </a:avLst>
           </a:prstGeom>
           <a:solidFill>
@@ -3075,13 +3153,13 @@
       </p:sp>
       <p:sp>
         <p:nvSpPr>
-          <p:cNvPr id="11" name="Text 9"/>
-          <p:cNvSpPr/>
-          <p:nvPr/>
-        </p:nvSpPr>
-        <p:spPr>
-          <a:xfrm>
-            <a:off x="6391656" y="1408176"/>
+          <p:cNvPr id="13" name="Text 11"/>
+          <p:cNvSpPr/>
+          <p:nvPr/>
+        </p:nvSpPr>
+        <p:spPr>
+          <a:xfrm>
+            <a:off x="6391656" y="1389888"/>
             <a:ext cx="2249424" cy="237744"/>
           </a:xfrm>
           <a:prstGeom prst="rect">
@@ -3114,14 +3192,14 @@
       </p:sp>
       <p:sp>
         <p:nvSpPr>
-          <p:cNvPr id="12" name="Text 10"/>
-          <p:cNvSpPr/>
-          <p:nvPr/>
-        </p:nvSpPr>
-        <p:spPr>
-          <a:xfrm>
-            <a:off x="6391656" y="1737360"/>
-            <a:ext cx="2249424" cy="548640"/>
+          <p:cNvPr id="14" name="Text 12"/>
+          <p:cNvSpPr/>
+          <p:nvPr/>
+        </p:nvSpPr>
+        <p:spPr>
+          <a:xfrm>
+            <a:off x="6391656" y="1682496"/>
+            <a:ext cx="2249424" cy="512064"/>
           </a:xfrm>
           <a:prstGeom prst="rect">
             <a:avLst/>
@@ -3145,7 +3223,7 @@
                 <a:ea typeface="Cambria" pitchFamily="34" charset="-122"/>
                 <a:cs typeface="Cambria" pitchFamily="34" charset="-120"/>
               </a:rPr>
-              <a:t>11.5</a:t>
+              <a:t>11.2</a:t>
             </a:r>
             <a:pPr indent="0" marL="0">
               <a:buNone/>
@@ -3167,18 +3245,57 @@
       </p:sp>
       <p:sp>
         <p:nvSpPr>
-          <p:cNvPr id="13" name="Shape 11"/>
+          <p:cNvPr id="15" name="Text 13"/>
+          <p:cNvSpPr/>
+          <p:nvPr/>
+        </p:nvSpPr>
+        <p:spPr>
+          <a:xfrm>
+            <a:off x="6391656" y="2231136"/>
+            <a:ext cx="2249424" cy="237744"/>
+          </a:xfrm>
+          <a:prstGeom prst="rect">
+            <a:avLst/>
+          </a:prstGeom>
+          <a:noFill/>
+          <a:ln/>
+        </p:spPr>
+        <p:txBody>
+          <a:bodyPr wrap="square" lIns="0" tIns="0" rIns="0" bIns="0" rtlCol="0" anchor="ctr"/>
+          <a:lstStyle/>
+          <a:p>
+            <a:pPr indent="0" marL="0">
+              <a:buNone/>
+            </a:pPr>
+            <a:r>
+              <a:rPr lang="en-US" sz="1000" dirty="0">
+                <a:solidFill>
+                  <a:srgbClr val="5FCB8E"/>
+                </a:solidFill>
+                <a:latin typeface="Calibri" pitchFamily="34" charset="0"/>
+                <a:ea typeface="Calibri" pitchFamily="34" charset="-122"/>
+                <a:cs typeface="Calibri" pitchFamily="34" charset="-120"/>
+              </a:rPr>
+              <a:t>projected  16.9</a:t>
+            </a:r>
+            <a:endParaRPr lang="en-US" sz="1000" dirty="0"/>
+          </a:p>
+        </p:txBody>
+      </p:sp>
+      <p:sp>
+        <p:nvSpPr>
+          <p:cNvPr id="16" name="Shape 14"/>
           <p:cNvSpPr/>
           <p:nvPr/>
         </p:nvSpPr>
         <p:spPr>
           <a:xfrm>
             <a:off x="9089136" y="1280160"/>
-            <a:ext cx="2569464" cy="1170432"/>
+            <a:ext cx="2569464" cy="1298448"/>
           </a:xfrm>
           <a:prstGeom prst="roundRect">
             <a:avLst>
-              <a:gd name="adj" fmla="val 4688"/>
+              <a:gd name="adj" fmla="val 4225"/>
             </a:avLst>
           </a:prstGeom>
           <a:solidFill>
@@ -3194,13 +3311,13 @@
       </p:sp>
       <p:sp>
         <p:nvSpPr>
-          <p:cNvPr id="14" name="Text 12"/>
-          <p:cNvSpPr/>
-          <p:nvPr/>
-        </p:nvSpPr>
-        <p:spPr>
-          <a:xfrm>
-            <a:off x="9253728" y="1408176"/>
+          <p:cNvPr id="17" name="Text 15"/>
+          <p:cNvSpPr/>
+          <p:nvPr/>
+        </p:nvSpPr>
+        <p:spPr>
+          <a:xfrm>
+            <a:off x="9253728" y="1389888"/>
             <a:ext cx="2240280" cy="237744"/>
           </a:xfrm>
           <a:prstGeom prst="rect">
@@ -3233,14 +3350,14 @@
       </p:sp>
       <p:sp>
         <p:nvSpPr>
-          <p:cNvPr id="15" name="Text 13"/>
-          <p:cNvSpPr/>
-          <p:nvPr/>
-        </p:nvSpPr>
-        <p:spPr>
-          <a:xfrm>
-            <a:off x="9253728" y="1737360"/>
-            <a:ext cx="2240280" cy="548640"/>
+          <p:cNvPr id="18" name="Text 16"/>
+          <p:cNvSpPr/>
+          <p:nvPr/>
+        </p:nvSpPr>
+        <p:spPr>
+          <a:xfrm>
+            <a:off x="9253728" y="1682496"/>
+            <a:ext cx="2240280" cy="512064"/>
           </a:xfrm>
           <a:prstGeom prst="rect">
             <a:avLst/>
@@ -3258,13 +3375,13 @@
             <a:r>
               <a:rPr lang="en-US" sz="3000" b="1" dirty="0">
                 <a:solidFill>
-                  <a:srgbClr val="5FCB8E"/>
+                  <a:srgbClr val="F2A63B"/>
                 </a:solidFill>
                 <a:latin typeface="Cambria" pitchFamily="34" charset="0"/>
                 <a:ea typeface="Cambria" pitchFamily="34" charset="-122"/>
                 <a:cs typeface="Cambria" pitchFamily="34" charset="-120"/>
               </a:rPr>
-              <a:t>47.0</a:t>
+              <a:t>37.2</a:t>
             </a:r>
             <a:pPr indent="0" marL="0">
               <a:buNone/>
@@ -3286,18 +3403,57 @@
       </p:sp>
       <p:sp>
         <p:nvSpPr>
-          <p:cNvPr id="16" name="Shape 14"/>
-          <p:cNvSpPr/>
-          <p:nvPr/>
-        </p:nvSpPr>
-        <p:spPr>
-          <a:xfrm>
-            <a:off x="502920" y="2670048"/>
-            <a:ext cx="5577840" cy="2788920"/>
+          <p:cNvPr id="19" name="Text 17"/>
+          <p:cNvSpPr/>
+          <p:nvPr/>
+        </p:nvSpPr>
+        <p:spPr>
+          <a:xfrm>
+            <a:off x="9253728" y="2231136"/>
+            <a:ext cx="2240280" cy="237744"/>
+          </a:xfrm>
+          <a:prstGeom prst="rect">
+            <a:avLst/>
+          </a:prstGeom>
+          <a:noFill/>
+          <a:ln/>
+        </p:spPr>
+        <p:txBody>
+          <a:bodyPr wrap="square" lIns="0" tIns="0" rIns="0" bIns="0" rtlCol="0" anchor="ctr"/>
+          <a:lstStyle/>
+          <a:p>
+            <a:pPr indent="0" marL="0">
+              <a:buNone/>
+            </a:pPr>
+            <a:r>
+              <a:rPr lang="en-US" sz="1000" dirty="0">
+                <a:solidFill>
+                  <a:srgbClr val="5FCB8E"/>
+                </a:solidFill>
+                <a:latin typeface="Calibri" pitchFamily="34" charset="0"/>
+                <a:ea typeface="Calibri" pitchFamily="34" charset="-122"/>
+                <a:cs typeface="Calibri" pitchFamily="34" charset="-120"/>
+              </a:rPr>
+              <a:t>projected  53.8</a:t>
+            </a:r>
+            <a:endParaRPr lang="en-US" sz="1000" dirty="0"/>
+          </a:p>
+        </p:txBody>
+      </p:sp>
+      <p:sp>
+        <p:nvSpPr>
+          <p:cNvPr id="20" name="Shape 18"/>
+          <p:cNvSpPr/>
+          <p:nvPr/>
+        </p:nvSpPr>
+        <p:spPr>
+          <a:xfrm>
+            <a:off x="502920" y="2798064"/>
+            <a:ext cx="5577840" cy="2670048"/>
           </a:xfrm>
           <a:prstGeom prst="roundRect">
             <a:avLst>
-              <a:gd name="adj" fmla="val 1967"/>
+              <a:gd name="adj" fmla="val 2055"/>
             </a:avLst>
           </a:prstGeom>
           <a:solidFill>
@@ -3313,13 +3469,13 @@
       </p:sp>
       <p:sp>
         <p:nvSpPr>
-          <p:cNvPr id="17" name="Text 15"/>
-          <p:cNvSpPr/>
-          <p:nvPr/>
-        </p:nvSpPr>
-        <p:spPr>
-          <a:xfrm>
-            <a:off x="685800" y="2798064"/>
+          <p:cNvPr id="21" name="Text 19"/>
+          <p:cNvSpPr/>
+          <p:nvPr/>
+        </p:nvSpPr>
+        <p:spPr>
+          <a:xfrm>
+            <a:off x="685800" y="2926080"/>
             <a:ext cx="5212080" cy="274320"/>
           </a:xfrm>
           <a:prstGeom prst="rect">
@@ -3352,13 +3508,13 @@
       </p:sp>
       <p:sp>
         <p:nvSpPr>
-          <p:cNvPr id="18" name="Text 16"/>
-          <p:cNvSpPr/>
-          <p:nvPr/>
-        </p:nvSpPr>
-        <p:spPr>
-          <a:xfrm>
-            <a:off x="685800" y="3182112"/>
+          <p:cNvPr id="22" name="Text 20"/>
+          <p:cNvSpPr/>
+          <p:nvPr/>
+        </p:nvSpPr>
+        <p:spPr>
+          <a:xfrm>
+            <a:off x="685800" y="3310128"/>
             <a:ext cx="3794760" cy="292608"/>
           </a:xfrm>
           <a:prstGeom prst="rect">
@@ -3383,7 +3539,7 @@
                 <a:ea typeface="Calibri" pitchFamily="34" charset="-122"/>
                 <a:cs typeface="Calibri" pitchFamily="34" charset="-120"/>
               </a:rPr>
-              <a:t>Timestamp drift bug found by inspection</a:t>
+              <a:t>Timestamp drift bug, found by inspection</a:t>
             </a:r>
             <a:endParaRPr lang="en-US" sz="1050" dirty="0"/>
           </a:p>
@@ -3391,13 +3547,13 @@
       </p:sp>
       <p:sp>
         <p:nvSpPr>
-          <p:cNvPr id="19" name="Text 17"/>
-          <p:cNvSpPr/>
-          <p:nvPr/>
-        </p:nvSpPr>
-        <p:spPr>
-          <a:xfrm>
-            <a:off x="4526280" y="3182112"/>
+          <p:cNvPr id="23" name="Text 21"/>
+          <p:cNvSpPr/>
+          <p:nvPr/>
+        </p:nvSpPr>
+        <p:spPr>
+          <a:xfrm>
+            <a:off x="4526280" y="3310128"/>
             <a:ext cx="1389888" cy="292608"/>
           </a:xfrm>
           <a:prstGeom prst="rect">
@@ -3422,7 +3578,7 @@
                 <a:ea typeface="Calibri" pitchFamily="34" charset="-122"/>
                 <a:cs typeface="Calibri" pitchFamily="34" charset="-120"/>
               </a:rPr>
-              <a:t>L2 matches x4</a:t>
+              <a:t>L2 matches ×4</a:t>
             </a:r>
             <a:endParaRPr lang="en-US" sz="1100" dirty="0"/>
           </a:p>
@@ -3430,13 +3586,13 @@
       </p:sp>
       <p:sp>
         <p:nvSpPr>
-          <p:cNvPr id="20" name="Text 18"/>
-          <p:cNvSpPr/>
-          <p:nvPr/>
-        </p:nvSpPr>
-        <p:spPr>
-          <a:xfrm>
-            <a:off x="685800" y="3547872"/>
+          <p:cNvPr id="24" name="Text 22"/>
+          <p:cNvSpPr/>
+          <p:nvPr/>
+        </p:nvSpPr>
+        <p:spPr>
+          <a:xfrm>
+            <a:off x="685800" y="3666744"/>
             <a:ext cx="3794760" cy="292608"/>
           </a:xfrm>
           <a:prstGeom prst="rect">
@@ -3461,7 +3617,7 @@
                 <a:ea typeface="Calibri" pitchFamily="34" charset="-122"/>
                 <a:cs typeface="Calibri" pitchFamily="34" charset="-120"/>
               </a:rPr>
-              <a:t>Retune for precision, not recall</a:t>
+              <a:t>Dual-encoder ensemble on D1</a:t>
             </a:r>
             <a:endParaRPr lang="en-US" sz="1050" dirty="0"/>
           </a:p>
@@ -3469,13 +3625,13 @@
       </p:sp>
       <p:sp>
         <p:nvSpPr>
-          <p:cNvPr id="21" name="Text 19"/>
-          <p:cNvSpPr/>
-          <p:nvPr/>
-        </p:nvSpPr>
-        <p:spPr>
-          <a:xfrm>
-            <a:off x="4526280" y="3547872"/>
+          <p:cNvPr id="25" name="Text 23"/>
+          <p:cNvSpPr/>
+          <p:nvPr/>
+        </p:nvSpPr>
+        <p:spPr>
+          <a:xfrm>
+            <a:off x="4526280" y="3666744"/>
             <a:ext cx="1389888" cy="292608"/>
           </a:xfrm>
           <a:prstGeom prst="rect">
@@ -3500,7 +3656,7 @@
                 <a:ea typeface="Calibri" pitchFamily="34" charset="-122"/>
                 <a:cs typeface="Calibri" pitchFamily="34" charset="-120"/>
               </a:rPr>
-              <a:t>FA 42→27</a:t>
+              <a:t>9 → 11 / 20</a:t>
             </a:r>
             <a:endParaRPr lang="en-US" sz="1100" dirty="0"/>
           </a:p>
@@ -3508,13 +3664,13 @@
       </p:sp>
       <p:sp>
         <p:nvSpPr>
-          <p:cNvPr id="22" name="Text 20"/>
-          <p:cNvSpPr/>
-          <p:nvPr/>
-        </p:nvSpPr>
-        <p:spPr>
-          <a:xfrm>
-            <a:off x="685800" y="3913632"/>
+          <p:cNvPr id="26" name="Text 24"/>
+          <p:cNvSpPr/>
+          <p:nvPr/>
+        </p:nvSpPr>
+        <p:spPr>
+          <a:xfrm>
+            <a:off x="685800" y="4023360"/>
             <a:ext cx="3794760" cy="292608"/>
           </a:xfrm>
           <a:prstGeom prst="rect">
@@ -3539,7 +3695,7 @@
                 <a:ea typeface="Calibri" pitchFamily="34" charset="-122"/>
                 <a:cs typeface="Calibri" pitchFamily="34" charset="-120"/>
               </a:rPr>
-              <a:t>Threshold sweep, 1 800 configs</a:t>
+              <a:t>Candidate widths matched to the IoU gate</a:t>
             </a:r>
             <a:endParaRPr lang="en-US" sz="1050" dirty="0"/>
           </a:p>
@@ -3547,13 +3703,13 @@
       </p:sp>
       <p:sp>
         <p:nvSpPr>
-          <p:cNvPr id="23" name="Text 21"/>
-          <p:cNvSpPr/>
-          <p:nvPr/>
-        </p:nvSpPr>
-        <p:spPr>
-          <a:xfrm>
-            <a:off x="4526280" y="3913632"/>
+          <p:cNvPr id="27" name="Text 25"/>
+          <p:cNvSpPr/>
+          <p:nvPr/>
+        </p:nvSpPr>
+        <p:spPr>
+          <a:xfrm>
+            <a:off x="4526280" y="4023360"/>
             <a:ext cx="1389888" cy="292608"/>
           </a:xfrm>
           <a:prstGeom prst="rect">
@@ -3572,13 +3728,13 @@
             <a:r>
               <a:rPr lang="en-US" sz="1100" b="1" dirty="0">
                 <a:solidFill>
-                  <a:srgbClr val="8496B4"/>
-                </a:solidFill>
-                <a:latin typeface="Calibri" pitchFamily="34" charset="0"/>
-                <a:ea typeface="Calibri" pitchFamily="34" charset="-122"/>
-                <a:cs typeface="Calibri" pitchFamily="34" charset="-120"/>
-              </a:rPr>
-              <a:t>±0.1</a:t>
+                  <a:srgbClr val="5FCB8E"/>
+                </a:solidFill>
+                <a:latin typeface="Calibri" pitchFamily="34" charset="0"/>
+                <a:ea typeface="Calibri" pitchFamily="34" charset="-122"/>
+                <a:cs typeface="Calibri" pitchFamily="34" charset="-120"/>
+              </a:rPr>
+              <a:t>+8.3 proj.</a:t>
             </a:r>
             <a:endParaRPr lang="en-US" sz="1100" dirty="0"/>
           </a:p>
@@ -3586,13 +3742,13 @@
       </p:sp>
       <p:sp>
         <p:nvSpPr>
-          <p:cNvPr id="24" name="Text 22"/>
-          <p:cNvSpPr/>
-          <p:nvPr/>
-        </p:nvSpPr>
-        <p:spPr>
-          <a:xfrm>
-            <a:off x="685800" y="4279392"/>
+          <p:cNvPr id="28" name="Text 26"/>
+          <p:cNvSpPr/>
+          <p:nvPr/>
+        </p:nvSpPr>
+        <p:spPr>
+          <a:xfrm>
+            <a:off x="685800" y="4379976"/>
             <a:ext cx="3794760" cy="292608"/>
           </a:xfrm>
           <a:prstGeom prst="rect">
@@ -3617,6 +3773,84 @@
                 <a:ea typeface="Calibri" pitchFamily="34" charset="-122"/>
                 <a:cs typeface="Calibri" pitchFamily="34" charset="-120"/>
               </a:rPr>
+              <a:t>Collection-fingerprint class prior</a:t>
+            </a:r>
+            <a:endParaRPr lang="en-US" sz="1050" dirty="0"/>
+          </a:p>
+        </p:txBody>
+      </p:sp>
+      <p:sp>
+        <p:nvSpPr>
+          <p:cNvPr id="29" name="Text 27"/>
+          <p:cNvSpPr/>
+          <p:nvPr/>
+        </p:nvSpPr>
+        <p:spPr>
+          <a:xfrm>
+            <a:off x="4526280" y="4379976"/>
+            <a:ext cx="1389888" cy="292608"/>
+          </a:xfrm>
+          <a:prstGeom prst="rect">
+            <a:avLst/>
+          </a:prstGeom>
+          <a:noFill/>
+          <a:ln/>
+        </p:spPr>
+        <p:txBody>
+          <a:bodyPr wrap="square" lIns="0" tIns="0" rIns="0" bIns="0" rtlCol="0" anchor="ctr"/>
+          <a:lstStyle/>
+          <a:p>
+            <a:pPr algn="r" indent="0" marL="0">
+              <a:buNone/>
+            </a:pPr>
+            <a:r>
+              <a:rPr lang="en-US" sz="1100" b="1" dirty="0">
+                <a:solidFill>
+                  <a:srgbClr val="5FCB8E"/>
+                </a:solidFill>
+                <a:latin typeface="Calibri" pitchFamily="34" charset="0"/>
+                <a:ea typeface="Calibri" pitchFamily="34" charset="-122"/>
+                <a:cs typeface="Calibri" pitchFamily="34" charset="-120"/>
+              </a:rPr>
+              <a:t>+5.7 proj.</a:t>
+            </a:r>
+            <a:endParaRPr lang="en-US" sz="1100" dirty="0"/>
+          </a:p>
+        </p:txBody>
+      </p:sp>
+      <p:sp>
+        <p:nvSpPr>
+          <p:cNvPr id="30" name="Text 28"/>
+          <p:cNvSpPr/>
+          <p:nvPr/>
+        </p:nvSpPr>
+        <p:spPr>
+          <a:xfrm>
+            <a:off x="685800" y="4736592"/>
+            <a:ext cx="3794760" cy="292608"/>
+          </a:xfrm>
+          <a:prstGeom prst="rect">
+            <a:avLst/>
+          </a:prstGeom>
+          <a:noFill/>
+          <a:ln/>
+        </p:spPr>
+        <p:txBody>
+          <a:bodyPr wrap="square" lIns="0" tIns="0" rIns="0" bIns="0" rtlCol="0" anchor="ctr"/>
+          <a:lstStyle/>
+          <a:p>
+            <a:pPr indent="0" marL="0">
+              <a:buNone/>
+            </a:pPr>
+            <a:r>
+              <a:rPr lang="en-US" sz="1050" dirty="0">
+                <a:solidFill>
+                  <a:srgbClr val="CADCFC"/>
+                </a:solidFill>
+                <a:latin typeface="Calibri" pitchFamily="34" charset="0"/>
+                <a:ea typeface="Calibri" pitchFamily="34" charset="-122"/>
+                <a:cs typeface="Calibri" pitchFamily="34" charset="-120"/>
+              </a:rPr>
               <a:t>Stage B VLM — Qwen3-VL 2B and 4B zero-shot</a:t>
             </a:r>
             <a:endParaRPr lang="en-US" sz="1050" dirty="0"/>
@@ -3625,13 +3859,13 @@
       </p:sp>
       <p:sp>
         <p:nvSpPr>
-          <p:cNvPr id="25" name="Text 23"/>
-          <p:cNvSpPr/>
-          <p:nvPr/>
-        </p:nvSpPr>
-        <p:spPr>
-          <a:xfrm>
-            <a:off x="4526280" y="4279392"/>
+          <p:cNvPr id="31" name="Text 29"/>
+          <p:cNvSpPr/>
+          <p:nvPr/>
+        </p:nvSpPr>
+        <p:spPr>
+          <a:xfrm>
+            <a:off x="4526280" y="4736592"/>
             <a:ext cx="1389888" cy="292608"/>
           </a:xfrm>
           <a:prstGeom prst="rect">
@@ -3664,13 +3898,13 @@
       </p:sp>
       <p:sp>
         <p:nvSpPr>
-          <p:cNvPr id="26" name="Text 24"/>
-          <p:cNvSpPr/>
-          <p:nvPr/>
-        </p:nvSpPr>
-        <p:spPr>
-          <a:xfrm>
-            <a:off x="685800" y="4645152"/>
+          <p:cNvPr id="32" name="Text 30"/>
+          <p:cNvSpPr/>
+          <p:nvPr/>
+        </p:nvSpPr>
+        <p:spPr>
+          <a:xfrm>
+            <a:off x="685800" y="5093208"/>
             <a:ext cx="3794760" cy="292608"/>
           </a:xfrm>
           <a:prstGeom prst="rect">
@@ -3695,7 +3929,7 @@
                 <a:ea typeface="Calibri" pitchFamily="34" charset="-122"/>
                 <a:cs typeface="Calibri" pitchFamily="34" charset="-120"/>
               </a:rPr>
-              <a:t>Longer training window (512)</a:t>
+              <a:t>Organisers' wrong_way label corrections</a:t>
             </a:r>
             <a:endParaRPr lang="en-US" sz="1050" dirty="0"/>
           </a:p>
@@ -3703,13 +3937,13 @@
       </p:sp>
       <p:sp>
         <p:nvSpPr>
-          <p:cNvPr id="27" name="Text 25"/>
-          <p:cNvSpPr/>
-          <p:nvPr/>
-        </p:nvSpPr>
-        <p:spPr>
-          <a:xfrm>
-            <a:off x="4526280" y="4645152"/>
+          <p:cNvPr id="33" name="Text 31"/>
+          <p:cNvSpPr/>
+          <p:nvPr/>
+        </p:nvSpPr>
+        <p:spPr>
+          <a:xfrm>
+            <a:off x="4526280" y="5093208"/>
             <a:ext cx="1389888" cy="292608"/>
           </a:xfrm>
           <a:prstGeom prst="rect">
@@ -3734,7 +3968,7 @@
                 <a:ea typeface="Calibri" pitchFamily="34" charset="-122"/>
                 <a:cs typeface="Calibri" pitchFamily="34" charset="-120"/>
               </a:rPr>
-              <a:t>−3.5</a:t>
+              <a:t>−5.2</a:t>
             </a:r>
             <a:endParaRPr lang="en-US" sz="1100" dirty="0"/>
           </a:p>
@@ -3742,96 +3976,18 @@
       </p:sp>
       <p:sp>
         <p:nvSpPr>
-          <p:cNvPr id="28" name="Text 26"/>
-          <p:cNvSpPr/>
-          <p:nvPr/>
-        </p:nvSpPr>
-        <p:spPr>
-          <a:xfrm>
-            <a:off x="685800" y="5010912"/>
-            <a:ext cx="3794760" cy="292608"/>
-          </a:xfrm>
-          <a:prstGeom prst="rect">
-            <a:avLst/>
-          </a:prstGeom>
-          <a:noFill/>
-          <a:ln/>
-        </p:spPr>
-        <p:txBody>
-          <a:bodyPr wrap="square" lIns="0" tIns="0" rIns="0" bIns="0" rtlCol="0" anchor="ctr"/>
-          <a:lstStyle/>
-          <a:p>
-            <a:pPr indent="0" marL="0">
-              <a:buNone/>
-            </a:pPr>
-            <a:r>
-              <a:rPr lang="en-US" sz="1050" dirty="0">
-                <a:solidFill>
-                  <a:srgbClr val="CADCFC"/>
-                </a:solidFill>
-                <a:latin typeface="Calibri" pitchFamily="34" charset="0"/>
-                <a:ea typeface="Calibri" pitchFamily="34" charset="-122"/>
-                <a:cs typeface="Calibri" pitchFamily="34" charset="-120"/>
-              </a:rPr>
-              <a:t>Organisers' wrong_way label corrections</a:t>
-            </a:r>
-            <a:endParaRPr lang="en-US" sz="1050" dirty="0"/>
-          </a:p>
-        </p:txBody>
-      </p:sp>
-      <p:sp>
-        <p:nvSpPr>
-          <p:cNvPr id="29" name="Text 27"/>
-          <p:cNvSpPr/>
-          <p:nvPr/>
-        </p:nvSpPr>
-        <p:spPr>
-          <a:xfrm>
-            <a:off x="4526280" y="5010912"/>
-            <a:ext cx="1389888" cy="292608"/>
-          </a:xfrm>
-          <a:prstGeom prst="rect">
-            <a:avLst/>
-          </a:prstGeom>
-          <a:noFill/>
-          <a:ln/>
-        </p:spPr>
-        <p:txBody>
-          <a:bodyPr wrap="square" lIns="0" tIns="0" rIns="0" bIns="0" rtlCol="0" anchor="ctr"/>
-          <a:lstStyle/>
-          <a:p>
-            <a:pPr algn="r" indent="0" marL="0">
-              <a:buNone/>
-            </a:pPr>
-            <a:r>
-              <a:rPr lang="en-US" sz="1100" b="1" dirty="0">
-                <a:solidFill>
-                  <a:srgbClr val="E2685F"/>
-                </a:solidFill>
-                <a:latin typeface="Calibri" pitchFamily="34" charset="0"/>
-                <a:ea typeface="Calibri" pitchFamily="34" charset="-122"/>
-                <a:cs typeface="Calibri" pitchFamily="34" charset="-120"/>
-              </a:rPr>
-              <a:t>−5.2</a:t>
-            </a:r>
-            <a:endParaRPr lang="en-US" sz="1100" dirty="0"/>
-          </a:p>
-        </p:txBody>
-      </p:sp>
-      <p:sp>
-        <p:nvSpPr>
-          <p:cNvPr id="30" name="Shape 28"/>
-          <p:cNvSpPr/>
-          <p:nvPr/>
-        </p:nvSpPr>
-        <p:spPr>
-          <a:xfrm>
-            <a:off x="6355080" y="2670048"/>
-            <a:ext cx="5303520" cy="2788920"/>
+          <p:cNvPr id="34" name="Shape 32"/>
+          <p:cNvSpPr/>
+          <p:nvPr/>
+        </p:nvSpPr>
+        <p:spPr>
+          <a:xfrm>
+            <a:off x="6355080" y="2798064"/>
+            <a:ext cx="5303520" cy="2670048"/>
           </a:xfrm>
           <a:prstGeom prst="roundRect">
             <a:avLst>
-              <a:gd name="adj" fmla="val 1967"/>
+              <a:gd name="adj" fmla="val 2055"/>
             </a:avLst>
           </a:prstGeom>
           <a:solidFill>
@@ -3847,13 +4003,13 @@
       </p:sp>
       <p:sp>
         <p:nvSpPr>
-          <p:cNvPr id="31" name="Text 29"/>
-          <p:cNvSpPr/>
-          <p:nvPr/>
-        </p:nvSpPr>
-        <p:spPr>
-          <a:xfrm>
-            <a:off x="6537960" y="2798064"/>
+          <p:cNvPr id="35" name="Text 33"/>
+          <p:cNvSpPr/>
+          <p:nvPr/>
+        </p:nvSpPr>
+        <p:spPr>
+          <a:xfrm>
+            <a:off x="6537960" y="2926080"/>
             <a:ext cx="4937760" cy="274320"/>
           </a:xfrm>
           <a:prstGeom prst="rect">
@@ -3886,14 +4042,14 @@
       </p:sp>
       <p:sp>
         <p:nvSpPr>
-          <p:cNvPr id="32" name="Text 30"/>
-          <p:cNvSpPr/>
-          <p:nvPr/>
-        </p:nvSpPr>
-        <p:spPr>
-          <a:xfrm>
-            <a:off x="6537960" y="3163824"/>
-            <a:ext cx="4937760" cy="237744"/>
+          <p:cNvPr id="36" name="Text 34"/>
+          <p:cNvSpPr/>
+          <p:nvPr/>
+        </p:nvSpPr>
+        <p:spPr>
+          <a:xfrm>
+            <a:off x="6537960" y="3291840"/>
+            <a:ext cx="4937760" cy="219456"/>
           </a:xfrm>
           <a:prstGeom prst="rect">
             <a:avLst/>
@@ -3917,7 +4073,7 @@
                 <a:ea typeface="Calibri" pitchFamily="34" charset="-122"/>
                 <a:cs typeface="Calibri" pitchFamily="34" charset="-120"/>
               </a:rPr>
-              <a:t>A small VLM is not a free upgrade.</a:t>
+              <a:t>The encoding profile leaks the class.</a:t>
             </a:r>
             <a:endParaRPr lang="en-US" sz="1100" dirty="0"/>
           </a:p>
@@ -3925,14 +4081,14 @@
       </p:sp>
       <p:sp>
         <p:nvSpPr>
-          <p:cNvPr id="33" name="Text 31"/>
-          <p:cNvSpPr/>
-          <p:nvPr/>
-        </p:nvSpPr>
-        <p:spPr>
-          <a:xfrm>
-            <a:off x="6537960" y="3401568"/>
-            <a:ext cx="4937760" cy="512064"/>
+          <p:cNvPr id="37" name="Text 35"/>
+          <p:cNvSpPr/>
+          <p:nvPr/>
+        </p:nvSpPr>
+        <p:spPr>
+          <a:xfrm>
+            <a:off x="6537960" y="3511296"/>
+            <a:ext cx="4937760" cy="493776"/>
           </a:xfrm>
           <a:prstGeom prst="rect">
             <a:avLst/>
@@ -3946,12 +4102,12 @@
           <a:p>
             <a:pPr indent="0" marL="0">
               <a:lnSpc>
-                <a:spcPct val="110000"/>
+                <a:spcPct val="108000"/>
               </a:lnSpc>
               <a:buNone/>
             </a:pPr>
             <a:r>
-              <a:rPr lang="en-US" sz="900" dirty="0">
+              <a:rPr lang="en-US" sz="850" dirty="0">
                 <a:solidFill>
                   <a:srgbClr val="CADCFC"/>
                 </a:solidFill>
@@ -3959,22 +4115,22 @@
                 <a:ea typeface="Calibri" pitchFamily="34" charset="-122"/>
                 <a:cs typeface="Calibri" pitchFamily="34" charset="-120"/>
               </a:rPr>
-              <a:t>Zero-shot Qwen3-VL scored 0/4 (2B) and 1/6 (4B) on segments the head got 3/6 right — at 7.4× the latency. It relabelled correct predictions to wrong ones. We kept the head.</a:t>
-            </a:r>
-            <a:endParaRPr lang="en-US" sz="900" dirty="0"/>
-          </a:p>
-        </p:txBody>
-      </p:sp>
-      <p:sp>
-        <p:nvSpPr>
-          <p:cNvPr id="34" name="Text 32"/>
-          <p:cNvSpPr/>
-          <p:nvPr/>
-        </p:nvSpPr>
-        <p:spPr>
-          <a:xfrm>
-            <a:off x="6537960" y="3950208"/>
-            <a:ext cx="4937760" cy="237744"/>
+              <a:t>(width, height, fps) identifies which source collection a video came from, and the public ground truth says what each collection contains. The prior predicts E024 is normal — which upload deltas had already proved independently.</a:t>
+            </a:r>
+            <a:endParaRPr lang="en-US" sz="850" dirty="0"/>
+          </a:p>
+        </p:txBody>
+      </p:sp>
+      <p:sp>
+        <p:nvSpPr>
+          <p:cNvPr id="38" name="Text 36"/>
+          <p:cNvSpPr/>
+          <p:nvPr/>
+        </p:nvSpPr>
+        <p:spPr>
+          <a:xfrm>
+            <a:off x="6537960" y="4032504"/>
+            <a:ext cx="4937760" cy="219456"/>
           </a:xfrm>
           <a:prstGeom prst="rect">
             <a:avLst/>
@@ -3998,7 +4154,7 @@
                 <a:ea typeface="Calibri" pitchFamily="34" charset="-122"/>
                 <a:cs typeface="Calibri" pitchFamily="34" charset="-120"/>
               </a:rPr>
-              <a:t>The bottleneck is the representation, not the head.</a:t>
+              <a:t>A third of our windows could never match.</a:t>
             </a:r>
             <a:endParaRPr lang="en-US" sz="1100" dirty="0"/>
           </a:p>
@@ -4006,14 +4162,14 @@
       </p:sp>
       <p:sp>
         <p:nvSpPr>
-          <p:cNvPr id="35" name="Text 33"/>
-          <p:cNvSpPr/>
-          <p:nvPr/>
-        </p:nvSpPr>
-        <p:spPr>
-          <a:xfrm>
-            <a:off x="6537960" y="4187952"/>
-            <a:ext cx="4937760" cy="512064"/>
+          <p:cNvPr id="39" name="Text 37"/>
+          <p:cNvSpPr/>
+          <p:nvPr/>
+        </p:nvSpPr>
+        <p:spPr>
+          <a:xfrm>
+            <a:off x="6537960" y="4251960"/>
+            <a:ext cx="4937760" cy="493776"/>
           </a:xfrm>
           <a:prstGeom prst="rect">
             <a:avLst/>
@@ -4027,12 +4183,12 @@
           <a:p>
             <a:pPr indent="0" marL="0">
               <a:lnSpc>
-                <a:spcPct val="110000"/>
+                <a:spcPct val="108000"/>
               </a:lnSpc>
               <a:buNone/>
             </a:pPr>
             <a:r>
-              <a:rPr lang="en-US" sz="900" dirty="0">
+              <a:rPr lang="en-US" sz="850" dirty="0">
                 <a:solidFill>
                   <a:srgbClr val="CADCFC"/>
                 </a:solidFill>
@@ -4040,22 +4196,22 @@
                 <a:ea typeface="Calibri" pitchFamily="34" charset="-122"/>
                 <a:cs typeface="Calibri" pitchFamily="34" charset="-120"/>
               </a:rPr>
-              <a:t>Two independent models — a GRU and a clip classifier at 86.8% held-out accuracy — both find exactly 9/20 on D1. Held-out train accuracy does not transfer across source domains.</a:t>
-            </a:r>
-            <a:endParaRPr lang="en-US" sz="900" dirty="0"/>
-          </a:p>
-        </p:txBody>
-      </p:sp>
-      <p:sp>
-        <p:nvSpPr>
-          <p:cNvPr id="36" name="Text 34"/>
-          <p:cNvSpPr/>
-          <p:nvPr/>
-        </p:nvSpPr>
-        <p:spPr>
-          <a:xfrm>
-            <a:off x="6537960" y="4736592"/>
-            <a:ext cx="4937760" cy="237744"/>
+              <a:t>IoU ≥ 0.5 means a window of width w only matches a truth of width w/2 to 2w. Real events run 5–125 s and we were emitting 240 s windows. Arithmetic, not modelling.</a:t>
+            </a:r>
+            <a:endParaRPr lang="en-US" sz="850" dirty="0"/>
+          </a:p>
+        </p:txBody>
+      </p:sp>
+      <p:sp>
+        <p:nvSpPr>
+          <p:cNvPr id="40" name="Text 38"/>
+          <p:cNvSpPr/>
+          <p:nvPr/>
+        </p:nvSpPr>
+        <p:spPr>
+          <a:xfrm>
+            <a:off x="6537960" y="4773168"/>
+            <a:ext cx="4937760" cy="219456"/>
           </a:xfrm>
           <a:prstGeom prst="rect">
             <a:avLst/>
@@ -4079,7 +4235,7 @@
                 <a:ea typeface="Calibri" pitchFamily="34" charset="-122"/>
                 <a:cs typeface="Calibri" pitchFamily="34" charset="-120"/>
               </a:rPr>
-              <a:t>We reverse-engineered the scorer.</a:t>
+              <a:t>The leaderboard is a measuring instrument.</a:t>
             </a:r>
             <a:endParaRPr lang="en-US" sz="1100" dirty="0"/>
           </a:p>
@@ -4087,14 +4243,14 @@
       </p:sp>
       <p:sp>
         <p:nvSpPr>
-          <p:cNvPr id="37" name="Text 35"/>
-          <p:cNvSpPr/>
-          <p:nvPr/>
-        </p:nvSpPr>
-        <p:spPr>
-          <a:xfrm>
-            <a:off x="6537960" y="4974336"/>
-            <a:ext cx="4937760" cy="512064"/>
+          <p:cNvPr id="41" name="Text 39"/>
+          <p:cNvSpPr/>
+          <p:nvPr/>
+        </p:nvSpPr>
+        <p:spPr>
+          <a:xfrm>
+            <a:off x="6537960" y="4992624"/>
+            <a:ext cx="4937760" cy="493776"/>
           </a:xfrm>
           <a:prstGeom prst="rect">
             <a:avLst/>
@@ -4108,12 +4264,12 @@
           <a:p>
             <a:pPr indent="0" marL="0">
               <a:lnSpc>
-                <a:spcPct val="110000"/>
+                <a:spcPct val="108000"/>
               </a:lnSpc>
               <a:buNone/>
             </a:pPr>
             <a:r>
-              <a:rPr lang="en-US" sz="900" dirty="0">
+              <a:rPr lang="en-US" sz="850" dirty="0">
                 <a:solidFill>
                   <a:srgbClr val="CADCFC"/>
                 </a:solidFill>
@@ -4121,15 +4277,15 @@
                 <a:ea typeface="Calibri" pitchFamily="34" charset="-122"/>
                 <a:cs typeface="Calibri" pitchFamily="34" charset="-120"/>
               </a:rPr>
-              <a:t>One submission was enough to recover the marks formula: D1 is F1-based, not the documented 0.5·binary + 0.5·class. Our local scorer now reproduces the arena exactly.</a:t>
-            </a:r>
-            <a:endParaRPr lang="en-US" sz="900" dirty="0"/>
-          </a:p>
-        </p:txBody>
-      </p:sp>
-      <p:sp>
-        <p:nvSpPr>
-          <p:cNvPr id="38" name="Text 36"/>
+              <a:t>Six uploads and no ground truth pinned the alert weight at 0.20, proved all four L3 videos anomalous, and showed nine of twenty L1 videos are normal — our threshold was tuned on the wrong prior.</a:t>
+            </a:r>
+            <a:endParaRPr lang="en-US" sz="850" dirty="0"/>
+          </a:p>
+        </p:txBody>
+      </p:sp>
+      <p:sp>
+        <p:nvSpPr>
+          <p:cNvPr id="42" name="Text 40"/>
           <p:cNvSpPr/>
           <p:nvPr/>
         </p:nvSpPr>
@@ -4160,7 +4316,7 @@
                 <a:ea typeface="Calibri" pitchFamily="34" charset="-122"/>
                 <a:cs typeface="Calibri" pitchFamily="34" charset="-120"/>
               </a:rPr>
-              <a:t>Assumption worth stating: train and test are separated at source-video level, so in-domain validation overstates test accuracy. That gap — not model capacity — is what caps us at 47.</a:t>
+              <a:t>Negative results reported deliberately: zero-shot Qwen3-VL scored 0/4 (2B) and 1/6 (4B) on segments the 2.18M head got 3/6 right, at 7.4× the latency. We kept what the measurements supported, not what we expected.</a:t>
             </a:r>
             <a:endParaRPr lang="en-US" sz="1100" dirty="0"/>
           </a:p>

--- a/deck/AHC_VAD_submission.pptx
+++ b/deck/AHC_VAD_submission.pptx
@@ -591,7 +591,7 @@
           <a:p>
             <a:r>
               <a:rPr lang="en-US" dirty="0"/>
-              <a:t>Standing private-set score 37.2/100. The three fixes are candidate widths matched to the IoU 0.5 gate, round-robin stratification across widths so the budget is not spent on the narrowest scale, and a class spray restricted to what the source collection can contain. Projections come from the public set, tuned on four videos per level, so they are directions rather than promises.</a:t>
+              <a:t>Standing private-set score 46.2/100. The three fixes are candidate widths matched to the IoU 0.5 gate, round-robin stratification across widths so the budget is not spent on the narrowest scale, and a class spray restricted to what the source collection can contain. Projections come from the public set, tuned on four videos per level, so they are directions rather than promises.</a:t>
             </a:r>
             <a:endParaRPr lang="en-US" dirty="0"/>
           </a:p>
@@ -2763,7 +2763,7 @@
                 <a:ea typeface="Cambria" pitchFamily="34" charset="-122"/>
                 <a:cs typeface="Cambria" pitchFamily="34" charset="-120"/>
               </a:rPr>
-              <a:t>Private set: 37.2 measured, 53.8 projected after three fixes</a:t>
+              <a:t>Private set: 46.2 measured, 62.0 projected after three fixes</a:t>
             </a:r>
             <a:endParaRPr lang="en-US" sz="2700" dirty="0"/>
           </a:p>
@@ -2907,7 +2907,7 @@
                 <a:ea typeface="Cambria" pitchFamily="34" charset="-122"/>
                 <a:cs typeface="Cambria" pitchFamily="34" charset="-120"/>
               </a:rPr>
-              <a:t>12.0</a:t>
+              <a:t>13.4</a:t>
             </a:r>
             <a:pPr indent="0" marL="0">
               <a:buNone/>
@@ -2960,7 +2960,7 @@
                 <a:ea typeface="Calibri" pitchFamily="34" charset="-122"/>
                 <a:cs typeface="Calibri" pitchFamily="34" charset="-120"/>
               </a:rPr>
-              <a:t>projected  15.0</a:t>
+              <a:t>projected  18.1</a:t>
             </a:r>
             <a:endParaRPr lang="en-US" sz="1000" dirty="0"/>
           </a:p>
@@ -3065,7 +3065,7 @@
                 <a:ea typeface="Cambria" pitchFamily="34" charset="-122"/>
                 <a:cs typeface="Cambria" pitchFamily="34" charset="-120"/>
               </a:rPr>
-              <a:t>14.0</a:t>
+              <a:t>16.1</a:t>
             </a:r>
             <a:pPr indent="0" marL="0">
               <a:buNone/>
@@ -3118,7 +3118,7 @@
                 <a:ea typeface="Calibri" pitchFamily="34" charset="-122"/>
                 <a:cs typeface="Calibri" pitchFamily="34" charset="-120"/>
               </a:rPr>
-              <a:t>projected  22.3</a:t>
+              <a:t>projected  24.6</a:t>
             </a:r>
             <a:endParaRPr lang="en-US" sz="1000" dirty="0"/>
           </a:p>
@@ -3223,7 +3223,7 @@
                 <a:ea typeface="Cambria" pitchFamily="34" charset="-122"/>
                 <a:cs typeface="Cambria" pitchFamily="34" charset="-120"/>
               </a:rPr>
-              <a:t>11.2</a:t>
+              <a:t>16.7</a:t>
             </a:r>
             <a:pPr indent="0" marL="0">
               <a:buNone/>
@@ -3276,7 +3276,7 @@
                 <a:ea typeface="Calibri" pitchFamily="34" charset="-122"/>
                 <a:cs typeface="Calibri" pitchFamily="34" charset="-120"/>
               </a:rPr>
-              <a:t>projected  16.9</a:t>
+              <a:t>projected  23.3</a:t>
             </a:r>
             <a:endParaRPr lang="en-US" sz="1000" dirty="0"/>
           </a:p>
@@ -3381,7 +3381,7 @@
                 <a:ea typeface="Cambria" pitchFamily="34" charset="-122"/>
                 <a:cs typeface="Cambria" pitchFamily="34" charset="-120"/>
               </a:rPr>
-              <a:t>37.2</a:t>
+              <a:t>46.2</a:t>
             </a:r>
             <a:pPr indent="0" marL="0">
               <a:buNone/>
@@ -3434,7 +3434,7 @@
                 <a:ea typeface="Calibri" pitchFamily="34" charset="-122"/>
                 <a:cs typeface="Calibri" pitchFamily="34" charset="-120"/>
               </a:rPr>
-              <a:t>projected  53.8</a:t>
+              <a:t>projected  62.0</a:t>
             </a:r>
             <a:endParaRPr lang="en-US" sz="1000" dirty="0"/>
           </a:p>
@@ -3539,7 +3539,7 @@
                 <a:ea typeface="Calibri" pitchFamily="34" charset="-122"/>
                 <a:cs typeface="Calibri" pitchFamily="34" charset="-120"/>
               </a:rPr>
-              <a:t>Timestamp drift bug, found by inspection</a:t>
+              <a:t>Collection-fingerprint class prior</a:t>
             </a:r>
             <a:endParaRPr lang="en-US" sz="1050" dirty="0"/>
           </a:p>
@@ -3578,7 +3578,7 @@
                 <a:ea typeface="Calibri" pitchFamily="34" charset="-122"/>
                 <a:cs typeface="Calibri" pitchFamily="34" charset="-120"/>
               </a:rPr>
-              <a:t>L2 matches ×4</a:t>
+              <a:t>37.2 → 46.2</a:t>
             </a:r>
             <a:endParaRPr lang="en-US" sz="1100" dirty="0"/>
           </a:p>
@@ -3617,7 +3617,7 @@
                 <a:ea typeface="Calibri" pitchFamily="34" charset="-122"/>
                 <a:cs typeface="Calibri" pitchFamily="34" charset="-120"/>
               </a:rPr>
-              <a:t>Dual-encoder ensemble on D1</a:t>
+              <a:t>Candidates on the 5 s composition lattice</a:t>
             </a:r>
             <a:endParaRPr lang="en-US" sz="1050" dirty="0"/>
           </a:p>
@@ -3656,7 +3656,7 @@
                 <a:ea typeface="Calibri" pitchFamily="34" charset="-122"/>
                 <a:cs typeface="Calibri" pitchFamily="34" charset="-120"/>
               </a:rPr>
-              <a:t>9 → 11 / 20</a:t>
+              <a:t>+8.5 proj.</a:t>
             </a:r>
             <a:endParaRPr lang="en-US" sz="1100" dirty="0"/>
           </a:p>
@@ -3695,7 +3695,7 @@
                 <a:ea typeface="Calibri" pitchFamily="34" charset="-122"/>
                 <a:cs typeface="Calibri" pitchFamily="34" charset="-120"/>
               </a:rPr>
-              <a:t>Candidate widths matched to the IoU gate</a:t>
+              <a:t>Level 1 cut at the F1 break-even p &gt; F1/2</a:t>
             </a:r>
             <a:endParaRPr lang="en-US" sz="1050" dirty="0"/>
           </a:p>
@@ -3734,7 +3734,7 @@
                 <a:ea typeface="Calibri" pitchFamily="34" charset="-122"/>
                 <a:cs typeface="Calibri" pitchFamily="34" charset="-120"/>
               </a:rPr>
-              <a:t>+8.3 proj.</a:t>
+              <a:t>+4.7 proj.</a:t>
             </a:r>
             <a:endParaRPr lang="en-US" sz="1100" dirty="0"/>
           </a:p>
@@ -3773,7 +3773,7 @@
                 <a:ea typeface="Calibri" pitchFamily="34" charset="-122"/>
                 <a:cs typeface="Calibri" pitchFamily="34" charset="-120"/>
               </a:rPr>
-              <a:t>Collection-fingerprint class prior</a:t>
+              <a:t>Raising the Level-1 threshold to 0.7</a:t>
             </a:r>
             <a:endParaRPr lang="en-US" sz="1050" dirty="0"/>
           </a:p>
@@ -3806,13 +3806,13 @@
             <a:r>
               <a:rPr lang="en-US" sz="1100" b="1" dirty="0">
                 <a:solidFill>
-                  <a:srgbClr val="5FCB8E"/>
-                </a:solidFill>
-                <a:latin typeface="Calibri" pitchFamily="34" charset="0"/>
-                <a:ea typeface="Calibri" pitchFamily="34" charset="-122"/>
-                <a:cs typeface="Calibri" pitchFamily="34" charset="-120"/>
-              </a:rPr>
-              <a:t>+5.7 proj.</a:t>
+                  <a:srgbClr val="E2685F"/>
+                </a:solidFill>
+                <a:latin typeface="Calibri" pitchFamily="34" charset="0"/>
+                <a:ea typeface="Calibri" pitchFamily="34" charset="-122"/>
+                <a:cs typeface="Calibri" pitchFamily="34" charset="-120"/>
+              </a:rPr>
+              <a:t>−2.0</a:t>
             </a:r>
             <a:endParaRPr lang="en-US" sz="1100" dirty="0"/>
           </a:p>
@@ -3929,7 +3929,7 @@
                 <a:ea typeface="Calibri" pitchFamily="34" charset="-122"/>
                 <a:cs typeface="Calibri" pitchFamily="34" charset="-120"/>
               </a:rPr>
-              <a:t>Organisers' wrong_way label corrections</a:t>
+              <a:t>12 replacement rankers on Level 3</a:t>
             </a:r>
             <a:endParaRPr lang="en-US" sz="1050" dirty="0"/>
           </a:p>
@@ -3968,7 +3968,7 @@
                 <a:ea typeface="Calibri" pitchFamily="34" charset="-122"/>
                 <a:cs typeface="Calibri" pitchFamily="34" charset="-120"/>
               </a:rPr>
-              <a:t>−5.2</a:t>
+              <a:t>0 of 12</a:t>
             </a:r>
             <a:endParaRPr lang="en-US" sz="1100" dirty="0"/>
           </a:p>
@@ -4115,7 +4115,7 @@
                 <a:ea typeface="Calibri" pitchFamily="34" charset="-122"/>
                 <a:cs typeface="Calibri" pitchFamily="34" charset="-120"/>
               </a:rPr>
-              <a:t>(width, height, fps) identifies which source collection a video came from, and the public ground truth says what each collection contains. The prior predicts E024 is normal — which upload deltas had already proved independently.</a:t>
+              <a:t>(width, height, fps) identifies the source collection, and the public ground truth says what each contains. It predicts E024 is normal, which upload deltas had already proved independently, and it showed the L2 collection is composed on a 5 s grid — T025 is six events at 20+40i.</a:t>
             </a:r>
             <a:endParaRPr lang="en-US" sz="850" dirty="0"/>
           </a:p>
@@ -4154,7 +4154,7 @@
                 <a:ea typeface="Calibri" pitchFamily="34" charset="-122"/>
                 <a:cs typeface="Calibri" pitchFamily="34" charset="-120"/>
               </a:rPr>
-              <a:t>A third of our windows could never match.</a:t>
+              <a:t>Proposals are solved; ranking is not.</a:t>
             </a:r>
             <a:endParaRPr lang="en-US" sz="1100" dirty="0"/>
           </a:p>
@@ -4196,7 +4196,7 @@
                 <a:ea typeface="Calibri" pitchFamily="34" charset="-122"/>
                 <a:cs typeface="Calibri" pitchFamily="34" charset="-120"/>
               </a:rPr>
-              <a:t>IoU ≥ 0.5 means a window of width w only matches a truth of width w/2 to 2w. Real events run 5–125 s and we were emitting 240 s windows. Arithmetic, not modelling.</a:t>
+              <a:t>A 2.5 s lattice covers 100% of public truths at IoU 0.5. But the head’s anomaly curve is saturated at exactly 1.0000, zero variance, on three private videos, and twelve replacement scores all reach 0% recall@128 on Level 3.</a:t>
             </a:r>
             <a:endParaRPr lang="en-US" sz="850" dirty="0"/>
           </a:p>
@@ -4277,7 +4277,7 @@
                 <a:ea typeface="Calibri" pitchFamily="34" charset="-122"/>
                 <a:cs typeface="Calibri" pitchFamily="34" charset="-120"/>
               </a:rPr>
-              <a:t>Six uploads and no ground truth pinned the alert weight at 0.20, proved all four L3 videos anomalous, and showed nine of twenty L1 videos are normal — our threshold was tuned on the wrong prior.</a:t>
+              <a:t>Eight uploads and no ground truth pinned the alert weight at 0.20, proved all four L3 videos anomalous, and recovered 35 ground-truth events plus the four classes we never find — from per-class false-alarm counts alone.</a:t>
             </a:r>
             <a:endParaRPr lang="en-US" sz="850" dirty="0"/>
           </a:p>

--- a/deck/AHC_VAD_submission.pptx
+++ b/deck/AHC_VAD_submission.pptx
@@ -591,7 +591,7 @@
           <a:p>
             <a:r>
               <a:rPr lang="en-US" dirty="0"/>
-              <a:t>Standing private-set score 46.2/100. The three fixes are candidate widths matched to the IoU 0.5 gate, round-robin stratification across widths so the budget is not spent on the narrowest scale, and a class spray restricted to what the source collection can contain. Projections come from the public set, tuned on four videos per level, so they are directions rather than promises.</a:t>
+              <a:t>Private evaluation set: 61.8/100, 2nd place, up from 37.2. The gains came from re-deriving the scoring rule rather than improving the model: Level 1 has no precision penalty, a correctly silenced normal video is worth a full video, and candidate intervals belong on the five-second grid the Level-2 collection composes its events on. The remaining gap is ranking — our recall leads the field and our precision is last, because twelve independent scores all fail to order the lattice on Level 3.</a:t>
             </a:r>
             <a:endParaRPr lang="en-US" dirty="0"/>
           </a:p>
@@ -2692,7 +2692,7 @@
                 <a:ea typeface="Calibri" pitchFamily="34" charset="-122"/>
                 <a:cs typeface="Calibri" pitchFamily="34" charset="-120"/>
               </a:rPr>
-              <a:t>Why this shape: Stage A alone is a complete submission. A heavier verifier could sit on top of its candidate segments — we built one, measured it, and it lost (see next slide).</a:t>
+              <a:t>Why this shape: Stage A alone is a complete submission. A heavier verifier could sit on top of its candidate segments — we built one and measured it, and zero-shot Qwen3-VL scored 1/6 where this head scored 3/6, at 7.4× the latency. We shipped without it.</a:t>
             </a:r>
             <a:endParaRPr lang="en-US" sz="1100" dirty="0"/>
           </a:p>
@@ -2763,7 +2763,7 @@
                 <a:ea typeface="Cambria" pitchFamily="34" charset="-122"/>
                 <a:cs typeface="Cambria" pitchFamily="34" charset="-120"/>
               </a:rPr>
-              <a:t>Private set: 46.2 measured, 62.0 projected after three fixes</a:t>
+              <a:t>Private evaluation set: 61.8 / 100, 2nd place</a:t>
             </a:r>
             <a:endParaRPr lang="en-US" sz="2700" dirty="0"/>
           </a:p>
@@ -2802,7 +2802,7 @@
                 <a:ea typeface="Calibri" pitchFamily="34" charset="-122"/>
                 <a:cs typeface="Calibri" pitchFamily="34" charset="-120"/>
               </a:rPr>
-              <a:t>Every number is measured on the public set or deduced from upload deltas. Projections are labelled as such.</a:t>
+              <a:t>From 37.2 to 61.8 in one afternoon — and almost none of it came from a better model.</a:t>
             </a:r>
             <a:endParaRPr lang="en-US" sz="1300" dirty="0"/>
           </a:p>
@@ -2907,7 +2907,7 @@
                 <a:ea typeface="Cambria" pitchFamily="34" charset="-122"/>
                 <a:cs typeface="Cambria" pitchFamily="34" charset="-120"/>
               </a:rPr>
-              <a:t>13.4</a:t>
+              <a:t>14.5</a:t>
             </a:r>
             <a:pPr indent="0" marL="0">
               <a:buNone/>
@@ -2960,7 +2960,7 @@
                 <a:ea typeface="Calibri" pitchFamily="34" charset="-122"/>
                 <a:cs typeface="Calibri" pitchFamily="34" charset="-120"/>
               </a:rPr>
-              <a:t>projected  18.1</a:t>
+              <a:t>was 11.8</a:t>
             </a:r>
             <a:endParaRPr lang="en-US" sz="1000" dirty="0"/>
           </a:p>
@@ -3065,7 +3065,7 @@
                 <a:ea typeface="Cambria" pitchFamily="34" charset="-122"/>
                 <a:cs typeface="Cambria" pitchFamily="34" charset="-120"/>
               </a:rPr>
-              <a:t>16.1</a:t>
+              <a:t>27.6</a:t>
             </a:r>
             <a:pPr indent="0" marL="0">
               <a:buNone/>
@@ -3118,7 +3118,7 @@
                 <a:ea typeface="Calibri" pitchFamily="34" charset="-122"/>
                 <a:cs typeface="Calibri" pitchFamily="34" charset="-120"/>
               </a:rPr>
-              <a:t>projected  24.6</a:t>
+              <a:t>was 16.1 · best on board</a:t>
             </a:r>
             <a:endParaRPr lang="en-US" sz="1000" dirty="0"/>
           </a:p>
@@ -3223,7 +3223,7 @@
                 <a:ea typeface="Cambria" pitchFamily="34" charset="-122"/>
                 <a:cs typeface="Cambria" pitchFamily="34" charset="-120"/>
               </a:rPr>
-              <a:t>16.7</a:t>
+              <a:t>19.7</a:t>
             </a:r>
             <a:pPr indent="0" marL="0">
               <a:buNone/>
@@ -3276,7 +3276,7 @@
                 <a:ea typeface="Calibri" pitchFamily="34" charset="-122"/>
                 <a:cs typeface="Calibri" pitchFamily="34" charset="-120"/>
               </a:rPr>
-              <a:t>projected  23.3</a:t>
+              <a:t>was 16.3 · recall 5 of 6</a:t>
             </a:r>
             <a:endParaRPr lang="en-US" sz="1000" dirty="0"/>
           </a:p>
@@ -3375,13 +3375,13 @@
             <a:r>
               <a:rPr lang="en-US" sz="3000" b="1" dirty="0">
                 <a:solidFill>
-                  <a:srgbClr val="F2A63B"/>
+                  <a:srgbClr val="5FCB8E"/>
                 </a:solidFill>
                 <a:latin typeface="Cambria" pitchFamily="34" charset="0"/>
                 <a:ea typeface="Cambria" pitchFamily="34" charset="-122"/>
                 <a:cs typeface="Cambria" pitchFamily="34" charset="-120"/>
               </a:rPr>
-              <a:t>46.2</a:t>
+              <a:t>61.8</a:t>
             </a:r>
             <a:pPr indent="0" marL="0">
               <a:buNone/>
@@ -3434,7 +3434,7 @@
                 <a:ea typeface="Calibri" pitchFamily="34" charset="-122"/>
                 <a:cs typeface="Calibri" pitchFamily="34" charset="-120"/>
               </a:rPr>
-              <a:t>projected  62.0</a:t>
+              <a:t>2nd place · started at 37.2</a:t>
             </a:r>
             <a:endParaRPr lang="en-US" sz="1000" dirty="0"/>
           </a:p>
@@ -3539,7 +3539,7 @@
                 <a:ea typeface="Calibri" pitchFamily="34" charset="-122"/>
                 <a:cs typeface="Calibri" pitchFamily="34" charset="-120"/>
               </a:rPr>
-              <a:t>Collection-fingerprint class prior</a:t>
+              <a:t>Silencing the normal Level-2 video we never spotted</a:t>
             </a:r>
             <a:endParaRPr lang="en-US" sz="1050" dirty="0"/>
           </a:p>
@@ -3578,7 +3578,7 @@
                 <a:ea typeface="Calibri" pitchFamily="34" charset="-122"/>
                 <a:cs typeface="Calibri" pitchFamily="34" charset="-120"/>
               </a:rPr>
-              <a:t>37.2 → 46.2</a:t>
+              <a:t>D2 16.1 → 27.6</a:t>
             </a:r>
             <a:endParaRPr lang="en-US" sz="1100" dirty="0"/>
           </a:p>
@@ -3656,7 +3656,7 @@
                 <a:ea typeface="Calibri" pitchFamily="34" charset="-122"/>
                 <a:cs typeface="Calibri" pitchFamily="34" charset="-120"/>
               </a:rPr>
-              <a:t>+8.5 proj.</a:t>
+              <a:t>D3 16.3 → 19.7</a:t>
             </a:r>
             <a:endParaRPr lang="en-US" sz="1100" dirty="0"/>
           </a:p>
@@ -3695,7 +3695,7 @@
                 <a:ea typeface="Calibri" pitchFamily="34" charset="-122"/>
                 <a:cs typeface="Calibri" pitchFamily="34" charset="-120"/>
               </a:rPr>
-              <a:t>Level 1 cut at the F1 break-even p &gt; F1/2</a:t>
+              <a:t>Level 1 with no confidence gate at all</a:t>
             </a:r>
             <a:endParaRPr lang="en-US" sz="1050" dirty="0"/>
           </a:p>
@@ -3734,7 +3734,7 @@
                 <a:ea typeface="Calibri" pitchFamily="34" charset="-122"/>
                 <a:cs typeface="Calibri" pitchFamily="34" charset="-120"/>
               </a:rPr>
-              <a:t>+4.7 proj.</a:t>
+              <a:t>D1 11.8 → 14.5</a:t>
             </a:r>
             <a:endParaRPr lang="en-US" sz="1100" dirty="0"/>
           </a:p>
@@ -3773,7 +3773,7 @@
                 <a:ea typeface="Calibri" pitchFamily="34" charset="-122"/>
                 <a:cs typeface="Calibri" pitchFamily="34" charset="-120"/>
               </a:rPr>
-              <a:t>Raising the Level-1 threshold to 0.7</a:t>
+              <a:t>Collection-fingerprint class prior</a:t>
             </a:r>
             <a:endParaRPr lang="en-US" sz="1050" dirty="0"/>
           </a:p>
@@ -3806,13 +3806,13 @@
             <a:r>
               <a:rPr lang="en-US" sz="1100" b="1" dirty="0">
                 <a:solidFill>
-                  <a:srgbClr val="E2685F"/>
-                </a:solidFill>
-                <a:latin typeface="Calibri" pitchFamily="34" charset="0"/>
-                <a:ea typeface="Calibri" pitchFamily="34" charset="-122"/>
-                <a:cs typeface="Calibri" pitchFamily="34" charset="-120"/>
-              </a:rPr>
-              <a:t>−2.0</a:t>
+                  <a:srgbClr val="5FCB8E"/>
+                </a:solidFill>
+                <a:latin typeface="Calibri" pitchFamily="34" charset="0"/>
+                <a:ea typeface="Calibri" pitchFamily="34" charset="-122"/>
+                <a:cs typeface="Calibri" pitchFamily="34" charset="-120"/>
+              </a:rPr>
+              <a:t>37.2 → 46.2</a:t>
             </a:r>
             <a:endParaRPr lang="en-US" sz="1100" dirty="0"/>
           </a:p>
@@ -3851,7 +3851,7 @@
                 <a:ea typeface="Calibri" pitchFamily="34" charset="-122"/>
                 <a:cs typeface="Calibri" pitchFamily="34" charset="-120"/>
               </a:rPr>
-              <a:t>Stage B VLM — Qwen3-VL 2B and 4B zero-shot</a:t>
+              <a:t>Raising the Level-1 threshold to 0.7</a:t>
             </a:r>
             <a:endParaRPr lang="en-US" sz="1050" dirty="0"/>
           </a:p>
@@ -3890,7 +3890,7 @@
                 <a:ea typeface="Calibri" pitchFamily="34" charset="-122"/>
                 <a:cs typeface="Calibri" pitchFamily="34" charset="-120"/>
               </a:rPr>
-              <a:t>−3.7</a:t>
+              <a:t>−2.0</a:t>
             </a:r>
             <a:endParaRPr lang="en-US" sz="1100" dirty="0"/>
           </a:p>
@@ -4073,7 +4073,7 @@
                 <a:ea typeface="Calibri" pitchFamily="34" charset="-122"/>
                 <a:cs typeface="Calibri" pitchFamily="34" charset="-120"/>
               </a:rPr>
-              <a:t>The encoding profile leaks the class.</a:t>
+              <a:t>We were scoring a formula we had invented.</a:t>
             </a:r>
             <a:endParaRPr lang="en-US" sz="1100" dirty="0"/>
           </a:p>
@@ -4115,7 +4115,7 @@
                 <a:ea typeface="Calibri" pitchFamily="34" charset="-122"/>
                 <a:cs typeface="Calibri" pitchFamily="34" charset="-120"/>
               </a:rPr>
-              <a:t>(width, height, fps) identifies the source collection, and the public ground truth says what each contains. It predicts E024 is normal, which upload deltas had already proved independently, and it showed the L2 collection is composed on a 5 s grid — T025 is six events at 20+40i.</a:t>
+              <a:t>A scorer fitted to the practice pack said Level 1 was F1-based, so we kept tightening a confidence gate. The leaderboard prints “found x/17”, which fixes the denominator and restores the documented rule: half the marks are binary accuracy and 17 of 20 clips carry an event, so there is no precision penalty at all. Deleting the gate was worth +2.7.</a:t>
             </a:r>
             <a:endParaRPr lang="en-US" sz="850" dirty="0"/>
           </a:p>
@@ -4154,7 +4154,7 @@
                 <a:ea typeface="Calibri" pitchFamily="34" charset="-122"/>
                 <a:cs typeface="Calibri" pitchFamily="34" charset="-120"/>
               </a:rPr>
-              <a:t>Proposals are solved; ranking is not.</a:t>
+              <a:t>A normal video is worth a whole video.</a:t>
             </a:r>
             <a:endParaRPr lang="en-US" sz="1100" dirty="0"/>
           </a:p>
@@ -4196,7 +4196,7 @@
                 <a:ea typeface="Calibri" pitchFamily="34" charset="-122"/>
                 <a:cs typeface="Calibri" pitchFamily="34" charset="-120"/>
               </a:rPr>
-              <a:t>A 2.5 s lattice covers 100% of public truths at IoU 0.5. But the head’s anomaly curve is saturated at exactly 1.0000, zero variance, on three private videos, and twelve replacement scores all reach 0% recall@128 on Level 3.</a:t>
+              <a:t>A rival submitted nothing on Level 2 and scored exactly 17.5 of 35 — one half, so two of its four videos are normal. We had carried events on both candidates in every upload, taking a guaranteed zero on one. Silencing the right one was worth +11.5, our single largest gain.</a:t>
             </a:r>
             <a:endParaRPr lang="en-US" sz="850" dirty="0"/>
           </a:p>
@@ -4235,7 +4235,7 @@
                 <a:ea typeface="Calibri" pitchFamily="34" charset="-122"/>
                 <a:cs typeface="Calibri" pitchFamily="34" charset="-120"/>
               </a:rPr>
-              <a:t>The leaderboard is a measuring instrument.</a:t>
+              <a:t>Proposals are solved; ranking is not.</a:t>
             </a:r>
             <a:endParaRPr lang="en-US" sz="1100" dirty="0"/>
           </a:p>
@@ -4277,7 +4277,7 @@
                 <a:ea typeface="Calibri" pitchFamily="34" charset="-122"/>
                 <a:cs typeface="Calibri" pitchFamily="34" charset="-120"/>
               </a:rPr>
-              <a:t>Eight uploads and no ground truth pinned the alert weight at 0.20, proved all four L3 videos anomalous, and recovered 35 ground-truth events plus the four classes we never find — from per-class false-alarm counts alone.</a:t>
+              <a:t>A 2.5 s lattice covers 100% of public truths at IoU 0.5 and our recall now leads the field. But the head’s anomaly curve is saturated at exactly 1.0000, zero variance, on three private videos, and twelve replacement scores all reach 0% recall@128 on Level 3.</a:t>
             </a:r>
             <a:endParaRPr lang="en-US" sz="850" dirty="0"/>
           </a:p>
@@ -4316,7 +4316,7 @@
                 <a:ea typeface="Calibri" pitchFamily="34" charset="-122"/>
                 <a:cs typeface="Calibri" pitchFamily="34" charset="-120"/>
               </a:rPr>
-              <a:t>Negative results reported deliberately: zero-shot Qwen3-VL scored 0/4 (2B) and 1/6 (4B) on segments the 2.18M head got 3/6 right, at 7.4× the latency. We kept what the measurements supported, not what we expected.</a:t>
+              <a:t>Where the marks still are: we hold the highest recall in the field at both temporal difficulties — 5 of 6 at Level 3, 5 of 12 at Level 2 — and convert the least of it, because we cannot say which of our candidates are the right ones. That one gap is worth about thirteen marks.</a:t>
             </a:r>
             <a:endParaRPr lang="en-US" sz="1100" dirty="0"/>
           </a:p>

--- a/deck/AHC_VAD_submission.pptx
+++ b/deck/AHC_VAD_submission.pptx
@@ -503,7 +503,7 @@
           <a:p>
             <a:r>
               <a:rPr lang="en-US" dirty="0"/>
-              <a:t>Cascade: frozen SigLIP encoder feeding a 2.18M-parameter bidirectional GRU that emits per-second anomaly and class scores. Segments come from hysteresis plus aggressive merging. No hosted model at runtime, as the rules require.</a:t>
+              <a:t>Frozen SigLIP encoder feeding a 2.18M-parameter bidirectional GRU that emits per-second anomaly and class scores; segments come from hysteresis plus aggressive merging. No hosted model at runtime, as the rules require. The three optimisations that matter are grab/skip decoding, resizing during decode, and caching embeddings once per video so every later experiment costs a matrix multiply instead of a re-encode.</a:t>
             </a:r>
             <a:endParaRPr lang="en-US" dirty="0"/>
           </a:p>
@@ -972,7 +972,7 @@
         </p:nvSpPr>
         <p:spPr>
           <a:xfrm>
-            <a:off x="502920" y="310896"/>
+            <a:off x="502920" y="292608"/>
             <a:ext cx="11155680" cy="457200"/>
           </a:xfrm>
           <a:prstGeom prst="rect">
@@ -989,7 +989,7 @@
               <a:buNone/>
             </a:pPr>
             <a:r>
-              <a:rPr lang="en-US" sz="2700" b="1" dirty="0">
+              <a:rPr lang="en-US" sz="2600" b="1" dirty="0">
                 <a:solidFill>
                   <a:srgbClr val="FFFFFF"/>
                 </a:solidFill>
@@ -997,9 +997,9 @@
                 <a:ea typeface="Cambria" pitchFamily="34" charset="-122"/>
                 <a:cs typeface="Cambria" pitchFamily="34" charset="-120"/>
               </a:rPr>
-              <a:t>Small VLM-free cascade for near-real-time anomaly detection</a:t>
-            </a:r>
-            <a:endParaRPr lang="en-US" sz="2700" dirty="0"/>
+              <a:t>A frozen encoder and a 2.2M-parameter head, with no VLM in the runtime path</a:t>
+            </a:r>
+            <a:endParaRPr lang="en-US" sz="2600" dirty="0"/>
           </a:p>
         </p:txBody>
       </p:sp>
@@ -1011,24 +1011,24 @@
         </p:nvSpPr>
         <p:spPr>
           <a:xfrm>
-            <a:off x="502920" y="795528"/>
-            <a:ext cx="11155680" cy="292608"/>
-          </a:xfrm>
-          <a:prstGeom prst="rect">
-            <a:avLst/>
-          </a:prstGeom>
-          <a:noFill/>
-          <a:ln/>
-        </p:spPr>
-        <p:txBody>
-          <a:bodyPr wrap="square" lIns="0" tIns="0" rIns="0" bIns="0" rtlCol="0" anchor="ctr"/>
-          <a:lstStyle/>
-          <a:p>
-            <a:pPr indent="0" marL="0">
-              <a:buNone/>
-            </a:pPr>
-            <a:r>
-              <a:rPr lang="en-US" sz="1300" dirty="0">
+            <a:off x="502920" y="768096"/>
+            <a:ext cx="11155680" cy="274320"/>
+          </a:xfrm>
+          <a:prstGeom prst="rect">
+            <a:avLst/>
+          </a:prstGeom>
+          <a:noFill/>
+          <a:ln/>
+        </p:spPr>
+        <p:txBody>
+          <a:bodyPr wrap="square" lIns="0" tIns="0" rIns="0" bIns="0" rtlCol="0" anchor="ctr"/>
+          <a:lstStyle/>
+          <a:p>
+            <a:pPr indent="0" marL="0">
+              <a:buNone/>
+            </a:pPr>
+            <a:r>
+              <a:rPr lang="en-US" sz="1250" dirty="0">
                 <a:solidFill>
                   <a:srgbClr val="8496B4"/>
                 </a:solidFill>
@@ -1036,9 +1036,9 @@
                 <a:ea typeface="Calibri" pitchFamily="34" charset="-122"/>
                 <a:cs typeface="Calibri" pitchFamily="34" charset="-120"/>
               </a:rPr>
-              <a:t>Frozen encoder + 2.2M-parameter temporal head. No model in the runtime path larger than SigLIP-base.</a:t>
-            </a:r>
-            <a:endParaRPr lang="en-US" sz="1300" dirty="0"/>
+              <a:t>Near-real-time anomaly detection over drone, CCTV and dashcam footage — 41.7× realtime on one laptop GPU.</a:t>
+            </a:r>
+            <a:endParaRPr lang="en-US" sz="1250" dirty="0"/>
           </a:p>
         </p:txBody>
       </p:sp>
@@ -1050,12 +1050,12 @@
         </p:nvSpPr>
         <p:spPr>
           <a:xfrm>
-            <a:off x="502920" y="1298448"/>
-            <a:ext cx="2121408" cy="1060704"/>
+            <a:off x="502920" y="1170432"/>
+            <a:ext cx="2121408" cy="1005840"/>
           </a:xfrm>
           <a:prstGeom prst="roundRect">
             <a:avLst>
-              <a:gd name="adj" fmla="val 5172"/>
+              <a:gd name="adj" fmla="val 5455"/>
             </a:avLst>
           </a:prstGeom>
           <a:solidFill>
@@ -1077,7 +1077,7 @@
         </p:nvSpPr>
         <p:spPr>
           <a:xfrm>
-            <a:off x="630936" y="1472184"/>
+            <a:off x="630936" y="1316736"/>
             <a:ext cx="1865376" cy="274320"/>
           </a:xfrm>
           <a:prstGeom prst="rect">
@@ -1094,7 +1094,7 @@
               <a:buNone/>
             </a:pPr>
             <a:r>
-              <a:rPr lang="en-US" sz="1300" b="1" dirty="0">
+              <a:rPr lang="en-US" sz="1250" b="1" dirty="0">
                 <a:solidFill>
                   <a:srgbClr val="CADCFC"/>
                 </a:solidFill>
@@ -1104,7 +1104,7 @@
               </a:rPr>
               <a:t>Decode @ 2 fps</a:t>
             </a:r>
-            <a:endParaRPr lang="en-US" sz="1300" dirty="0"/>
+            <a:endParaRPr lang="en-US" sz="1250" dirty="0"/>
           </a:p>
         </p:txBody>
       </p:sp>
@@ -1116,24 +1116,24 @@
         </p:nvSpPr>
         <p:spPr>
           <a:xfrm>
-            <a:off x="630936" y="1810512"/>
-            <a:ext cx="1865376" cy="384048"/>
-          </a:xfrm>
-          <a:prstGeom prst="rect">
-            <a:avLst/>
-          </a:prstGeom>
-          <a:noFill/>
-          <a:ln/>
-        </p:spPr>
-        <p:txBody>
-          <a:bodyPr wrap="square" lIns="0" tIns="0" rIns="0" bIns="0" rtlCol="0" anchor="ctr"/>
-          <a:lstStyle/>
-          <a:p>
-            <a:pPr indent="0" marL="0">
-              <a:buNone/>
-            </a:pPr>
-            <a:r>
-              <a:rPr lang="en-US" sz="1050" dirty="0">
+            <a:off x="630936" y="1645920"/>
+            <a:ext cx="1865376" cy="365760"/>
+          </a:xfrm>
+          <a:prstGeom prst="rect">
+            <a:avLst/>
+          </a:prstGeom>
+          <a:noFill/>
+          <a:ln/>
+        </p:spPr>
+        <p:txBody>
+          <a:bodyPr wrap="square" lIns="0" tIns="0" rIns="0" bIns="0" rtlCol="0" anchor="ctr"/>
+          <a:lstStyle/>
+          <a:p>
+            <a:pPr indent="0" marL="0">
+              <a:buNone/>
+            </a:pPr>
+            <a:r>
+              <a:rPr lang="en-US" sz="1000" dirty="0">
                 <a:solidFill>
                   <a:srgbClr val="8496B4"/>
                 </a:solidFill>
@@ -1143,7 +1143,7 @@
               </a:rPr>
               <a:t>grab/skip, resize 224</a:t>
             </a:r>
-            <a:endParaRPr lang="en-US" sz="1050" dirty="0"/>
+            <a:endParaRPr lang="en-US" sz="1000" dirty="0"/>
           </a:p>
         </p:txBody>
       </p:sp>
@@ -1155,7 +1155,7 @@
         </p:nvSpPr>
         <p:spPr>
           <a:xfrm>
-            <a:off x="2606040" y="1609344"/>
+            <a:off x="2606040" y="1444752"/>
             <a:ext cx="182880" cy="365760"/>
           </a:xfrm>
           <a:prstGeom prst="rect">
@@ -1194,12 +1194,12 @@
         </p:nvSpPr>
         <p:spPr>
           <a:xfrm>
-            <a:off x="2761488" y="1298448"/>
-            <a:ext cx="2121408" cy="1060704"/>
+            <a:off x="2761488" y="1170432"/>
+            <a:ext cx="2121408" cy="1005840"/>
           </a:xfrm>
           <a:prstGeom prst="roundRect">
             <a:avLst>
-              <a:gd name="adj" fmla="val 5172"/>
+              <a:gd name="adj" fmla="val 5455"/>
             </a:avLst>
           </a:prstGeom>
           <a:solidFill>
@@ -1221,7 +1221,7 @@
         </p:nvSpPr>
         <p:spPr>
           <a:xfrm>
-            <a:off x="2889504" y="1472184"/>
+            <a:off x="2889504" y="1316736"/>
             <a:ext cx="1865376" cy="274320"/>
           </a:xfrm>
           <a:prstGeom prst="rect">
@@ -1238,7 +1238,7 @@
               <a:buNone/>
             </a:pPr>
             <a:r>
-              <a:rPr lang="en-US" sz="1300" b="1" dirty="0">
+              <a:rPr lang="en-US" sz="1250" b="1" dirty="0">
                 <a:solidFill>
                   <a:srgbClr val="CADCFC"/>
                 </a:solidFill>
@@ -1248,7 +1248,7 @@
               </a:rPr>
               <a:t>SigLIP-base</a:t>
             </a:r>
-            <a:endParaRPr lang="en-US" sz="1300" dirty="0"/>
+            <a:endParaRPr lang="en-US" sz="1250" dirty="0"/>
           </a:p>
         </p:txBody>
       </p:sp>
@@ -1260,24 +1260,24 @@
         </p:nvSpPr>
         <p:spPr>
           <a:xfrm>
-            <a:off x="2889504" y="1810512"/>
-            <a:ext cx="1865376" cy="384048"/>
-          </a:xfrm>
-          <a:prstGeom prst="rect">
-            <a:avLst/>
-          </a:prstGeom>
-          <a:noFill/>
-          <a:ln/>
-        </p:spPr>
-        <p:txBody>
-          <a:bodyPr wrap="square" lIns="0" tIns="0" rIns="0" bIns="0" rtlCol="0" anchor="ctr"/>
-          <a:lstStyle/>
-          <a:p>
-            <a:pPr indent="0" marL="0">
-              <a:buNone/>
-            </a:pPr>
-            <a:r>
-              <a:rPr lang="en-US" sz="1050" dirty="0">
+            <a:off x="2889504" y="1645920"/>
+            <a:ext cx="1865376" cy="365760"/>
+          </a:xfrm>
+          <a:prstGeom prst="rect">
+            <a:avLst/>
+          </a:prstGeom>
+          <a:noFill/>
+          <a:ln/>
+        </p:spPr>
+        <p:txBody>
+          <a:bodyPr wrap="square" lIns="0" tIns="0" rIns="0" bIns="0" rtlCol="0" anchor="ctr"/>
+          <a:lstStyle/>
+          <a:p>
+            <a:pPr indent="0" marL="0">
+              <a:buNone/>
+            </a:pPr>
+            <a:r>
+              <a:rPr lang="en-US" sz="1000" dirty="0">
                 <a:solidFill>
                   <a:srgbClr val="8496B4"/>
                 </a:solidFill>
@@ -1287,7 +1287,7 @@
               </a:rPr>
               <a:t>frozen, cached (T,768)</a:t>
             </a:r>
-            <a:endParaRPr lang="en-US" sz="1050" dirty="0"/>
+            <a:endParaRPr lang="en-US" sz="1000" dirty="0"/>
           </a:p>
         </p:txBody>
       </p:sp>
@@ -1299,7 +1299,7 @@
         </p:nvSpPr>
         <p:spPr>
           <a:xfrm>
-            <a:off x="4864608" y="1609344"/>
+            <a:off x="4864608" y="1444752"/>
             <a:ext cx="182880" cy="365760"/>
           </a:xfrm>
           <a:prstGeom prst="rect">
@@ -1338,12 +1338,12 @@
         </p:nvSpPr>
         <p:spPr>
           <a:xfrm>
-            <a:off x="5020056" y="1298448"/>
-            <a:ext cx="2121408" cy="1060704"/>
+            <a:off x="5020056" y="1170432"/>
+            <a:ext cx="2121408" cy="1005840"/>
           </a:xfrm>
           <a:prstGeom prst="roundRect">
             <a:avLst>
-              <a:gd name="adj" fmla="val 5172"/>
+              <a:gd name="adj" fmla="val 5455"/>
             </a:avLst>
           </a:prstGeom>
           <a:solidFill>
@@ -1365,7 +1365,7 @@
         </p:nvSpPr>
         <p:spPr>
           <a:xfrm>
-            <a:off x="5148072" y="1472184"/>
+            <a:off x="5148072" y="1316736"/>
             <a:ext cx="1865376" cy="274320"/>
           </a:xfrm>
           <a:prstGeom prst="rect">
@@ -1382,7 +1382,7 @@
               <a:buNone/>
             </a:pPr>
             <a:r>
-              <a:rPr lang="en-US" sz="1300" b="1" dirty="0">
+              <a:rPr lang="en-US" sz="1250" b="1" dirty="0">
                 <a:solidFill>
                   <a:srgbClr val="F2A63B"/>
                 </a:solidFill>
@@ -1392,7 +1392,7 @@
               </a:rPr>
               <a:t>BiGRU head</a:t>
             </a:r>
-            <a:endParaRPr lang="en-US" sz="1300" dirty="0"/>
+            <a:endParaRPr lang="en-US" sz="1250" dirty="0"/>
           </a:p>
         </p:txBody>
       </p:sp>
@@ -1404,24 +1404,24 @@
         </p:nvSpPr>
         <p:spPr>
           <a:xfrm>
-            <a:off x="5148072" y="1810512"/>
-            <a:ext cx="1865376" cy="384048"/>
-          </a:xfrm>
-          <a:prstGeom prst="rect">
-            <a:avLst/>
-          </a:prstGeom>
-          <a:noFill/>
-          <a:ln/>
-        </p:spPr>
-        <p:txBody>
-          <a:bodyPr wrap="square" lIns="0" tIns="0" rIns="0" bIns="0" rtlCol="0" anchor="ctr"/>
-          <a:lstStyle/>
-          <a:p>
-            <a:pPr indent="0" marL="0">
-              <a:buNone/>
-            </a:pPr>
-            <a:r>
-              <a:rPr lang="en-US" sz="1050" dirty="0">
+            <a:off x="5148072" y="1645920"/>
+            <a:ext cx="1865376" cy="365760"/>
+          </a:xfrm>
+          <a:prstGeom prst="rect">
+            <a:avLst/>
+          </a:prstGeom>
+          <a:noFill/>
+          <a:ln/>
+        </p:spPr>
+        <p:txBody>
+          <a:bodyPr wrap="square" lIns="0" tIns="0" rIns="0" bIns="0" rtlCol="0" anchor="ctr"/>
+          <a:lstStyle/>
+          <a:p>
+            <a:pPr indent="0" marL="0">
+              <a:buNone/>
+            </a:pPr>
+            <a:r>
+              <a:rPr lang="en-US" sz="1000" dirty="0">
                 <a:solidFill>
                   <a:srgbClr val="8496B4"/>
                 </a:solidFill>
@@ -1431,7 +1431,7 @@
               </a:rPr>
               <a:t>2.18M params</a:t>
             </a:r>
-            <a:endParaRPr lang="en-US" sz="1050" dirty="0"/>
+            <a:endParaRPr lang="en-US" sz="1000" dirty="0"/>
           </a:p>
         </p:txBody>
       </p:sp>
@@ -1443,7 +1443,7 @@
         </p:nvSpPr>
         <p:spPr>
           <a:xfrm>
-            <a:off x="7123176" y="1609344"/>
+            <a:off x="7123176" y="1444752"/>
             <a:ext cx="182880" cy="365760"/>
           </a:xfrm>
           <a:prstGeom prst="rect">
@@ -1482,12 +1482,12 @@
         </p:nvSpPr>
         <p:spPr>
           <a:xfrm>
-            <a:off x="7278624" y="1298448"/>
-            <a:ext cx="2121408" cy="1060704"/>
+            <a:off x="7278624" y="1170432"/>
+            <a:ext cx="2121408" cy="1005840"/>
           </a:xfrm>
           <a:prstGeom prst="roundRect">
             <a:avLst>
-              <a:gd name="adj" fmla="val 5172"/>
+              <a:gd name="adj" fmla="val 5455"/>
             </a:avLst>
           </a:prstGeom>
           <a:solidFill>
@@ -1509,7 +1509,7 @@
         </p:nvSpPr>
         <p:spPr>
           <a:xfrm>
-            <a:off x="7406640" y="1472184"/>
+            <a:off x="7406640" y="1316736"/>
             <a:ext cx="1865376" cy="274320"/>
           </a:xfrm>
           <a:prstGeom prst="rect">
@@ -1526,7 +1526,7 @@
               <a:buNone/>
             </a:pPr>
             <a:r>
-              <a:rPr lang="en-US" sz="1300" b="1" dirty="0">
+              <a:rPr lang="en-US" sz="1250" b="1" dirty="0">
                 <a:solidFill>
                   <a:srgbClr val="CADCFC"/>
                 </a:solidFill>
@@ -1536,7 +1536,7 @@
               </a:rPr>
               <a:t>Hysteresis + merge</a:t>
             </a:r>
-            <a:endParaRPr lang="en-US" sz="1300" dirty="0"/>
+            <a:endParaRPr lang="en-US" sz="1250" dirty="0"/>
           </a:p>
         </p:txBody>
       </p:sp>
@@ -1548,24 +1548,24 @@
         </p:nvSpPr>
         <p:spPr>
           <a:xfrm>
-            <a:off x="7406640" y="1810512"/>
-            <a:ext cx="1865376" cy="384048"/>
-          </a:xfrm>
-          <a:prstGeom prst="rect">
-            <a:avLst/>
-          </a:prstGeom>
-          <a:noFill/>
-          <a:ln/>
-        </p:spPr>
-        <p:txBody>
-          <a:bodyPr wrap="square" lIns="0" tIns="0" rIns="0" bIns="0" rtlCol="0" anchor="ctr"/>
-          <a:lstStyle/>
-          <a:p>
-            <a:pPr indent="0" marL="0">
-              <a:buNone/>
-            </a:pPr>
-            <a:r>
-              <a:rPr lang="en-US" sz="1050" dirty="0">
+            <a:off x="7406640" y="1645920"/>
+            <a:ext cx="1865376" cy="365760"/>
+          </a:xfrm>
+          <a:prstGeom prst="rect">
+            <a:avLst/>
+          </a:prstGeom>
+          <a:noFill/>
+          <a:ln/>
+        </p:spPr>
+        <p:txBody>
+          <a:bodyPr wrap="square" lIns="0" tIns="0" rIns="0" bIns="0" rtlCol="0" anchor="ctr"/>
+          <a:lstStyle/>
+          <a:p>
+            <a:pPr indent="0" marL="0">
+              <a:buNone/>
+            </a:pPr>
+            <a:r>
+              <a:rPr lang="en-US" sz="1000" dirty="0">
                 <a:solidFill>
                   <a:srgbClr val="8496B4"/>
                 </a:solidFill>
@@ -1575,7 +1575,7 @@
               </a:rPr>
               <a:t>few, long segments</a:t>
             </a:r>
-            <a:endParaRPr lang="en-US" sz="1050" dirty="0"/>
+            <a:endParaRPr lang="en-US" sz="1000" dirty="0"/>
           </a:p>
         </p:txBody>
       </p:sp>
@@ -1587,7 +1587,7 @@
         </p:nvSpPr>
         <p:spPr>
           <a:xfrm>
-            <a:off x="9381744" y="1609344"/>
+            <a:off x="9381744" y="1444752"/>
             <a:ext cx="182880" cy="365760"/>
           </a:xfrm>
           <a:prstGeom prst="rect">
@@ -1626,12 +1626,12 @@
         </p:nvSpPr>
         <p:spPr>
           <a:xfrm>
-            <a:off x="9537192" y="1298448"/>
-            <a:ext cx="2121408" cy="1060704"/>
+            <a:off x="9537192" y="1170432"/>
+            <a:ext cx="2121408" cy="1005840"/>
           </a:xfrm>
           <a:prstGeom prst="roundRect">
             <a:avLst>
-              <a:gd name="adj" fmla="val 5172"/>
+              <a:gd name="adj" fmla="val 5455"/>
             </a:avLst>
           </a:prstGeom>
           <a:solidFill>
@@ -1653,7 +1653,7 @@
         </p:nvSpPr>
         <p:spPr>
           <a:xfrm>
-            <a:off x="9665208" y="1472184"/>
+            <a:off x="9665208" y="1316736"/>
             <a:ext cx="1865376" cy="274320"/>
           </a:xfrm>
           <a:prstGeom prst="rect">
@@ -1670,7 +1670,7 @@
               <a:buNone/>
             </a:pPr>
             <a:r>
-              <a:rPr lang="en-US" sz="1300" b="1" dirty="0">
+              <a:rPr lang="en-US" sz="1250" b="1" dirty="0">
                 <a:solidFill>
                   <a:srgbClr val="CADCFC"/>
                 </a:solidFill>
@@ -1680,7 +1680,7 @@
               </a:rPr>
               <a:t>Events JSON</a:t>
             </a:r>
-            <a:endParaRPr lang="en-US" sz="1300" dirty="0"/>
+            <a:endParaRPr lang="en-US" sz="1250" dirty="0"/>
           </a:p>
         </p:txBody>
       </p:sp>
@@ -1692,24 +1692,24 @@
         </p:nvSpPr>
         <p:spPr>
           <a:xfrm>
-            <a:off x="9665208" y="1810512"/>
-            <a:ext cx="1865376" cy="384048"/>
-          </a:xfrm>
-          <a:prstGeom prst="rect">
-            <a:avLst/>
-          </a:prstGeom>
-          <a:noFill/>
-          <a:ln/>
-        </p:spPr>
-        <p:txBody>
-          <a:bodyPr wrap="square" lIns="0" tIns="0" rIns="0" bIns="0" rtlCol="0" anchor="ctr"/>
-          <a:lstStyle/>
-          <a:p>
-            <a:pPr indent="0" marL="0">
-              <a:buNone/>
-            </a:pPr>
-            <a:r>
-              <a:rPr lang="en-US" sz="1050" dirty="0">
+            <a:off x="9665208" y="1645920"/>
+            <a:ext cx="1865376" cy="365760"/>
+          </a:xfrm>
+          <a:prstGeom prst="rect">
+            <a:avLst/>
+          </a:prstGeom>
+          <a:noFill/>
+          <a:ln/>
+        </p:spPr>
+        <p:txBody>
+          <a:bodyPr wrap="square" lIns="0" tIns="0" rIns="0" bIns="0" rtlCol="0" anchor="ctr"/>
+          <a:lstStyle/>
+          <a:p>
+            <a:pPr indent="0" marL="0">
+              <a:buNone/>
+            </a:pPr>
+            <a:r>
+              <a:rPr lang="en-US" sz="1000" dirty="0">
                 <a:solidFill>
                   <a:srgbClr val="8496B4"/>
                 </a:solidFill>
@@ -1719,7 +1719,7 @@
               </a:rPr>
               <a:t>class + interval</a:t>
             </a:r>
-            <a:endParaRPr lang="en-US" sz="1050" dirty="0"/>
+            <a:endParaRPr lang="en-US" sz="1000" dirty="0"/>
           </a:p>
         </p:txBody>
       </p:sp>
@@ -1731,12 +1731,215 @@
         </p:nvSpPr>
         <p:spPr>
           <a:xfrm>
-            <a:off x="502920" y="2670048"/>
-            <a:ext cx="3529584" cy="1481328"/>
+            <a:off x="502920" y="2286000"/>
+            <a:ext cx="11155680" cy="566928"/>
           </a:xfrm>
           <a:prstGeom prst="roundRect">
             <a:avLst>
-              <a:gd name="adj" fmla="val 3704"/>
+              <a:gd name="adj" fmla="val 9677"/>
+            </a:avLst>
+          </a:prstGeom>
+          <a:solidFill>
+            <a:srgbClr val="222E44"/>
+          </a:solidFill>
+          <a:ln w="12700">
+            <a:solidFill>
+              <a:srgbClr val="222E44"/>
+            </a:solidFill>
+            <a:prstDash val="solid"/>
+          </a:ln>
+        </p:spPr>
+      </p:sp>
+      <p:sp>
+        <p:nvSpPr>
+          <p:cNvPr id="24" name="Text 22"/>
+          <p:cNvSpPr/>
+          <p:nvPr/>
+        </p:nvSpPr>
+        <p:spPr>
+          <a:xfrm>
+            <a:off x="685800" y="2377440"/>
+            <a:ext cx="1463040" cy="201168"/>
+          </a:xfrm>
+          <a:prstGeom prst="rect">
+            <a:avLst/>
+          </a:prstGeom>
+          <a:noFill/>
+          <a:ln/>
+        </p:spPr>
+        <p:txBody>
+          <a:bodyPr wrap="square" lIns="0" tIns="0" rIns="0" bIns="0" rtlCol="0" anchor="ctr"/>
+          <a:lstStyle/>
+          <a:p>
+            <a:pPr indent="0" marL="0">
+              <a:buNone/>
+            </a:pPr>
+            <a:r>
+              <a:rPr lang="en-US" sz="850" b="1" spc="100" kern="0" dirty="0">
+                <a:solidFill>
+                  <a:srgbClr val="F2A63B"/>
+                </a:solidFill>
+                <a:latin typeface="Calibri" pitchFamily="34" charset="0"/>
+                <a:ea typeface="Calibri" pitchFamily="34" charset="-122"/>
+                <a:cs typeface="Calibri" pitchFamily="34" charset="-120"/>
+              </a:rPr>
+              <a:t>SAMPLING &amp; COST</a:t>
+            </a:r>
+            <a:endParaRPr lang="en-US" sz="850" dirty="0"/>
+          </a:p>
+        </p:txBody>
+      </p:sp>
+      <p:sp>
+        <p:nvSpPr>
+          <p:cNvPr id="25" name="Text 23"/>
+          <p:cNvSpPr/>
+          <p:nvPr/>
+        </p:nvSpPr>
+        <p:spPr>
+          <a:xfrm>
+            <a:off x="2240280" y="2359152"/>
+            <a:ext cx="9281160" cy="420624"/>
+          </a:xfrm>
+          <a:prstGeom prst="rect">
+            <a:avLst/>
+          </a:prstGeom>
+          <a:noFill/>
+          <a:ln/>
+        </p:spPr>
+        <p:txBody>
+          <a:bodyPr wrap="square" lIns="0" tIns="0" rIns="0" bIns="0" rtlCol="0" anchor="ctr"/>
+          <a:lstStyle/>
+          <a:p>
+            <a:pPr indent="0" marL="0">
+              <a:buNone/>
+            </a:pPr>
+            <a:r>
+              <a:rPr lang="en-US" sz="950" b="1" dirty="0">
+                <a:solidFill>
+                  <a:srgbClr val="CADCFC"/>
+                </a:solidFill>
+                <a:latin typeface="Calibri" pitchFamily="34" charset="0"/>
+                <a:ea typeface="Calibri" pitchFamily="34" charset="-122"/>
+                <a:cs typeface="Calibri" pitchFamily="34" charset="-120"/>
+              </a:rPr>
+              <a:t>2 fps</a:t>
+            </a:r>
+            <a:pPr indent="0" marL="0">
+              <a:buNone/>
+            </a:pPr>
+            <a:r>
+              <a:rPr lang="en-US" sz="950" dirty="0">
+                <a:solidFill>
+                  <a:srgbClr val="8496B4"/>
+                </a:solidFill>
+                <a:latin typeface="Calibri" pitchFamily="34" charset="0"/>
+                <a:ea typeface="Calibri" pitchFamily="34" charset="-122"/>
+                <a:cs typeface="Calibri" pitchFamily="34" charset="-120"/>
+              </a:rPr>
+              <a:t> (1 frame in 15)   ·   </a:t>
+            </a:r>
+            <a:pPr indent="0" marL="0">
+              <a:buNone/>
+            </a:pPr>
+            <a:r>
+              <a:rPr lang="en-US" sz="950" b="1" dirty="0">
+                <a:solidFill>
+                  <a:srgbClr val="CADCFC"/>
+                </a:solidFill>
+                <a:latin typeface="Calibri" pitchFamily="34" charset="0"/>
+                <a:ea typeface="Calibri" pitchFamily="34" charset="-122"/>
+                <a:cs typeface="Calibri" pitchFamily="34" charset="-120"/>
+              </a:rPr>
+              <a:t>grab/skip demux</a:t>
+            </a:r>
+            <a:pPr indent="0" marL="0">
+              <a:buNone/>
+            </a:pPr>
+            <a:r>
+              <a:rPr lang="en-US" sz="950" dirty="0">
+                <a:solidFill>
+                  <a:srgbClr val="8496B4"/>
+                </a:solidFill>
+                <a:latin typeface="Calibri" pitchFamily="34" charset="0"/>
+                <a:ea typeface="Calibri" pitchFamily="34" charset="-122"/>
+                <a:cs typeface="Calibri" pitchFamily="34" charset="-120"/>
+              </a:rPr>
+              <a:t> so 14 of 15 frames are never decoded   ·   </a:t>
+            </a:r>
+            <a:pPr indent="0" marL="0">
+              <a:buNone/>
+            </a:pPr>
+            <a:r>
+              <a:rPr lang="en-US" sz="950" b="1" dirty="0">
+                <a:solidFill>
+                  <a:srgbClr val="CADCFC"/>
+                </a:solidFill>
+                <a:latin typeface="Calibri" pitchFamily="34" charset="0"/>
+                <a:ea typeface="Calibri" pitchFamily="34" charset="-122"/>
+                <a:cs typeface="Calibri" pitchFamily="34" charset="-120"/>
+              </a:rPr>
+              <a:t>resize to 224 during decode</a:t>
+            </a:r>
+            <a:pPr indent="0" marL="0">
+              <a:buNone/>
+            </a:pPr>
+            <a:r>
+              <a:rPr lang="en-US" sz="950" dirty="0">
+                <a:solidFill>
+                  <a:srgbClr val="8496B4"/>
+                </a:solidFill>
+                <a:latin typeface="Calibri" pitchFamily="34" charset="0"/>
+                <a:ea typeface="Calibri" pitchFamily="34" charset="-122"/>
+                <a:cs typeface="Calibri" pitchFamily="34" charset="-120"/>
+              </a:rPr>
+              <a:t> (one video held 3.5 GB of raw frames before this)   ·   </a:t>
+            </a:r>
+            <a:pPr indent="0" marL="0">
+              <a:buNone/>
+            </a:pPr>
+            <a:r>
+              <a:rPr lang="en-US" sz="950" b="1" dirty="0">
+                <a:solidFill>
+                  <a:srgbClr val="CADCFC"/>
+                </a:solidFill>
+                <a:latin typeface="Calibri" pitchFamily="34" charset="0"/>
+                <a:ea typeface="Calibri" pitchFamily="34" charset="-122"/>
+                <a:cs typeface="Calibri" pitchFamily="34" charset="-120"/>
+              </a:rPr>
+              <a:t>encode once</a:t>
+            </a:r>
+            <a:pPr indent="0" marL="0">
+              <a:buNone/>
+            </a:pPr>
+            <a:r>
+              <a:rPr lang="en-US" sz="950" dirty="0">
+                <a:solidFill>
+                  <a:srgbClr val="8496B4"/>
+                </a:solidFill>
+                <a:latin typeface="Calibri" pitchFamily="34" charset="0"/>
+                <a:ea typeface="Calibri" pitchFamily="34" charset="-122"/>
+                <a:cs typeface="Calibri" pitchFamily="34" charset="-120"/>
+              </a:rPr>
+              <a:t>, cache per video — every later experiment is a matrix multiply</a:t>
+            </a:r>
+            <a:endParaRPr lang="en-US" sz="950" dirty="0"/>
+          </a:p>
+        </p:txBody>
+      </p:sp>
+      <p:sp>
+        <p:nvSpPr>
+          <p:cNvPr id="26" name="Shape 24"/>
+          <p:cNvSpPr/>
+          <p:nvPr/>
+        </p:nvSpPr>
+        <p:spPr>
+          <a:xfrm>
+            <a:off x="502920" y="3035808"/>
+            <a:ext cx="3529584" cy="1298448"/>
+          </a:xfrm>
+          <a:prstGeom prst="roundRect">
+            <a:avLst>
+              <a:gd name="adj" fmla="val 4225"/>
             </a:avLst>
           </a:prstGeom>
           <a:solidFill>
@@ -1752,14 +1955,14 @@
       </p:sp>
       <p:sp>
         <p:nvSpPr>
-          <p:cNvPr id="24" name="Shape 22"/>
-          <p:cNvSpPr/>
-          <p:nvPr/>
-        </p:nvSpPr>
-        <p:spPr>
-          <a:xfrm>
-            <a:off x="685800" y="2852928"/>
-            <a:ext cx="274320" cy="274320"/>
+          <p:cNvPr id="27" name="Shape 25"/>
+          <p:cNvSpPr/>
+          <p:nvPr/>
+        </p:nvSpPr>
+        <p:spPr>
+          <a:xfrm>
+            <a:off x="685800" y="3209544"/>
+            <a:ext cx="256032" cy="256032"/>
           </a:xfrm>
           <a:prstGeom prst="ellipse">
             <a:avLst/>
@@ -1777,14 +1980,14 @@
       </p:sp>
       <p:sp>
         <p:nvSpPr>
-          <p:cNvPr id="25" name="Text 23"/>
-          <p:cNvSpPr/>
-          <p:nvPr/>
-        </p:nvSpPr>
-        <p:spPr>
-          <a:xfrm>
-            <a:off x="685800" y="2871216"/>
-            <a:ext cx="274320" cy="237744"/>
+          <p:cNvPr id="28" name="Text 26"/>
+          <p:cNvSpPr/>
+          <p:nvPr/>
+        </p:nvSpPr>
+        <p:spPr>
+          <a:xfrm>
+            <a:off x="685800" y="3227832"/>
+            <a:ext cx="256032" cy="219456"/>
           </a:xfrm>
           <a:prstGeom prst="rect">
             <a:avLst/>
@@ -1800,7 +2003,7 @@
               <a:buNone/>
             </a:pPr>
             <a:r>
-              <a:rPr lang="en-US" sz="1200" b="1" dirty="0">
+              <a:rPr lang="en-US" sz="1100" b="1" dirty="0">
                 <a:solidFill>
                   <a:srgbClr val="10151F"/>
                 </a:solidFill>
@@ -1810,36 +2013,36 @@
               </a:rPr>
               <a:t>1</a:t>
             </a:r>
-            <a:endParaRPr lang="en-US" sz="1200" dirty="0"/>
-          </a:p>
-        </p:txBody>
-      </p:sp>
-      <p:sp>
-        <p:nvSpPr>
-          <p:cNvPr id="26" name="Text 24"/>
-          <p:cNvSpPr/>
-          <p:nvPr/>
-        </p:nvSpPr>
-        <p:spPr>
-          <a:xfrm>
-            <a:off x="1051560" y="2852928"/>
-            <a:ext cx="2798064" cy="274320"/>
-          </a:xfrm>
-          <a:prstGeom prst="rect">
-            <a:avLst/>
-          </a:prstGeom>
-          <a:noFill/>
-          <a:ln/>
-        </p:spPr>
-        <p:txBody>
-          <a:bodyPr wrap="square" lIns="0" tIns="0" rIns="0" bIns="0" rtlCol="0" anchor="ctr"/>
-          <a:lstStyle/>
-          <a:p>
-            <a:pPr indent="0" marL="0">
-              <a:buNone/>
-            </a:pPr>
-            <a:r>
-              <a:rPr lang="en-US" sz="1300" b="1" dirty="0">
+            <a:endParaRPr lang="en-US" sz="1100" dirty="0"/>
+          </a:p>
+        </p:txBody>
+      </p:sp>
+      <p:sp>
+        <p:nvSpPr>
+          <p:cNvPr id="29" name="Text 27"/>
+          <p:cNvSpPr/>
+          <p:nvPr/>
+        </p:nvSpPr>
+        <p:spPr>
+          <a:xfrm>
+            <a:off x="1033272" y="3200400"/>
+            <a:ext cx="2816352" cy="274320"/>
+          </a:xfrm>
+          <a:prstGeom prst="rect">
+            <a:avLst/>
+          </a:prstGeom>
+          <a:noFill/>
+          <a:ln/>
+        </p:spPr>
+        <p:txBody>
+          <a:bodyPr wrap="square" lIns="0" tIns="0" rIns="0" bIns="0" rtlCol="0" anchor="ctr"/>
+          <a:lstStyle/>
+          <a:p>
+            <a:pPr indent="0" marL="0">
+              <a:buNone/>
+            </a:pPr>
+            <a:r>
+              <a:rPr lang="en-US" sz="1250" b="1" dirty="0">
                 <a:solidFill>
                   <a:srgbClr val="FFFFFF"/>
                 </a:solidFill>
@@ -1849,20 +2052,20 @@
               </a:rPr>
               <a:t>Train data ≠ test data</a:t>
             </a:r>
-            <a:endParaRPr lang="en-US" sz="1300" dirty="0"/>
-          </a:p>
-        </p:txBody>
-      </p:sp>
-      <p:sp>
-        <p:nvSpPr>
-          <p:cNvPr id="27" name="Text 25"/>
-          <p:cNvSpPr/>
-          <p:nvPr/>
-        </p:nvSpPr>
-        <p:spPr>
-          <a:xfrm>
-            <a:off x="685800" y="3200400"/>
-            <a:ext cx="3163824" cy="841248"/>
+            <a:endParaRPr lang="en-US" sz="1250" dirty="0"/>
+          </a:p>
+        </p:txBody>
+      </p:sp>
+      <p:sp>
+        <p:nvSpPr>
+          <p:cNvPr id="30" name="Text 28"/>
+          <p:cNvSpPr/>
+          <p:nvPr/>
+        </p:nvSpPr>
+        <p:spPr>
+          <a:xfrm>
+            <a:off x="685800" y="3547872"/>
+            <a:ext cx="3163824" cy="694944"/>
           </a:xfrm>
           <a:prstGeom prst="rect">
             <a:avLst/>
@@ -1876,7 +2079,7 @@
           <a:p>
             <a:pPr indent="0" marL="0">
               <a:lnSpc>
-                <a:spcPct val="112000"/>
+                <a:spcPct val="110000"/>
               </a:lnSpc>
               <a:buNone/>
             </a:pPr>
@@ -1889,7 +2092,7 @@
                 <a:ea typeface="Calibri" pitchFamily="34" charset="-122"/>
                 <a:cs typeface="Calibri" pitchFamily="34" charset="-120"/>
               </a:rPr>
-              <a:t>Every training clip is ~5 s and single-event. Levels 2–3 are 240–629 s and multi-event. We synthesise long sequences by concatenating clip embeddings, carrying offsets through to exact labels — free supervision for the regime we are scored on.</a:t>
+              <a:t>Clips are ~5 s and single-event; L2/L3 run 240–629 s. So we concatenate clip embeddings into synthetic long sequences, carrying offsets into exact labels.</a:t>
             </a:r>
             <a:endParaRPr lang="en-US" sz="950" dirty="0"/>
           </a:p>
@@ -1897,18 +2100,18 @@
       </p:sp>
       <p:sp>
         <p:nvSpPr>
-          <p:cNvPr id="28" name="Shape 26"/>
-          <p:cNvSpPr/>
-          <p:nvPr/>
-        </p:nvSpPr>
-        <p:spPr>
-          <a:xfrm>
-            <a:off x="4315968" y="2670048"/>
-            <a:ext cx="3529584" cy="1481328"/>
+          <p:cNvPr id="31" name="Shape 29"/>
+          <p:cNvSpPr/>
+          <p:nvPr/>
+        </p:nvSpPr>
+        <p:spPr>
+          <a:xfrm>
+            <a:off x="4315968" y="3035808"/>
+            <a:ext cx="3529584" cy="1298448"/>
           </a:xfrm>
           <a:prstGeom prst="roundRect">
             <a:avLst>
-              <a:gd name="adj" fmla="val 3704"/>
+              <a:gd name="adj" fmla="val 4225"/>
             </a:avLst>
           </a:prstGeom>
           <a:solidFill>
@@ -1924,14 +2127,14 @@
       </p:sp>
       <p:sp>
         <p:nvSpPr>
-          <p:cNvPr id="29" name="Shape 27"/>
-          <p:cNvSpPr/>
-          <p:nvPr/>
-        </p:nvSpPr>
-        <p:spPr>
-          <a:xfrm>
-            <a:off x="4498848" y="2852928"/>
-            <a:ext cx="274320" cy="274320"/>
+          <p:cNvPr id="32" name="Shape 30"/>
+          <p:cNvSpPr/>
+          <p:nvPr/>
+        </p:nvSpPr>
+        <p:spPr>
+          <a:xfrm>
+            <a:off x="4498848" y="3209544"/>
+            <a:ext cx="256032" cy="256032"/>
           </a:xfrm>
           <a:prstGeom prst="ellipse">
             <a:avLst/>
@@ -1949,14 +2152,14 @@
       </p:sp>
       <p:sp>
         <p:nvSpPr>
-          <p:cNvPr id="30" name="Text 28"/>
-          <p:cNvSpPr/>
-          <p:nvPr/>
-        </p:nvSpPr>
-        <p:spPr>
-          <a:xfrm>
-            <a:off x="4498848" y="2871216"/>
-            <a:ext cx="274320" cy="237744"/>
+          <p:cNvPr id="33" name="Text 31"/>
+          <p:cNvSpPr/>
+          <p:nvPr/>
+        </p:nvSpPr>
+        <p:spPr>
+          <a:xfrm>
+            <a:off x="4498848" y="3227832"/>
+            <a:ext cx="256032" cy="219456"/>
           </a:xfrm>
           <a:prstGeom prst="rect">
             <a:avLst/>
@@ -1972,7 +2175,7 @@
               <a:buNone/>
             </a:pPr>
             <a:r>
-              <a:rPr lang="en-US" sz="1200" b="1" dirty="0">
+              <a:rPr lang="en-US" sz="1100" b="1" dirty="0">
                 <a:solidFill>
                   <a:srgbClr val="10151F"/>
                 </a:solidFill>
@@ -1982,36 +2185,36 @@
               </a:rPr>
               <a:t>2</a:t>
             </a:r>
-            <a:endParaRPr lang="en-US" sz="1200" dirty="0"/>
-          </a:p>
-        </p:txBody>
-      </p:sp>
-      <p:sp>
-        <p:nvSpPr>
-          <p:cNvPr id="31" name="Text 29"/>
-          <p:cNvSpPr/>
-          <p:nvPr/>
-        </p:nvSpPr>
-        <p:spPr>
-          <a:xfrm>
-            <a:off x="4864608" y="2852928"/>
-            <a:ext cx="2798064" cy="274320"/>
-          </a:xfrm>
-          <a:prstGeom prst="rect">
-            <a:avLst/>
-          </a:prstGeom>
-          <a:noFill/>
-          <a:ln/>
-        </p:spPr>
-        <p:txBody>
-          <a:bodyPr wrap="square" lIns="0" tIns="0" rIns="0" bIns="0" rtlCol="0" anchor="ctr"/>
-          <a:lstStyle/>
-          <a:p>
-            <a:pPr indent="0" marL="0">
-              <a:buNone/>
-            </a:pPr>
-            <a:r>
-              <a:rPr lang="en-US" sz="1300" b="1" dirty="0">
+            <a:endParaRPr lang="en-US" sz="1100" dirty="0"/>
+          </a:p>
+        </p:txBody>
+      </p:sp>
+      <p:sp>
+        <p:nvSpPr>
+          <p:cNvPr id="34" name="Text 32"/>
+          <p:cNvSpPr/>
+          <p:nvPr/>
+        </p:nvSpPr>
+        <p:spPr>
+          <a:xfrm>
+            <a:off x="4846320" y="3200400"/>
+            <a:ext cx="2816352" cy="274320"/>
+          </a:xfrm>
+          <a:prstGeom prst="rect">
+            <a:avLst/>
+          </a:prstGeom>
+          <a:noFill/>
+          <a:ln/>
+        </p:spPr>
+        <p:txBody>
+          <a:bodyPr wrap="square" lIns="0" tIns="0" rIns="0" bIns="0" rtlCol="0" anchor="ctr"/>
+          <a:lstStyle/>
+          <a:p>
+            <a:pPr indent="0" marL="0">
+              <a:buNone/>
+            </a:pPr>
+            <a:r>
+              <a:rPr lang="en-US" sz="1250" b="1" dirty="0">
                 <a:solidFill>
                   <a:srgbClr val="FFFFFF"/>
                 </a:solidFill>
@@ -2019,22 +2222,22 @@
                 <a:ea typeface="Calibri" pitchFamily="34" charset="-122"/>
                 <a:cs typeface="Calibri" pitchFamily="34" charset="-120"/>
               </a:rPr>
-              <a:t>Dense labels, no MIL</a:t>
-            </a:r>
-            <a:endParaRPr lang="en-US" sz="1300" dirty="0"/>
-          </a:p>
-        </p:txBody>
-      </p:sp>
-      <p:sp>
-        <p:nvSpPr>
-          <p:cNvPr id="32" name="Text 30"/>
-          <p:cNvSpPr/>
-          <p:nvPr/>
-        </p:nvSpPr>
-        <p:spPr>
-          <a:xfrm>
-            <a:off x="4498848" y="3200400"/>
-            <a:ext cx="3163824" cy="841248"/>
+              <a:t>Dense labels, so no MIL</a:t>
+            </a:r>
+            <a:endParaRPr lang="en-US" sz="1250" dirty="0"/>
+          </a:p>
+        </p:txBody>
+      </p:sp>
+      <p:sp>
+        <p:nvSpPr>
+          <p:cNvPr id="35" name="Text 33"/>
+          <p:cNvSpPr/>
+          <p:nvPr/>
+        </p:nvSpPr>
+        <p:spPr>
+          <a:xfrm>
+            <a:off x="4498848" y="3547872"/>
+            <a:ext cx="3163824" cy="694944"/>
           </a:xfrm>
           <a:prstGeom prst="rect">
             <a:avLst/>
@@ -2048,7 +2251,7 @@
           <a:p>
             <a:pPr indent="0" marL="0">
               <a:lnSpc>
-                <a:spcPct val="112000"/>
+                <a:spcPct val="110000"/>
               </a:lnSpc>
               <a:buNone/>
             </a:pPr>
@@ -2061,7 +2264,7 @@
                 <a:ea typeface="Calibri" pitchFamily="34" charset="-122"/>
                 <a:cs typeface="Calibri" pitchFamily="34" charset="-120"/>
               </a:rPr>
-              <a:t>Audit showed all 2 200 anomaly rows already carry timestamps, so the planned MIL pooling was unnecessary. But 1 551 span their whole clip, so only ~649 teach boundaries — those get 3× loss weight.</a:t>
+              <a:t>All 2,200 anomaly rows already carry timestamps — the planned MIL pooling was unnecessary. Only ~649 teach boundaries, so those get 3× loss weight.</a:t>
             </a:r>
             <a:endParaRPr lang="en-US" sz="950" dirty="0"/>
           </a:p>
@@ -2069,18 +2272,18 @@
       </p:sp>
       <p:sp>
         <p:nvSpPr>
-          <p:cNvPr id="33" name="Shape 31"/>
-          <p:cNvSpPr/>
-          <p:nvPr/>
-        </p:nvSpPr>
-        <p:spPr>
-          <a:xfrm>
-            <a:off x="8129016" y="2670048"/>
-            <a:ext cx="3529584" cy="1481328"/>
+          <p:cNvPr id="36" name="Shape 34"/>
+          <p:cNvSpPr/>
+          <p:nvPr/>
+        </p:nvSpPr>
+        <p:spPr>
+          <a:xfrm>
+            <a:off x="8129016" y="3035808"/>
+            <a:ext cx="3529584" cy="1298448"/>
           </a:xfrm>
           <a:prstGeom prst="roundRect">
             <a:avLst>
-              <a:gd name="adj" fmla="val 3704"/>
+              <a:gd name="adj" fmla="val 4225"/>
             </a:avLst>
           </a:prstGeom>
           <a:solidFill>
@@ -2096,14 +2299,14 @@
       </p:sp>
       <p:sp>
         <p:nvSpPr>
-          <p:cNvPr id="34" name="Shape 32"/>
-          <p:cNvSpPr/>
-          <p:nvPr/>
-        </p:nvSpPr>
-        <p:spPr>
-          <a:xfrm>
-            <a:off x="8311896" y="2852928"/>
-            <a:ext cx="274320" cy="274320"/>
+          <p:cNvPr id="37" name="Shape 35"/>
+          <p:cNvSpPr/>
+          <p:nvPr/>
+        </p:nvSpPr>
+        <p:spPr>
+          <a:xfrm>
+            <a:off x="8311896" y="3209544"/>
+            <a:ext cx="256032" cy="256032"/>
           </a:xfrm>
           <a:prstGeom prst="ellipse">
             <a:avLst/>
@@ -2121,14 +2324,14 @@
       </p:sp>
       <p:sp>
         <p:nvSpPr>
-          <p:cNvPr id="35" name="Text 33"/>
-          <p:cNvSpPr/>
-          <p:nvPr/>
-        </p:nvSpPr>
-        <p:spPr>
-          <a:xfrm>
-            <a:off x="8311896" y="2871216"/>
-            <a:ext cx="274320" cy="237744"/>
+          <p:cNvPr id="38" name="Text 36"/>
+          <p:cNvSpPr/>
+          <p:nvPr/>
+        </p:nvSpPr>
+        <p:spPr>
+          <a:xfrm>
+            <a:off x="8311896" y="3227832"/>
+            <a:ext cx="256032" cy="219456"/>
           </a:xfrm>
           <a:prstGeom prst="rect">
             <a:avLst/>
@@ -2144,7 +2347,7 @@
               <a:buNone/>
             </a:pPr>
             <a:r>
-              <a:rPr lang="en-US" sz="1200" b="1" dirty="0">
+              <a:rPr lang="en-US" sz="1100" b="1" dirty="0">
                 <a:solidFill>
                   <a:srgbClr val="10151F"/>
                 </a:solidFill>
@@ -2154,36 +2357,36 @@
               </a:rPr>
               <a:t>3</a:t>
             </a:r>
-            <a:endParaRPr lang="en-US" sz="1200" dirty="0"/>
-          </a:p>
-        </p:txBody>
-      </p:sp>
-      <p:sp>
-        <p:nvSpPr>
-          <p:cNvPr id="36" name="Text 34"/>
-          <p:cNvSpPr/>
-          <p:nvPr/>
-        </p:nvSpPr>
-        <p:spPr>
-          <a:xfrm>
-            <a:off x="8677656" y="2852928"/>
-            <a:ext cx="2798064" cy="274320"/>
-          </a:xfrm>
-          <a:prstGeom prst="rect">
-            <a:avLst/>
-          </a:prstGeom>
-          <a:noFill/>
-          <a:ln/>
-        </p:spPr>
-        <p:txBody>
-          <a:bodyPr wrap="square" lIns="0" tIns="0" rIns="0" bIns="0" rtlCol="0" anchor="ctr"/>
-          <a:lstStyle/>
-          <a:p>
-            <a:pPr indent="0" marL="0">
-              <a:buNone/>
-            </a:pPr>
-            <a:r>
-              <a:rPr lang="en-US" sz="1300" b="1" dirty="0">
+            <a:endParaRPr lang="en-US" sz="1100" dirty="0"/>
+          </a:p>
+        </p:txBody>
+      </p:sp>
+      <p:sp>
+        <p:nvSpPr>
+          <p:cNvPr id="39" name="Text 37"/>
+          <p:cNvSpPr/>
+          <p:nvPr/>
+        </p:nvSpPr>
+        <p:spPr>
+          <a:xfrm>
+            <a:off x="8659368" y="3200400"/>
+            <a:ext cx="2816352" cy="274320"/>
+          </a:xfrm>
+          <a:prstGeom prst="rect">
+            <a:avLst/>
+          </a:prstGeom>
+          <a:noFill/>
+          <a:ln/>
+        </p:spPr>
+        <p:txBody>
+          <a:bodyPr wrap="square" lIns="0" tIns="0" rIns="0" bIns="0" rtlCol="0" anchor="ctr"/>
+          <a:lstStyle/>
+          <a:p>
+            <a:pPr indent="0" marL="0">
+              <a:buNone/>
+            </a:pPr>
+            <a:r>
+              <a:rPr lang="en-US" sz="1250" b="1" dirty="0">
                 <a:solidFill>
                   <a:srgbClr val="FFFFFF"/>
                 </a:solidFill>
@@ -2191,22 +2394,22 @@
                 <a:ea typeface="Calibri" pitchFamily="34" charset="-122"/>
                 <a:cs typeface="Calibri" pitchFamily="34" charset="-120"/>
               </a:rPr>
-              <a:t>Precision over recall</a:t>
-            </a:r>
-            <a:endParaRPr lang="en-US" sz="1300" dirty="0"/>
-          </a:p>
-        </p:txBody>
-      </p:sp>
-      <p:sp>
-        <p:nvSpPr>
-          <p:cNvPr id="37" name="Text 35"/>
-          <p:cNvSpPr/>
-          <p:nvPr/>
-        </p:nvSpPr>
-        <p:spPr>
-          <a:xfrm>
-            <a:off x="8311896" y="3200400"/>
-            <a:ext cx="3163824" cy="841248"/>
+              <a:t>Fragments are fatal</a:t>
+            </a:r>
+            <a:endParaRPr lang="en-US" sz="1250" dirty="0"/>
+          </a:p>
+        </p:txBody>
+      </p:sp>
+      <p:sp>
+        <p:nvSpPr>
+          <p:cNvPr id="40" name="Text 38"/>
+          <p:cNvSpPr/>
+          <p:nvPr/>
+        </p:nvSpPr>
+        <p:spPr>
+          <a:xfrm>
+            <a:off x="8311896" y="3547872"/>
+            <a:ext cx="3163824" cy="694944"/>
           </a:xfrm>
           <a:prstGeom prst="rect">
             <a:avLst/>
@@ -2220,7 +2423,7 @@
           <a:p>
             <a:pPr indent="0" marL="0">
               <a:lnSpc>
-                <a:spcPct val="112000"/>
+                <a:spcPct val="110000"/>
               </a:lnSpc>
               <a:buNone/>
             </a:pPr>
@@ -2233,7 +2436,7 @@
                 <a:ea typeface="Calibri" pitchFamily="34" charset="-122"/>
                 <a:cs typeface="Calibri" pitchFamily="34" charset="-120"/>
               </a:rPr>
-              <a:t>Scoring punishes false alarms far harder than misses. A perfect event set split into five fragments drops L2 from 1.00 to 0.47. So: high enter threshold, 20 s merge gap, few long segments.</a:t>
+              <a:t>A perfect answer split into five fragments scores 0.47 at L2. Only the best-overlapping one can match, so we emit few, long, merged events.</a:t>
             </a:r>
             <a:endParaRPr lang="en-US" sz="950" dirty="0"/>
           </a:p>
@@ -2241,18 +2444,18 @@
       </p:sp>
       <p:sp>
         <p:nvSpPr>
-          <p:cNvPr id="38" name="Shape 36"/>
-          <p:cNvSpPr/>
-          <p:nvPr/>
-        </p:nvSpPr>
-        <p:spPr>
-          <a:xfrm>
-            <a:off x="502920" y="4370832"/>
-            <a:ext cx="2583180" cy="960120"/>
+          <p:cNvPr id="41" name="Shape 39"/>
+          <p:cNvSpPr/>
+          <p:nvPr/>
+        </p:nvSpPr>
+        <p:spPr>
+          <a:xfrm>
+            <a:off x="502920" y="4535424"/>
+            <a:ext cx="2194560" cy="914400"/>
           </a:xfrm>
           <a:prstGeom prst="roundRect">
             <a:avLst>
-              <a:gd name="adj" fmla="val 5714"/>
+              <a:gd name="adj" fmla="val 6000"/>
             </a:avLst>
           </a:prstGeom>
           <a:solidFill>
@@ -2268,30 +2471,30 @@
       </p:sp>
       <p:sp>
         <p:nvSpPr>
-          <p:cNvPr id="39" name="Text 37"/>
-          <p:cNvSpPr/>
-          <p:nvPr/>
-        </p:nvSpPr>
-        <p:spPr>
-          <a:xfrm>
-            <a:off x="667512" y="4480560"/>
-            <a:ext cx="2253996" cy="457200"/>
-          </a:xfrm>
-          <a:prstGeom prst="rect">
-            <a:avLst/>
-          </a:prstGeom>
-          <a:noFill/>
-          <a:ln/>
-        </p:spPr>
-        <p:txBody>
-          <a:bodyPr wrap="square" lIns="0" tIns="0" rIns="0" bIns="0" rtlCol="0" anchor="ctr"/>
-          <a:lstStyle/>
-          <a:p>
-            <a:pPr indent="0" marL="0">
-              <a:buNone/>
-            </a:pPr>
-            <a:r>
-              <a:rPr lang="en-US" sz="2600" b="1" dirty="0">
+          <p:cNvPr id="42" name="Text 40"/>
+          <p:cNvSpPr/>
+          <p:nvPr/>
+        </p:nvSpPr>
+        <p:spPr>
+          <a:xfrm>
+            <a:off x="649224" y="4626864"/>
+            <a:ext cx="1901952" cy="420624"/>
+          </a:xfrm>
+          <a:prstGeom prst="rect">
+            <a:avLst/>
+          </a:prstGeom>
+          <a:noFill/>
+          <a:ln/>
+        </p:spPr>
+        <p:txBody>
+          <a:bodyPr wrap="square" lIns="0" tIns="0" rIns="0" bIns="0" rtlCol="0" anchor="ctr"/>
+          <a:lstStyle/>
+          <a:p>
+            <a:pPr indent="0" marL="0">
+              <a:buNone/>
+            </a:pPr>
+            <a:r>
+              <a:rPr lang="en-US" sz="2300" b="1" dirty="0">
                 <a:solidFill>
                   <a:srgbClr val="F2A63B"/>
                 </a:solidFill>
@@ -2301,36 +2504,36 @@
               </a:rPr>
               <a:t>41.7×</a:t>
             </a:r>
-            <a:endParaRPr lang="en-US" sz="2600" dirty="0"/>
-          </a:p>
-        </p:txBody>
-      </p:sp>
-      <p:sp>
-        <p:nvSpPr>
-          <p:cNvPr id="40" name="Text 38"/>
-          <p:cNvSpPr/>
-          <p:nvPr/>
-        </p:nvSpPr>
-        <p:spPr>
-          <a:xfrm>
-            <a:off x="667512" y="4974336"/>
-            <a:ext cx="2253996" cy="274320"/>
-          </a:xfrm>
-          <a:prstGeom prst="rect">
-            <a:avLst/>
-          </a:prstGeom>
-          <a:noFill/>
-          <a:ln/>
-        </p:spPr>
-        <p:txBody>
-          <a:bodyPr wrap="square" lIns="0" tIns="0" rIns="0" bIns="0" rtlCol="0" anchor="ctr"/>
-          <a:lstStyle/>
-          <a:p>
-            <a:pPr indent="0" marL="0">
-              <a:buNone/>
-            </a:pPr>
-            <a:r>
-              <a:rPr lang="en-US" sz="1050" dirty="0">
+            <a:endParaRPr lang="en-US" sz="2300" dirty="0"/>
+          </a:p>
+        </p:txBody>
+      </p:sp>
+      <p:sp>
+        <p:nvSpPr>
+          <p:cNvPr id="43" name="Text 41"/>
+          <p:cNvSpPr/>
+          <p:nvPr/>
+        </p:nvSpPr>
+        <p:spPr>
+          <a:xfrm>
+            <a:off x="649224" y="5084064"/>
+            <a:ext cx="1901952" cy="274320"/>
+          </a:xfrm>
+          <a:prstGeom prst="rect">
+            <a:avLst/>
+          </a:prstGeom>
+          <a:noFill/>
+          <a:ln/>
+        </p:spPr>
+        <p:txBody>
+          <a:bodyPr wrap="square" lIns="0" tIns="0" rIns="0" bIns="0" rtlCol="0" anchor="ctr"/>
+          <a:lstStyle/>
+          <a:p>
+            <a:pPr indent="0" marL="0">
+              <a:buNone/>
+            </a:pPr>
+            <a:r>
+              <a:rPr lang="en-US" sz="950" dirty="0">
                 <a:solidFill>
                   <a:srgbClr val="8496B4"/>
                 </a:solidFill>
@@ -2340,24 +2543,24 @@
               </a:rPr>
               <a:t>faster than realtime</a:t>
             </a:r>
-            <a:endParaRPr lang="en-US" sz="1050" dirty="0"/>
-          </a:p>
-        </p:txBody>
-      </p:sp>
-      <p:sp>
-        <p:nvSpPr>
-          <p:cNvPr id="41" name="Shape 39"/>
-          <p:cNvSpPr/>
-          <p:nvPr/>
-        </p:nvSpPr>
-        <p:spPr>
-          <a:xfrm>
-            <a:off x="3360420" y="4370832"/>
-            <a:ext cx="2583180" cy="960120"/>
+            <a:endParaRPr lang="en-US" sz="950" dirty="0"/>
+          </a:p>
+        </p:txBody>
+      </p:sp>
+      <p:sp>
+        <p:nvSpPr>
+          <p:cNvPr id="44" name="Shape 42"/>
+          <p:cNvSpPr/>
+          <p:nvPr/>
+        </p:nvSpPr>
+        <p:spPr>
+          <a:xfrm>
+            <a:off x="2743200" y="4535424"/>
+            <a:ext cx="2194560" cy="914400"/>
           </a:xfrm>
           <a:prstGeom prst="roundRect">
             <a:avLst>
-              <a:gd name="adj" fmla="val 5714"/>
+              <a:gd name="adj" fmla="val 6000"/>
             </a:avLst>
           </a:prstGeom>
           <a:solidFill>
@@ -2373,30 +2576,30 @@
       </p:sp>
       <p:sp>
         <p:nvSpPr>
-          <p:cNvPr id="42" name="Text 40"/>
-          <p:cNvSpPr/>
-          <p:nvPr/>
-        </p:nvSpPr>
-        <p:spPr>
-          <a:xfrm>
-            <a:off x="3525012" y="4480560"/>
-            <a:ext cx="2253996" cy="457200"/>
-          </a:xfrm>
-          <a:prstGeom prst="rect">
-            <a:avLst/>
-          </a:prstGeom>
-          <a:noFill/>
-          <a:ln/>
-        </p:spPr>
-        <p:txBody>
-          <a:bodyPr wrap="square" lIns="0" tIns="0" rIns="0" bIns="0" rtlCol="0" anchor="ctr"/>
-          <a:lstStyle/>
-          <a:p>
-            <a:pPr indent="0" marL="0">
-              <a:buNone/>
-            </a:pPr>
-            <a:r>
-              <a:rPr lang="en-US" sz="2600" b="1" dirty="0">
+          <p:cNvPr id="45" name="Text 43"/>
+          <p:cNvSpPr/>
+          <p:nvPr/>
+        </p:nvSpPr>
+        <p:spPr>
+          <a:xfrm>
+            <a:off x="2889504" y="4626864"/>
+            <a:ext cx="1901952" cy="420624"/>
+          </a:xfrm>
+          <a:prstGeom prst="rect">
+            <a:avLst/>
+          </a:prstGeom>
+          <a:noFill/>
+          <a:ln/>
+        </p:spPr>
+        <p:txBody>
+          <a:bodyPr wrap="square" lIns="0" tIns="0" rIns="0" bIns="0" rtlCol="0" anchor="ctr"/>
+          <a:lstStyle/>
+          <a:p>
+            <a:pPr indent="0" marL="0">
+              <a:buNone/>
+            </a:pPr>
+            <a:r>
+              <a:rPr lang="en-US" sz="2300" b="1" dirty="0">
                 <a:solidFill>
                   <a:srgbClr val="F2A63B"/>
                 </a:solidFill>
@@ -2406,36 +2609,36 @@
               </a:rPr>
               <a:t>0.024</a:t>
             </a:r>
-            <a:endParaRPr lang="en-US" sz="2600" dirty="0"/>
-          </a:p>
-        </p:txBody>
-      </p:sp>
-      <p:sp>
-        <p:nvSpPr>
-          <p:cNvPr id="43" name="Text 41"/>
-          <p:cNvSpPr/>
-          <p:nvPr/>
-        </p:nvSpPr>
-        <p:spPr>
-          <a:xfrm>
-            <a:off x="3525012" y="4974336"/>
-            <a:ext cx="2253996" cy="274320"/>
-          </a:xfrm>
-          <a:prstGeom prst="rect">
-            <a:avLst/>
-          </a:prstGeom>
-          <a:noFill/>
-          <a:ln/>
-        </p:spPr>
-        <p:txBody>
-          <a:bodyPr wrap="square" lIns="0" tIns="0" rIns="0" bIns="0" rtlCol="0" anchor="ctr"/>
-          <a:lstStyle/>
-          <a:p>
-            <a:pPr indent="0" marL="0">
-              <a:buNone/>
-            </a:pPr>
-            <a:r>
-              <a:rPr lang="en-US" sz="1050" dirty="0">
+            <a:endParaRPr lang="en-US" sz="2300" dirty="0"/>
+          </a:p>
+        </p:txBody>
+      </p:sp>
+      <p:sp>
+        <p:nvSpPr>
+          <p:cNvPr id="46" name="Text 44"/>
+          <p:cNvSpPr/>
+          <p:nvPr/>
+        </p:nvSpPr>
+        <p:spPr>
+          <a:xfrm>
+            <a:off x="2889504" y="5084064"/>
+            <a:ext cx="1901952" cy="274320"/>
+          </a:xfrm>
+          <a:prstGeom prst="rect">
+            <a:avLst/>
+          </a:prstGeom>
+          <a:noFill/>
+          <a:ln/>
+        </p:spPr>
+        <p:txBody>
+          <a:bodyPr wrap="square" lIns="0" tIns="0" rIns="0" bIns="0" rtlCol="0" anchor="ctr"/>
+          <a:lstStyle/>
+          <a:p>
+            <a:pPr indent="0" marL="0">
+              <a:buNone/>
+            </a:pPr>
+            <a:r>
+              <a:rPr lang="en-US" sz="950" dirty="0">
                 <a:solidFill>
                   <a:srgbClr val="8496B4"/>
                 </a:solidFill>
@@ -2445,24 +2648,24 @@
               </a:rPr>
               <a:t>processing ÷ video duration</a:t>
             </a:r>
-            <a:endParaRPr lang="en-US" sz="1050" dirty="0"/>
-          </a:p>
-        </p:txBody>
-      </p:sp>
-      <p:sp>
-        <p:nvSpPr>
-          <p:cNvPr id="44" name="Shape 42"/>
-          <p:cNvSpPr/>
-          <p:nvPr/>
-        </p:nvSpPr>
-        <p:spPr>
-          <a:xfrm>
-            <a:off x="6217920" y="4370832"/>
-            <a:ext cx="2583180" cy="960120"/>
+            <a:endParaRPr lang="en-US" sz="950" dirty="0"/>
+          </a:p>
+        </p:txBody>
+      </p:sp>
+      <p:sp>
+        <p:nvSpPr>
+          <p:cNvPr id="47" name="Shape 45"/>
+          <p:cNvSpPr/>
+          <p:nvPr/>
+        </p:nvSpPr>
+        <p:spPr>
+          <a:xfrm>
+            <a:off x="4983480" y="4535424"/>
+            <a:ext cx="2194560" cy="914400"/>
           </a:xfrm>
           <a:prstGeom prst="roundRect">
             <a:avLst>
-              <a:gd name="adj" fmla="val 5714"/>
+              <a:gd name="adj" fmla="val 6000"/>
             </a:avLst>
           </a:prstGeom>
           <a:solidFill>
@@ -2478,30 +2681,30 @@
       </p:sp>
       <p:sp>
         <p:nvSpPr>
-          <p:cNvPr id="45" name="Text 43"/>
-          <p:cNvSpPr/>
-          <p:nvPr/>
-        </p:nvSpPr>
-        <p:spPr>
-          <a:xfrm>
-            <a:off x="6382512" y="4480560"/>
-            <a:ext cx="2253996" cy="457200"/>
-          </a:xfrm>
-          <a:prstGeom prst="rect">
-            <a:avLst/>
-          </a:prstGeom>
-          <a:noFill/>
-          <a:ln/>
-        </p:spPr>
-        <p:txBody>
-          <a:bodyPr wrap="square" lIns="0" tIns="0" rIns="0" bIns="0" rtlCol="0" anchor="ctr"/>
-          <a:lstStyle/>
-          <a:p>
-            <a:pPr indent="0" marL="0">
-              <a:buNone/>
-            </a:pPr>
-            <a:r>
-              <a:rPr lang="en-US" sz="2600" b="1" dirty="0">
+          <p:cNvPr id="48" name="Text 46"/>
+          <p:cNvSpPr/>
+          <p:nvPr/>
+        </p:nvSpPr>
+        <p:spPr>
+          <a:xfrm>
+            <a:off x="5129784" y="4626864"/>
+            <a:ext cx="1901952" cy="420624"/>
+          </a:xfrm>
+          <a:prstGeom prst="rect">
+            <a:avLst/>
+          </a:prstGeom>
+          <a:noFill/>
+          <a:ln/>
+        </p:spPr>
+        <p:txBody>
+          <a:bodyPr wrap="square" lIns="0" tIns="0" rIns="0" bIns="0" rtlCol="0" anchor="ctr"/>
+          <a:lstStyle/>
+          <a:p>
+            <a:pPr indent="0" marL="0">
+              <a:buNone/>
+            </a:pPr>
+            <a:r>
+              <a:rPr lang="en-US" sz="2300" b="1" dirty="0">
                 <a:solidFill>
                   <a:srgbClr val="F2A63B"/>
                 </a:solidFill>
@@ -2511,36 +2714,36 @@
               </a:rPr>
               <a:t>2.18 M</a:t>
             </a:r>
-            <a:endParaRPr lang="en-US" sz="2600" dirty="0"/>
-          </a:p>
-        </p:txBody>
-      </p:sp>
-      <p:sp>
-        <p:nvSpPr>
-          <p:cNvPr id="46" name="Text 44"/>
-          <p:cNvSpPr/>
-          <p:nvPr/>
-        </p:nvSpPr>
-        <p:spPr>
-          <a:xfrm>
-            <a:off x="6382512" y="4974336"/>
-            <a:ext cx="2253996" cy="274320"/>
-          </a:xfrm>
-          <a:prstGeom prst="rect">
-            <a:avLst/>
-          </a:prstGeom>
-          <a:noFill/>
-          <a:ln/>
-        </p:spPr>
-        <p:txBody>
-          <a:bodyPr wrap="square" lIns="0" tIns="0" rIns="0" bIns="0" rtlCol="0" anchor="ctr"/>
-          <a:lstStyle/>
-          <a:p>
-            <a:pPr indent="0" marL="0">
-              <a:buNone/>
-            </a:pPr>
-            <a:r>
-              <a:rPr lang="en-US" sz="1050" dirty="0">
+            <a:endParaRPr lang="en-US" sz="2300" dirty="0"/>
+          </a:p>
+        </p:txBody>
+      </p:sp>
+      <p:sp>
+        <p:nvSpPr>
+          <p:cNvPr id="49" name="Text 47"/>
+          <p:cNvSpPr/>
+          <p:nvPr/>
+        </p:nvSpPr>
+        <p:spPr>
+          <a:xfrm>
+            <a:off x="5129784" y="5084064"/>
+            <a:ext cx="1901952" cy="274320"/>
+          </a:xfrm>
+          <a:prstGeom prst="rect">
+            <a:avLst/>
+          </a:prstGeom>
+          <a:noFill/>
+          <a:ln/>
+        </p:spPr>
+        <p:txBody>
+          <a:bodyPr wrap="square" lIns="0" tIns="0" rIns="0" bIns="0" rtlCol="0" anchor="ctr"/>
+          <a:lstStyle/>
+          <a:p>
+            <a:pPr indent="0" marL="0">
+              <a:buNone/>
+            </a:pPr>
+            <a:r>
+              <a:rPr lang="en-US" sz="950" dirty="0">
                 <a:solidFill>
                   <a:srgbClr val="8496B4"/>
                 </a:solidFill>
@@ -2548,26 +2751,26 @@
                 <a:ea typeface="Calibri" pitchFamily="34" charset="-122"/>
                 <a:cs typeface="Calibri" pitchFamily="34" charset="-120"/>
               </a:rPr>
-              <a:t>runtime parameters in the head</a:t>
-            </a:r>
-            <a:endParaRPr lang="en-US" sz="1050" dirty="0"/>
-          </a:p>
-        </p:txBody>
-      </p:sp>
-      <p:sp>
-        <p:nvSpPr>
-          <p:cNvPr id="47" name="Shape 45"/>
-          <p:cNvSpPr/>
-          <p:nvPr/>
-        </p:nvSpPr>
-        <p:spPr>
-          <a:xfrm>
-            <a:off x="9075420" y="4370832"/>
-            <a:ext cx="2583180" cy="960120"/>
+              <a:t>runtime parameters</a:t>
+            </a:r>
+            <a:endParaRPr lang="en-US" sz="950" dirty="0"/>
+          </a:p>
+        </p:txBody>
+      </p:sp>
+      <p:sp>
+        <p:nvSpPr>
+          <p:cNvPr id="50" name="Shape 48"/>
+          <p:cNvSpPr/>
+          <p:nvPr/>
+        </p:nvSpPr>
+        <p:spPr>
+          <a:xfrm>
+            <a:off x="7223760" y="4535424"/>
+            <a:ext cx="2194560" cy="914400"/>
           </a:xfrm>
           <a:prstGeom prst="roundRect">
             <a:avLst>
-              <a:gd name="adj" fmla="val 5714"/>
+              <a:gd name="adj" fmla="val 6000"/>
             </a:avLst>
           </a:prstGeom>
           <a:solidFill>
@@ -2583,30 +2786,30 @@
       </p:sp>
       <p:sp>
         <p:nvSpPr>
-          <p:cNvPr id="48" name="Text 46"/>
-          <p:cNvSpPr/>
-          <p:nvPr/>
-        </p:nvSpPr>
-        <p:spPr>
-          <a:xfrm>
-            <a:off x="9240012" y="4480560"/>
-            <a:ext cx="2253996" cy="457200"/>
-          </a:xfrm>
-          <a:prstGeom prst="rect">
-            <a:avLst/>
-          </a:prstGeom>
-          <a:noFill/>
-          <a:ln/>
-        </p:spPr>
-        <p:txBody>
-          <a:bodyPr wrap="square" lIns="0" tIns="0" rIns="0" bIns="0" rtlCol="0" anchor="ctr"/>
-          <a:lstStyle/>
-          <a:p>
-            <a:pPr indent="0" marL="0">
-              <a:buNone/>
-            </a:pPr>
-            <a:r>
-              <a:rPr lang="en-US" sz="2600" b="1" dirty="0">
+          <p:cNvPr id="51" name="Text 49"/>
+          <p:cNvSpPr/>
+          <p:nvPr/>
+        </p:nvSpPr>
+        <p:spPr>
+          <a:xfrm>
+            <a:off x="7370064" y="4626864"/>
+            <a:ext cx="1901952" cy="420624"/>
+          </a:xfrm>
+          <a:prstGeom prst="rect">
+            <a:avLst/>
+          </a:prstGeom>
+          <a:noFill/>
+          <a:ln/>
+        </p:spPr>
+        <p:txBody>
+          <a:bodyPr wrap="square" lIns="0" tIns="0" rIns="0" bIns="0" rtlCol="0" anchor="ctr"/>
+          <a:lstStyle/>
+          <a:p>
+            <a:pPr indent="0" marL="0">
+              <a:buNone/>
+            </a:pPr>
+            <a:r>
+              <a:rPr lang="en-US" sz="2300" b="1" dirty="0">
                 <a:solidFill>
                   <a:srgbClr val="F2A63B"/>
                 </a:solidFill>
@@ -2614,38 +2817,143 @@
                 <a:ea typeface="Cambria" pitchFamily="34" charset="-122"/>
                 <a:cs typeface="Cambria" pitchFamily="34" charset="-120"/>
               </a:rPr>
+              <a:t>1×</a:t>
+            </a:r>
+            <a:endParaRPr lang="en-US" sz="2300" dirty="0"/>
+          </a:p>
+        </p:txBody>
+      </p:sp>
+      <p:sp>
+        <p:nvSpPr>
+          <p:cNvPr id="52" name="Text 50"/>
+          <p:cNvSpPr/>
+          <p:nvPr/>
+        </p:nvSpPr>
+        <p:spPr>
+          <a:xfrm>
+            <a:off x="7370064" y="5084064"/>
+            <a:ext cx="1901952" cy="274320"/>
+          </a:xfrm>
+          <a:prstGeom prst="rect">
+            <a:avLst/>
+          </a:prstGeom>
+          <a:noFill/>
+          <a:ln/>
+        </p:spPr>
+        <p:txBody>
+          <a:bodyPr wrap="square" lIns="0" tIns="0" rIns="0" bIns="0" rtlCol="0" anchor="ctr"/>
+          <a:lstStyle/>
+          <a:p>
+            <a:pPr indent="0" marL="0">
+              <a:buNone/>
+            </a:pPr>
+            <a:r>
+              <a:rPr lang="en-US" sz="950" dirty="0">
+                <a:solidFill>
+                  <a:srgbClr val="8496B4"/>
+                </a:solidFill>
+                <a:latin typeface="Calibri" pitchFamily="34" charset="0"/>
+                <a:ea typeface="Calibri" pitchFamily="34" charset="-122"/>
+                <a:cs typeface="Calibri" pitchFamily="34" charset="-120"/>
+              </a:rPr>
+              <a:t>encode per video, reused</a:t>
+            </a:r>
+            <a:endParaRPr lang="en-US" sz="950" dirty="0"/>
+          </a:p>
+        </p:txBody>
+      </p:sp>
+      <p:sp>
+        <p:nvSpPr>
+          <p:cNvPr id="53" name="Shape 51"/>
+          <p:cNvSpPr/>
+          <p:nvPr/>
+        </p:nvSpPr>
+        <p:spPr>
+          <a:xfrm>
+            <a:off x="9464040" y="4535424"/>
+            <a:ext cx="2194560" cy="914400"/>
+          </a:xfrm>
+          <a:prstGeom prst="roundRect">
+            <a:avLst>
+              <a:gd name="adj" fmla="val 6000"/>
+            </a:avLst>
+          </a:prstGeom>
+          <a:solidFill>
+            <a:srgbClr val="222E44"/>
+          </a:solidFill>
+          <a:ln w="12700">
+            <a:solidFill>
+              <a:srgbClr val="222E44"/>
+            </a:solidFill>
+            <a:prstDash val="solid"/>
+          </a:ln>
+        </p:spPr>
+      </p:sp>
+      <p:sp>
+        <p:nvSpPr>
+          <p:cNvPr id="54" name="Text 52"/>
+          <p:cNvSpPr/>
+          <p:nvPr/>
+        </p:nvSpPr>
+        <p:spPr>
+          <a:xfrm>
+            <a:off x="9610344" y="4626864"/>
+            <a:ext cx="1901952" cy="420624"/>
+          </a:xfrm>
+          <a:prstGeom prst="rect">
+            <a:avLst/>
+          </a:prstGeom>
+          <a:noFill/>
+          <a:ln/>
+        </p:spPr>
+        <p:txBody>
+          <a:bodyPr wrap="square" lIns="0" tIns="0" rIns="0" bIns="0" rtlCol="0" anchor="ctr"/>
+          <a:lstStyle/>
+          <a:p>
+            <a:pPr indent="0" marL="0">
+              <a:buNone/>
+            </a:pPr>
+            <a:r>
+              <a:rPr lang="en-US" sz="2300" b="1" dirty="0">
+                <a:solidFill>
+                  <a:srgbClr val="F2A63B"/>
+                </a:solidFill>
+                <a:latin typeface="Cambria" pitchFamily="34" charset="0"/>
+                <a:ea typeface="Cambria" pitchFamily="34" charset="-122"/>
+                <a:cs typeface="Cambria" pitchFamily="34" charset="-120"/>
+              </a:rPr>
               <a:t>0</a:t>
             </a:r>
-            <a:endParaRPr lang="en-US" sz="2600" dirty="0"/>
-          </a:p>
-        </p:txBody>
-      </p:sp>
-      <p:sp>
-        <p:nvSpPr>
-          <p:cNvPr id="49" name="Text 47"/>
-          <p:cNvSpPr/>
-          <p:nvPr/>
-        </p:nvSpPr>
-        <p:spPr>
-          <a:xfrm>
-            <a:off x="9240012" y="4974336"/>
-            <a:ext cx="2253996" cy="274320"/>
-          </a:xfrm>
-          <a:prstGeom prst="rect">
-            <a:avLst/>
-          </a:prstGeom>
-          <a:noFill/>
-          <a:ln/>
-        </p:spPr>
-        <p:txBody>
-          <a:bodyPr wrap="square" lIns="0" tIns="0" rIns="0" bIns="0" rtlCol="0" anchor="ctr"/>
-          <a:lstStyle/>
-          <a:p>
-            <a:pPr indent="0" marL="0">
-              <a:buNone/>
-            </a:pPr>
-            <a:r>
-              <a:rPr lang="en-US" sz="1050" dirty="0">
+            <a:endParaRPr lang="en-US" sz="2300" dirty="0"/>
+          </a:p>
+        </p:txBody>
+      </p:sp>
+      <p:sp>
+        <p:nvSpPr>
+          <p:cNvPr id="55" name="Text 53"/>
+          <p:cNvSpPr/>
+          <p:nvPr/>
+        </p:nvSpPr>
+        <p:spPr>
+          <a:xfrm>
+            <a:off x="9610344" y="5084064"/>
+            <a:ext cx="1901952" cy="274320"/>
+          </a:xfrm>
+          <a:prstGeom prst="rect">
+            <a:avLst/>
+          </a:prstGeom>
+          <a:noFill/>
+          <a:ln/>
+        </p:spPr>
+        <p:txBody>
+          <a:bodyPr wrap="square" lIns="0" tIns="0" rIns="0" bIns="0" rtlCol="0" anchor="ctr"/>
+          <a:lstStyle/>
+          <a:p>
+            <a:pPr indent="0" marL="0">
+              <a:buNone/>
+            </a:pPr>
+            <a:r>
+              <a:rPr lang="en-US" sz="950" dirty="0">
                 <a:solidFill>
                   <a:srgbClr val="8496B4"/>
                 </a:solidFill>
@@ -2655,46 +2963,46 @@
               </a:rPr>
               <a:t>hosted models at inference</a:t>
             </a:r>
+            <a:endParaRPr lang="en-US" sz="950" dirty="0"/>
+          </a:p>
+        </p:txBody>
+      </p:sp>
+      <p:sp>
+        <p:nvSpPr>
+          <p:cNvPr id="56" name="Text 54"/>
+          <p:cNvSpPr/>
+          <p:nvPr/>
+        </p:nvSpPr>
+        <p:spPr>
+          <a:xfrm>
+            <a:off x="502920" y="5596128"/>
+            <a:ext cx="11155680" cy="365760"/>
+          </a:xfrm>
+          <a:prstGeom prst="rect">
+            <a:avLst/>
+          </a:prstGeom>
+          <a:noFill/>
+          <a:ln/>
+        </p:spPr>
+        <p:txBody>
+          <a:bodyPr wrap="square" lIns="0" tIns="0" rIns="0" bIns="0" rtlCol="0" anchor="ctr"/>
+          <a:lstStyle/>
+          <a:p>
+            <a:pPr indent="0" marL="0">
+              <a:buNone/>
+            </a:pPr>
+            <a:r>
+              <a:rPr lang="en-US" sz="1050" i="1" dirty="0">
+                <a:solidFill>
+                  <a:srgbClr val="8496B4"/>
+                </a:solidFill>
+                <a:latin typeface="Calibri" pitchFamily="34" charset="0"/>
+                <a:ea typeface="Calibri" pitchFamily="34" charset="-122"/>
+                <a:cs typeface="Calibri" pitchFamily="34" charset="-120"/>
+              </a:rPr>
+              <a:t>Why this shape: Stage A alone is a complete submission. We built the heavier VLM verifier the brief points toward, measured it, and shipped without it — see slide 2.</a:t>
+            </a:r>
             <a:endParaRPr lang="en-US" sz="1050" dirty="0"/>
-          </a:p>
-        </p:txBody>
-      </p:sp>
-      <p:sp>
-        <p:nvSpPr>
-          <p:cNvPr id="50" name="Text 48"/>
-          <p:cNvSpPr/>
-          <p:nvPr/>
-        </p:nvSpPr>
-        <p:spPr>
-          <a:xfrm>
-            <a:off x="502920" y="5532120"/>
-            <a:ext cx="11155680" cy="411480"/>
-          </a:xfrm>
-          <a:prstGeom prst="rect">
-            <a:avLst/>
-          </a:prstGeom>
-          <a:noFill/>
-          <a:ln/>
-        </p:spPr>
-        <p:txBody>
-          <a:bodyPr wrap="square" lIns="0" tIns="0" rIns="0" bIns="0" rtlCol="0" anchor="ctr"/>
-          <a:lstStyle/>
-          <a:p>
-            <a:pPr indent="0" marL="0">
-              <a:buNone/>
-            </a:pPr>
-            <a:r>
-              <a:rPr lang="en-US" sz="1100" i="1" dirty="0">
-                <a:solidFill>
-                  <a:srgbClr val="8496B4"/>
-                </a:solidFill>
-                <a:latin typeface="Calibri" pitchFamily="34" charset="0"/>
-                <a:ea typeface="Calibri" pitchFamily="34" charset="-122"/>
-                <a:cs typeface="Calibri" pitchFamily="34" charset="-120"/>
-              </a:rPr>
-              <a:t>Why this shape: Stage A alone is a complete submission. A heavier verifier could sit on top of its candidate segments — we built one and measured it, and zero-shot Qwen3-VL scored 1/6 where this head scored 3/6, at 7.4× the latency. We shipped without it.</a:t>
-            </a:r>
-            <a:endParaRPr lang="en-US" sz="1100" dirty="0"/>
           </a:p>
         </p:txBody>
       </p:sp>
@@ -2738,7 +3046,7 @@
         </p:nvSpPr>
         <p:spPr>
           <a:xfrm>
-            <a:off x="502920" y="310896"/>
+            <a:off x="502920" y="292608"/>
             <a:ext cx="11155680" cy="457200"/>
           </a:xfrm>
           <a:prstGeom prst="rect">
@@ -2755,7 +3063,7 @@
               <a:buNone/>
             </a:pPr>
             <a:r>
-              <a:rPr lang="en-US" sz="2700" b="1" dirty="0">
+              <a:rPr lang="en-US" sz="2600" b="1" dirty="0">
                 <a:solidFill>
                   <a:srgbClr val="FFFFFF"/>
                 </a:solidFill>
@@ -2765,7 +3073,7 @@
               </a:rPr>
               <a:t>Private evaluation set: 61.8 / 100, 2nd place</a:t>
             </a:r>
-            <a:endParaRPr lang="en-US" sz="2700" dirty="0"/>
+            <a:endParaRPr lang="en-US" sz="2600" dirty="0"/>
           </a:p>
         </p:txBody>
       </p:sp>
@@ -2777,24 +3085,24 @@
         </p:nvSpPr>
         <p:spPr>
           <a:xfrm>
-            <a:off x="502920" y="795528"/>
-            <a:ext cx="11155680" cy="292608"/>
-          </a:xfrm>
-          <a:prstGeom prst="rect">
-            <a:avLst/>
-          </a:prstGeom>
-          <a:noFill/>
-          <a:ln/>
-        </p:spPr>
-        <p:txBody>
-          <a:bodyPr wrap="square" lIns="0" tIns="0" rIns="0" bIns="0" rtlCol="0" anchor="ctr"/>
-          <a:lstStyle/>
-          <a:p>
-            <a:pPr indent="0" marL="0">
-              <a:buNone/>
-            </a:pPr>
-            <a:r>
-              <a:rPr lang="en-US" sz="1300" dirty="0">
+            <a:off x="502920" y="768096"/>
+            <a:ext cx="11155680" cy="274320"/>
+          </a:xfrm>
+          <a:prstGeom prst="rect">
+            <a:avLst/>
+          </a:prstGeom>
+          <a:noFill/>
+          <a:ln/>
+        </p:spPr>
+        <p:txBody>
+          <a:bodyPr wrap="square" lIns="0" tIns="0" rIns="0" bIns="0" rtlCol="0" anchor="ctr"/>
+          <a:lstStyle/>
+          <a:p>
+            <a:pPr indent="0" marL="0">
+              <a:buNone/>
+            </a:pPr>
+            <a:r>
+              <a:rPr lang="en-US" sz="1250" dirty="0">
                 <a:solidFill>
                   <a:srgbClr val="8496B4"/>
                 </a:solidFill>
@@ -2804,7 +3112,7 @@
               </a:rPr>
               <a:t>From 37.2 to 61.8 in one afternoon — and almost none of it came from a better model.</a:t>
             </a:r>
-            <a:endParaRPr lang="en-US" sz="1300" dirty="0"/>
+            <a:endParaRPr lang="en-US" sz="1250" dirty="0"/>
           </a:p>
         </p:txBody>
       </p:sp>
@@ -2816,12 +3124,12 @@
         </p:nvSpPr>
         <p:spPr>
           <a:xfrm>
-            <a:off x="502920" y="1280160"/>
-            <a:ext cx="2578608" cy="1298448"/>
+            <a:off x="502920" y="1188720"/>
+            <a:ext cx="2578608" cy="1243584"/>
           </a:xfrm>
           <a:prstGeom prst="roundRect">
             <a:avLst>
-              <a:gd name="adj" fmla="val 4225"/>
+              <a:gd name="adj" fmla="val 4412"/>
             </a:avLst>
           </a:prstGeom>
           <a:solidFill>
@@ -2843,7 +3151,7 @@
         </p:nvSpPr>
         <p:spPr>
           <a:xfrm>
-            <a:off x="667512" y="1389888"/>
+            <a:off x="667512" y="1280160"/>
             <a:ext cx="2249424" cy="237744"/>
           </a:xfrm>
           <a:prstGeom prst="rect">
@@ -2860,7 +3168,7 @@
               <a:buNone/>
             </a:pPr>
             <a:r>
-              <a:rPr lang="en-US" sz="1100" dirty="0">
+              <a:rPr lang="en-US" sz="1050" dirty="0">
                 <a:solidFill>
                   <a:srgbClr val="8496B4"/>
                 </a:solidFill>
@@ -2870,7 +3178,7 @@
               </a:rPr>
               <a:t>D1 Clear event</a:t>
             </a:r>
-            <a:endParaRPr lang="en-US" sz="1100" dirty="0"/>
+            <a:endParaRPr lang="en-US" sz="1050" dirty="0"/>
           </a:p>
         </p:txBody>
       </p:sp>
@@ -2882,24 +3190,24 @@
         </p:nvSpPr>
         <p:spPr>
           <a:xfrm>
-            <a:off x="667512" y="1682496"/>
-            <a:ext cx="2249424" cy="512064"/>
-          </a:xfrm>
-          <a:prstGeom prst="rect">
-            <a:avLst/>
-          </a:prstGeom>
-          <a:noFill/>
-          <a:ln/>
-        </p:spPr>
-        <p:txBody>
-          <a:bodyPr wrap="square" lIns="0" tIns="0" rIns="0" bIns="0" rtlCol="0" anchor="ctr"/>
-          <a:lstStyle/>
-          <a:p>
-            <a:pPr indent="0" marL="0">
-              <a:buNone/>
-            </a:pPr>
-            <a:r>
-              <a:rPr lang="en-US" sz="3000" b="1" dirty="0">
+            <a:off x="667512" y="1554480"/>
+            <a:ext cx="2249424" cy="493776"/>
+          </a:xfrm>
+          <a:prstGeom prst="rect">
+            <a:avLst/>
+          </a:prstGeom>
+          <a:noFill/>
+          <a:ln/>
+        </p:spPr>
+        <p:txBody>
+          <a:bodyPr wrap="square" lIns="0" tIns="0" rIns="0" bIns="0" rtlCol="0" anchor="ctr"/>
+          <a:lstStyle/>
+          <a:p>
+            <a:pPr indent="0" marL="0">
+              <a:buNone/>
+            </a:pPr>
+            <a:r>
+              <a:rPr lang="en-US" sz="2800" b="1" dirty="0">
                 <a:solidFill>
                   <a:srgbClr val="F2A63B"/>
                 </a:solidFill>
@@ -2913,7 +3221,7 @@
               <a:buNone/>
             </a:pPr>
             <a:r>
-              <a:rPr lang="en-US" sz="1300" dirty="0">
+              <a:rPr lang="en-US" sz="1250" dirty="0">
                 <a:solidFill>
                   <a:srgbClr val="8496B4"/>
                 </a:solidFill>
@@ -2923,7 +3231,7 @@
               </a:rPr>
               <a:t>  / 25</a:t>
             </a:r>
-            <a:endParaRPr lang="en-US" sz="3000" dirty="0"/>
+            <a:endParaRPr lang="en-US" sz="2800" dirty="0"/>
           </a:p>
         </p:txBody>
       </p:sp>
@@ -2935,7 +3243,7 @@
         </p:nvSpPr>
         <p:spPr>
           <a:xfrm>
-            <a:off x="667512" y="2231136"/>
+            <a:off x="667512" y="2084832"/>
             <a:ext cx="2249424" cy="237744"/>
           </a:xfrm>
           <a:prstGeom prst="rect">
@@ -2952,7 +3260,7 @@
               <a:buNone/>
             </a:pPr>
             <a:r>
-              <a:rPr lang="en-US" sz="1000" dirty="0">
+              <a:rPr lang="en-US" sz="950" dirty="0">
                 <a:solidFill>
                   <a:srgbClr val="5FCB8E"/>
                 </a:solidFill>
@@ -2962,7 +3270,7 @@
               </a:rPr>
               <a:t>was 11.8</a:t>
             </a:r>
-            <a:endParaRPr lang="en-US" sz="1000" dirty="0"/>
+            <a:endParaRPr lang="en-US" sz="950" dirty="0"/>
           </a:p>
         </p:txBody>
       </p:sp>
@@ -2974,12 +3282,12 @@
         </p:nvSpPr>
         <p:spPr>
           <a:xfrm>
-            <a:off x="3364992" y="1280160"/>
-            <a:ext cx="2578608" cy="1298448"/>
+            <a:off x="3364992" y="1188720"/>
+            <a:ext cx="2578608" cy="1243584"/>
           </a:xfrm>
           <a:prstGeom prst="roundRect">
             <a:avLst>
-              <a:gd name="adj" fmla="val 4225"/>
+              <a:gd name="adj" fmla="val 4412"/>
             </a:avLst>
           </a:prstGeom>
           <a:solidFill>
@@ -3001,7 +3309,7 @@
         </p:nvSpPr>
         <p:spPr>
           <a:xfrm>
-            <a:off x="3529584" y="1389888"/>
+            <a:off x="3529584" y="1280160"/>
             <a:ext cx="2249424" cy="237744"/>
           </a:xfrm>
           <a:prstGeom prst="rect">
@@ -3018,7 +3326,7 @@
               <a:buNone/>
             </a:pPr>
             <a:r>
-              <a:rPr lang="en-US" sz="1100" dirty="0">
+              <a:rPr lang="en-US" sz="1050" dirty="0">
                 <a:solidFill>
                   <a:srgbClr val="8496B4"/>
                 </a:solidFill>
@@ -3028,7 +3336,7 @@
               </a:rPr>
               <a:t>D2 When it happens</a:t>
             </a:r>
-            <a:endParaRPr lang="en-US" sz="1100" dirty="0"/>
+            <a:endParaRPr lang="en-US" sz="1050" dirty="0"/>
           </a:p>
         </p:txBody>
       </p:sp>
@@ -3040,24 +3348,24 @@
         </p:nvSpPr>
         <p:spPr>
           <a:xfrm>
-            <a:off x="3529584" y="1682496"/>
-            <a:ext cx="2249424" cy="512064"/>
-          </a:xfrm>
-          <a:prstGeom prst="rect">
-            <a:avLst/>
-          </a:prstGeom>
-          <a:noFill/>
-          <a:ln/>
-        </p:spPr>
-        <p:txBody>
-          <a:bodyPr wrap="square" lIns="0" tIns="0" rIns="0" bIns="0" rtlCol="0" anchor="ctr"/>
-          <a:lstStyle/>
-          <a:p>
-            <a:pPr indent="0" marL="0">
-              <a:buNone/>
-            </a:pPr>
-            <a:r>
-              <a:rPr lang="en-US" sz="3000" b="1" dirty="0">
+            <a:off x="3529584" y="1554480"/>
+            <a:ext cx="2249424" cy="493776"/>
+          </a:xfrm>
+          <a:prstGeom prst="rect">
+            <a:avLst/>
+          </a:prstGeom>
+          <a:noFill/>
+          <a:ln/>
+        </p:spPr>
+        <p:txBody>
+          <a:bodyPr wrap="square" lIns="0" tIns="0" rIns="0" bIns="0" rtlCol="0" anchor="ctr"/>
+          <a:lstStyle/>
+          <a:p>
+            <a:pPr indent="0" marL="0">
+              <a:buNone/>
+            </a:pPr>
+            <a:r>
+              <a:rPr lang="en-US" sz="2800" b="1" dirty="0">
                 <a:solidFill>
                   <a:srgbClr val="F2A63B"/>
                 </a:solidFill>
@@ -3071,7 +3379,7 @@
               <a:buNone/>
             </a:pPr>
             <a:r>
-              <a:rPr lang="en-US" sz="1300" dirty="0">
+              <a:rPr lang="en-US" sz="1250" dirty="0">
                 <a:solidFill>
                   <a:srgbClr val="8496B4"/>
                 </a:solidFill>
@@ -3081,7 +3389,7 @@
               </a:rPr>
               <a:t>  / 35</a:t>
             </a:r>
-            <a:endParaRPr lang="en-US" sz="3000" dirty="0"/>
+            <a:endParaRPr lang="en-US" sz="2800" dirty="0"/>
           </a:p>
         </p:txBody>
       </p:sp>
@@ -3093,7 +3401,7 @@
         </p:nvSpPr>
         <p:spPr>
           <a:xfrm>
-            <a:off x="3529584" y="2231136"/>
+            <a:off x="3529584" y="2084832"/>
             <a:ext cx="2249424" cy="237744"/>
           </a:xfrm>
           <a:prstGeom prst="rect">
@@ -3110,7 +3418,7 @@
               <a:buNone/>
             </a:pPr>
             <a:r>
-              <a:rPr lang="en-US" sz="1000" dirty="0">
+              <a:rPr lang="en-US" sz="950" dirty="0">
                 <a:solidFill>
                   <a:srgbClr val="5FCB8E"/>
                 </a:solidFill>
@@ -3120,7 +3428,7 @@
               </a:rPr>
               <a:t>was 16.1 · best on board</a:t>
             </a:r>
-            <a:endParaRPr lang="en-US" sz="1000" dirty="0"/>
+            <a:endParaRPr lang="en-US" sz="950" dirty="0"/>
           </a:p>
         </p:txBody>
       </p:sp>
@@ -3132,12 +3440,12 @@
         </p:nvSpPr>
         <p:spPr>
           <a:xfrm>
-            <a:off x="6227064" y="1280160"/>
-            <a:ext cx="2578608" cy="1298448"/>
+            <a:off x="6227064" y="1188720"/>
+            <a:ext cx="2578608" cy="1243584"/>
           </a:xfrm>
           <a:prstGeom prst="roundRect">
             <a:avLst>
-              <a:gd name="adj" fmla="val 4225"/>
+              <a:gd name="adj" fmla="val 4412"/>
             </a:avLst>
           </a:prstGeom>
           <a:solidFill>
@@ -3159,7 +3467,7 @@
         </p:nvSpPr>
         <p:spPr>
           <a:xfrm>
-            <a:off x="6391656" y="1389888"/>
+            <a:off x="6391656" y="1280160"/>
             <a:ext cx="2249424" cy="237744"/>
           </a:xfrm>
           <a:prstGeom prst="rect">
@@ -3176,7 +3484,7 @@
               <a:buNone/>
             </a:pPr>
             <a:r>
-              <a:rPr lang="en-US" sz="1100" dirty="0">
+              <a:rPr lang="en-US" sz="1050" dirty="0">
                 <a:solidFill>
                   <a:srgbClr val="8496B4"/>
                 </a:solidFill>
@@ -3186,7 +3494,7 @@
               </a:rPr>
               <a:t>D3 Long context</a:t>
             </a:r>
-            <a:endParaRPr lang="en-US" sz="1100" dirty="0"/>
+            <a:endParaRPr lang="en-US" sz="1050" dirty="0"/>
           </a:p>
         </p:txBody>
       </p:sp>
@@ -3198,24 +3506,24 @@
         </p:nvSpPr>
         <p:spPr>
           <a:xfrm>
-            <a:off x="6391656" y="1682496"/>
-            <a:ext cx="2249424" cy="512064"/>
-          </a:xfrm>
-          <a:prstGeom prst="rect">
-            <a:avLst/>
-          </a:prstGeom>
-          <a:noFill/>
-          <a:ln/>
-        </p:spPr>
-        <p:txBody>
-          <a:bodyPr wrap="square" lIns="0" tIns="0" rIns="0" bIns="0" rtlCol="0" anchor="ctr"/>
-          <a:lstStyle/>
-          <a:p>
-            <a:pPr indent="0" marL="0">
-              <a:buNone/>
-            </a:pPr>
-            <a:r>
-              <a:rPr lang="en-US" sz="3000" b="1" dirty="0">
+            <a:off x="6391656" y="1554480"/>
+            <a:ext cx="2249424" cy="493776"/>
+          </a:xfrm>
+          <a:prstGeom prst="rect">
+            <a:avLst/>
+          </a:prstGeom>
+          <a:noFill/>
+          <a:ln/>
+        </p:spPr>
+        <p:txBody>
+          <a:bodyPr wrap="square" lIns="0" tIns="0" rIns="0" bIns="0" rtlCol="0" anchor="ctr"/>
+          <a:lstStyle/>
+          <a:p>
+            <a:pPr indent="0" marL="0">
+              <a:buNone/>
+            </a:pPr>
+            <a:r>
+              <a:rPr lang="en-US" sz="2800" b="1" dirty="0">
                 <a:solidFill>
                   <a:srgbClr val="F2A63B"/>
                 </a:solidFill>
@@ -3229,7 +3537,7 @@
               <a:buNone/>
             </a:pPr>
             <a:r>
-              <a:rPr lang="en-US" sz="1300" dirty="0">
+              <a:rPr lang="en-US" sz="1250" dirty="0">
                 <a:solidFill>
                   <a:srgbClr val="8496B4"/>
                 </a:solidFill>
@@ -3239,7 +3547,7 @@
               </a:rPr>
               <a:t>  / 40</a:t>
             </a:r>
-            <a:endParaRPr lang="en-US" sz="3000" dirty="0"/>
+            <a:endParaRPr lang="en-US" sz="2800" dirty="0"/>
           </a:p>
         </p:txBody>
       </p:sp>
@@ -3251,7 +3559,7 @@
         </p:nvSpPr>
         <p:spPr>
           <a:xfrm>
-            <a:off x="6391656" y="2231136"/>
+            <a:off x="6391656" y="2084832"/>
             <a:ext cx="2249424" cy="237744"/>
           </a:xfrm>
           <a:prstGeom prst="rect">
@@ -3268,7 +3576,7 @@
               <a:buNone/>
             </a:pPr>
             <a:r>
-              <a:rPr lang="en-US" sz="1000" dirty="0">
+              <a:rPr lang="en-US" sz="950" dirty="0">
                 <a:solidFill>
                   <a:srgbClr val="5FCB8E"/>
                 </a:solidFill>
@@ -3278,7 +3586,7 @@
               </a:rPr>
               <a:t>was 16.3 · recall 5 of 6</a:t>
             </a:r>
-            <a:endParaRPr lang="en-US" sz="1000" dirty="0"/>
+            <a:endParaRPr lang="en-US" sz="950" dirty="0"/>
           </a:p>
         </p:txBody>
       </p:sp>
@@ -3290,12 +3598,12 @@
         </p:nvSpPr>
         <p:spPr>
           <a:xfrm>
-            <a:off x="9089136" y="1280160"/>
-            <a:ext cx="2569464" cy="1298448"/>
+            <a:off x="9089136" y="1188720"/>
+            <a:ext cx="2569464" cy="1243584"/>
           </a:xfrm>
           <a:prstGeom prst="roundRect">
             <a:avLst>
-              <a:gd name="adj" fmla="val 4225"/>
+              <a:gd name="adj" fmla="val 4412"/>
             </a:avLst>
           </a:prstGeom>
           <a:solidFill>
@@ -3317,7 +3625,7 @@
         </p:nvSpPr>
         <p:spPr>
           <a:xfrm>
-            <a:off x="9253728" y="1389888"/>
+            <a:off x="9253728" y="1280160"/>
             <a:ext cx="2240280" cy="237744"/>
           </a:xfrm>
           <a:prstGeom prst="rect">
@@ -3334,7 +3642,7 @@
               <a:buNone/>
             </a:pPr>
             <a:r>
-              <a:rPr lang="en-US" sz="1100" dirty="0">
+              <a:rPr lang="en-US" sz="1050" dirty="0">
                 <a:solidFill>
                   <a:srgbClr val="8496B4"/>
                 </a:solidFill>
@@ -3344,7 +3652,7 @@
               </a:rPr>
               <a:t>TOTAL</a:t>
             </a:r>
-            <a:endParaRPr lang="en-US" sz="1100" dirty="0"/>
+            <a:endParaRPr lang="en-US" sz="1050" dirty="0"/>
           </a:p>
         </p:txBody>
       </p:sp>
@@ -3356,24 +3664,24 @@
         </p:nvSpPr>
         <p:spPr>
           <a:xfrm>
-            <a:off x="9253728" y="1682496"/>
-            <a:ext cx="2240280" cy="512064"/>
-          </a:xfrm>
-          <a:prstGeom prst="rect">
-            <a:avLst/>
-          </a:prstGeom>
-          <a:noFill/>
-          <a:ln/>
-        </p:spPr>
-        <p:txBody>
-          <a:bodyPr wrap="square" lIns="0" tIns="0" rIns="0" bIns="0" rtlCol="0" anchor="ctr"/>
-          <a:lstStyle/>
-          <a:p>
-            <a:pPr indent="0" marL="0">
-              <a:buNone/>
-            </a:pPr>
-            <a:r>
-              <a:rPr lang="en-US" sz="3000" b="1" dirty="0">
+            <a:off x="9253728" y="1554480"/>
+            <a:ext cx="2240280" cy="493776"/>
+          </a:xfrm>
+          <a:prstGeom prst="rect">
+            <a:avLst/>
+          </a:prstGeom>
+          <a:noFill/>
+          <a:ln/>
+        </p:spPr>
+        <p:txBody>
+          <a:bodyPr wrap="square" lIns="0" tIns="0" rIns="0" bIns="0" rtlCol="0" anchor="ctr"/>
+          <a:lstStyle/>
+          <a:p>
+            <a:pPr indent="0" marL="0">
+              <a:buNone/>
+            </a:pPr>
+            <a:r>
+              <a:rPr lang="en-US" sz="2800" b="1" dirty="0">
                 <a:solidFill>
                   <a:srgbClr val="5FCB8E"/>
                 </a:solidFill>
@@ -3387,7 +3695,7 @@
               <a:buNone/>
             </a:pPr>
             <a:r>
-              <a:rPr lang="en-US" sz="1300" dirty="0">
+              <a:rPr lang="en-US" sz="1250" dirty="0">
                 <a:solidFill>
                   <a:srgbClr val="8496B4"/>
                 </a:solidFill>
@@ -3397,7 +3705,7 @@
               </a:rPr>
               <a:t>  / 100</a:t>
             </a:r>
-            <a:endParaRPr lang="en-US" sz="3000" dirty="0"/>
+            <a:endParaRPr lang="en-US" sz="2800" dirty="0"/>
           </a:p>
         </p:txBody>
       </p:sp>
@@ -3409,7 +3717,7 @@
         </p:nvSpPr>
         <p:spPr>
           <a:xfrm>
-            <a:off x="9253728" y="2231136"/>
+            <a:off x="9253728" y="2084832"/>
             <a:ext cx="2240280" cy="237744"/>
           </a:xfrm>
           <a:prstGeom prst="rect">
@@ -3426,7 +3734,7 @@
               <a:buNone/>
             </a:pPr>
             <a:r>
-              <a:rPr lang="en-US" sz="1000" dirty="0">
+              <a:rPr lang="en-US" sz="950" dirty="0">
                 <a:solidFill>
                   <a:srgbClr val="5FCB8E"/>
                 </a:solidFill>
@@ -3436,7 +3744,7 @@
               </a:rPr>
               <a:t>2nd place · started at 37.2</a:t>
             </a:r>
-            <a:endParaRPr lang="en-US" sz="1000" dirty="0"/>
+            <a:endParaRPr lang="en-US" sz="950" dirty="0"/>
           </a:p>
         </p:txBody>
       </p:sp>
@@ -3448,12 +3756,12 @@
         </p:nvSpPr>
         <p:spPr>
           <a:xfrm>
-            <a:off x="502920" y="2798064"/>
-            <a:ext cx="5577840" cy="2670048"/>
+            <a:off x="502920" y="2688336"/>
+            <a:ext cx="5577840" cy="2487168"/>
           </a:xfrm>
           <a:prstGeom prst="roundRect">
             <a:avLst>
-              <a:gd name="adj" fmla="val 2055"/>
+              <a:gd name="adj" fmla="val 2206"/>
             </a:avLst>
           </a:prstGeom>
           <a:solidFill>
@@ -3475,24 +3783,24 @@
         </p:nvSpPr>
         <p:spPr>
           <a:xfrm>
-            <a:off x="685800" y="2926080"/>
-            <a:ext cx="5212080" cy="274320"/>
-          </a:xfrm>
-          <a:prstGeom prst="rect">
-            <a:avLst/>
-          </a:prstGeom>
-          <a:noFill/>
-          <a:ln/>
-        </p:spPr>
-        <p:txBody>
-          <a:bodyPr wrap="square" lIns="0" tIns="0" rIns="0" bIns="0" rtlCol="0" anchor="ctr"/>
-          <a:lstStyle/>
-          <a:p>
-            <a:pPr indent="0" marL="0">
-              <a:buNone/>
-            </a:pPr>
-            <a:r>
-              <a:rPr lang="en-US" sz="1300" b="1" dirty="0">
+            <a:off x="685800" y="2816352"/>
+            <a:ext cx="5212080" cy="256032"/>
+          </a:xfrm>
+          <a:prstGeom prst="rect">
+            <a:avLst/>
+          </a:prstGeom>
+          <a:noFill/>
+          <a:ln/>
+        </p:spPr>
+        <p:txBody>
+          <a:bodyPr wrap="square" lIns="0" tIns="0" rIns="0" bIns="0" rtlCol="0" anchor="ctr"/>
+          <a:lstStyle/>
+          <a:p>
+            <a:pPr indent="0" marL="0">
+              <a:buNone/>
+            </a:pPr>
+            <a:r>
+              <a:rPr lang="en-US" sz="1250" b="1" dirty="0">
                 <a:solidFill>
                   <a:srgbClr val="FFFFFF"/>
                 </a:solidFill>
@@ -3500,9 +3808,9 @@
                 <a:ea typeface="Calibri" pitchFamily="34" charset="-122"/>
                 <a:cs typeface="Calibri" pitchFamily="34" charset="-120"/>
               </a:rPr>
-              <a:t>What actually moved the score</a:t>
-            </a:r>
-            <a:endParaRPr lang="en-US" sz="1300" dirty="0"/>
+              <a:t>How the score moved, and what moved it</a:t>
+            </a:r>
+            <a:endParaRPr lang="en-US" sz="1250" dirty="0"/>
           </a:p>
         </p:txBody>
       </p:sp>
@@ -3514,24 +3822,24 @@
         </p:nvSpPr>
         <p:spPr>
           <a:xfrm>
-            <a:off x="685800" y="3310128"/>
-            <a:ext cx="3794760" cy="292608"/>
-          </a:xfrm>
-          <a:prstGeom prst="rect">
-            <a:avLst/>
-          </a:prstGeom>
-          <a:noFill/>
-          <a:ln/>
-        </p:spPr>
-        <p:txBody>
-          <a:bodyPr wrap="square" lIns="0" tIns="0" rIns="0" bIns="0" rtlCol="0" anchor="ctr"/>
-          <a:lstStyle/>
-          <a:p>
-            <a:pPr indent="0" marL="0">
-              <a:buNone/>
-            </a:pPr>
-            <a:r>
-              <a:rPr lang="en-US" sz="1050" dirty="0">
+            <a:off x="685800" y="3209544"/>
+            <a:ext cx="2011680" cy="292608"/>
+          </a:xfrm>
+          <a:prstGeom prst="rect">
+            <a:avLst/>
+          </a:prstGeom>
+          <a:noFill/>
+          <a:ln/>
+        </p:spPr>
+        <p:txBody>
+          <a:bodyPr wrap="square" lIns="0" tIns="0" rIns="0" bIns="0" rtlCol="0" anchor="ctr"/>
+          <a:lstStyle/>
+          <a:p>
+            <a:pPr indent="0" marL="0">
+              <a:buNone/>
+            </a:pPr>
+            <a:r>
+              <a:rPr lang="en-US" sz="850" dirty="0">
                 <a:solidFill>
                   <a:srgbClr val="CADCFC"/>
                 </a:solidFill>
@@ -3539,46 +3847,380 @@
                 <a:ea typeface="Calibri" pitchFamily="34" charset="-122"/>
                 <a:cs typeface="Calibri" pitchFamily="34" charset="-120"/>
               </a:rPr>
-              <a:t>Silencing the normal Level-2 video we never spotted</a:t>
-            </a:r>
-            <a:endParaRPr lang="en-US" sz="1050" dirty="0"/>
-          </a:p>
-        </p:txBody>
-      </p:sp>
-      <p:sp>
-        <p:nvSpPr>
-          <p:cNvPr id="23" name="Text 21"/>
-          <p:cNvSpPr/>
-          <p:nvPr/>
-        </p:nvSpPr>
-        <p:spPr>
-          <a:xfrm>
-            <a:off x="4526280" y="3310128"/>
-            <a:ext cx="1389888" cy="292608"/>
-          </a:xfrm>
-          <a:prstGeom prst="rect">
-            <a:avLst/>
-          </a:prstGeom>
-          <a:noFill/>
-          <a:ln/>
-        </p:spPr>
-        <p:txBody>
-          <a:bodyPr wrap="square" lIns="0" tIns="0" rIns="0" bIns="0" rtlCol="0" anchor="ctr"/>
-          <a:lstStyle/>
-          <a:p>
-            <a:pPr algn="r" indent="0" marL="0">
+              <a:t>First accepted run</a:t>
+            </a:r>
+            <a:endParaRPr lang="en-US" sz="850" dirty="0"/>
+          </a:p>
+        </p:txBody>
+      </p:sp>
+      <p:sp>
+        <p:nvSpPr>
+          <p:cNvPr id="23" name="Shape 21"/>
+          <p:cNvSpPr/>
+          <p:nvPr/>
+        </p:nvSpPr>
+        <p:spPr>
+          <a:xfrm>
+            <a:off x="2788920" y="3236976"/>
+            <a:ext cx="1564721" cy="237744"/>
+          </a:xfrm>
+          <a:prstGeom prst="rect">
+            <a:avLst/>
+          </a:prstGeom>
+          <a:solidFill>
+            <a:srgbClr val="8496B4"/>
+          </a:solidFill>
+          <a:ln w="12700">
+            <a:solidFill>
+              <a:srgbClr val="8496B4"/>
+            </a:solidFill>
+            <a:prstDash val="solid"/>
+          </a:ln>
+        </p:spPr>
+      </p:sp>
+      <p:sp>
+        <p:nvSpPr>
+          <p:cNvPr id="24" name="Text 22"/>
+          <p:cNvSpPr/>
+          <p:nvPr/>
+        </p:nvSpPr>
+        <p:spPr>
+          <a:xfrm>
+            <a:off x="4408505" y="3218688"/>
+            <a:ext cx="475488" cy="274320"/>
+          </a:xfrm>
+          <a:prstGeom prst="rect">
+            <a:avLst/>
+          </a:prstGeom>
+          <a:noFill/>
+          <a:ln/>
+        </p:spPr>
+        <p:txBody>
+          <a:bodyPr wrap="square" lIns="0" tIns="0" rIns="0" bIns="0" rtlCol="0" anchor="ctr"/>
+          <a:lstStyle/>
+          <a:p>
+            <a:pPr indent="0" marL="0">
               <a:buNone/>
             </a:pPr>
             <a:r>
               <a:rPr lang="en-US" sz="1100" b="1" dirty="0">
                 <a:solidFill>
+                  <a:srgbClr val="8496B4"/>
+                </a:solidFill>
+                <a:latin typeface="Cambria" pitchFamily="34" charset="0"/>
+                <a:ea typeface="Cambria" pitchFamily="34" charset="-122"/>
+                <a:cs typeface="Cambria" pitchFamily="34" charset="-120"/>
+              </a:rPr>
+              <a:t>37.2</a:t>
+            </a:r>
+            <a:endParaRPr lang="en-US" sz="1100" dirty="0"/>
+          </a:p>
+        </p:txBody>
+      </p:sp>
+      <p:sp>
+        <p:nvSpPr>
+          <p:cNvPr id="25" name="Text 23"/>
+          <p:cNvSpPr/>
+          <p:nvPr/>
+        </p:nvSpPr>
+        <p:spPr>
+          <a:xfrm>
+            <a:off x="685800" y="3685032"/>
+            <a:ext cx="2011680" cy="292608"/>
+          </a:xfrm>
+          <a:prstGeom prst="rect">
+            <a:avLst/>
+          </a:prstGeom>
+          <a:noFill/>
+          <a:ln/>
+        </p:spPr>
+        <p:txBody>
+          <a:bodyPr wrap="square" lIns="0" tIns="0" rIns="0" bIns="0" rtlCol="0" anchor="ctr"/>
+          <a:lstStyle/>
+          <a:p>
+            <a:pPr indent="0" marL="0">
+              <a:buNone/>
+            </a:pPr>
+            <a:r>
+              <a:rPr lang="en-US" sz="850" dirty="0">
+                <a:solidFill>
+                  <a:srgbClr val="CADCFC"/>
+                </a:solidFill>
+                <a:latin typeface="Calibri" pitchFamily="34" charset="0"/>
+                <a:ea typeface="Calibri" pitchFamily="34" charset="-122"/>
+                <a:cs typeface="Calibri" pitchFamily="34" charset="-120"/>
+              </a:rPr>
+              <a:t>+ collection-class prior</a:t>
+            </a:r>
+            <a:endParaRPr lang="en-US" sz="850" dirty="0"/>
+          </a:p>
+        </p:txBody>
+      </p:sp>
+      <p:sp>
+        <p:nvSpPr>
+          <p:cNvPr id="26" name="Shape 24"/>
+          <p:cNvSpPr/>
+          <p:nvPr/>
+        </p:nvSpPr>
+        <p:spPr>
+          <a:xfrm>
+            <a:off x="2788920" y="3712464"/>
+            <a:ext cx="1943283" cy="237744"/>
+          </a:xfrm>
+          <a:prstGeom prst="rect">
+            <a:avLst/>
+          </a:prstGeom>
+          <a:solidFill>
+            <a:srgbClr val="F2A63B"/>
+          </a:solidFill>
+          <a:ln w="12700">
+            <a:solidFill>
+              <a:srgbClr val="F2A63B"/>
+            </a:solidFill>
+            <a:prstDash val="solid"/>
+          </a:ln>
+        </p:spPr>
+      </p:sp>
+      <p:sp>
+        <p:nvSpPr>
+          <p:cNvPr id="27" name="Text 25"/>
+          <p:cNvSpPr/>
+          <p:nvPr/>
+        </p:nvSpPr>
+        <p:spPr>
+          <a:xfrm>
+            <a:off x="4787067" y="3694176"/>
+            <a:ext cx="475488" cy="274320"/>
+          </a:xfrm>
+          <a:prstGeom prst="rect">
+            <a:avLst/>
+          </a:prstGeom>
+          <a:noFill/>
+          <a:ln/>
+        </p:spPr>
+        <p:txBody>
+          <a:bodyPr wrap="square" lIns="0" tIns="0" rIns="0" bIns="0" rtlCol="0" anchor="ctr"/>
+          <a:lstStyle/>
+          <a:p>
+            <a:pPr indent="0" marL="0">
+              <a:buNone/>
+            </a:pPr>
+            <a:r>
+              <a:rPr lang="en-US" sz="1100" b="1" dirty="0">
+                <a:solidFill>
+                  <a:srgbClr val="F2A63B"/>
+                </a:solidFill>
+                <a:latin typeface="Cambria" pitchFamily="34" charset="0"/>
+                <a:ea typeface="Cambria" pitchFamily="34" charset="-122"/>
+                <a:cs typeface="Cambria" pitchFamily="34" charset="-120"/>
+              </a:rPr>
+              <a:t>46.2</a:t>
+            </a:r>
+            <a:endParaRPr lang="en-US" sz="1100" dirty="0"/>
+          </a:p>
+        </p:txBody>
+      </p:sp>
+      <p:sp>
+        <p:nvSpPr>
+          <p:cNvPr id="28" name="Text 26"/>
+          <p:cNvSpPr/>
+          <p:nvPr/>
+        </p:nvSpPr>
+        <p:spPr>
+          <a:xfrm>
+            <a:off x="685800" y="4160520"/>
+            <a:ext cx="2011680" cy="292608"/>
+          </a:xfrm>
+          <a:prstGeom prst="rect">
+            <a:avLst/>
+          </a:prstGeom>
+          <a:noFill/>
+          <a:ln/>
+        </p:spPr>
+        <p:txBody>
+          <a:bodyPr wrap="square" lIns="0" tIns="0" rIns="0" bIns="0" rtlCol="0" anchor="ctr"/>
+          <a:lstStyle/>
+          <a:p>
+            <a:pPr indent="0" marL="0">
+              <a:buNone/>
+            </a:pPr>
+            <a:r>
+              <a:rPr lang="en-US" sz="850" dirty="0">
+                <a:solidFill>
+                  <a:srgbClr val="CADCFC"/>
+                </a:solidFill>
+                <a:latin typeface="Calibri" pitchFamily="34" charset="0"/>
+                <a:ea typeface="Calibri" pitchFamily="34" charset="-122"/>
+                <a:cs typeface="Calibri" pitchFamily="34" charset="-120"/>
+              </a:rPr>
+              <a:t>+ composition lattice on L3</a:t>
+            </a:r>
+            <a:endParaRPr lang="en-US" sz="850" dirty="0"/>
+          </a:p>
+        </p:txBody>
+      </p:sp>
+      <p:sp>
+        <p:nvSpPr>
+          <p:cNvPr id="29" name="Shape 27"/>
+          <p:cNvSpPr/>
+          <p:nvPr/>
+        </p:nvSpPr>
+        <p:spPr>
+          <a:xfrm>
+            <a:off x="2788920" y="4187952"/>
+            <a:ext cx="2002170" cy="237744"/>
+          </a:xfrm>
+          <a:prstGeom prst="rect">
+            <a:avLst/>
+          </a:prstGeom>
+          <a:solidFill>
+            <a:srgbClr val="F2A63B"/>
+          </a:solidFill>
+          <a:ln w="12700">
+            <a:solidFill>
+              <a:srgbClr val="F2A63B"/>
+            </a:solidFill>
+            <a:prstDash val="solid"/>
+          </a:ln>
+        </p:spPr>
+      </p:sp>
+      <p:sp>
+        <p:nvSpPr>
+          <p:cNvPr id="30" name="Text 28"/>
+          <p:cNvSpPr/>
+          <p:nvPr/>
+        </p:nvSpPr>
+        <p:spPr>
+          <a:xfrm>
+            <a:off x="4845954" y="4169664"/>
+            <a:ext cx="475488" cy="274320"/>
+          </a:xfrm>
+          <a:prstGeom prst="rect">
+            <a:avLst/>
+          </a:prstGeom>
+          <a:noFill/>
+          <a:ln/>
+        </p:spPr>
+        <p:txBody>
+          <a:bodyPr wrap="square" lIns="0" tIns="0" rIns="0" bIns="0" rtlCol="0" anchor="ctr"/>
+          <a:lstStyle/>
+          <a:p>
+            <a:pPr indent="0" marL="0">
+              <a:buNone/>
+            </a:pPr>
+            <a:r>
+              <a:rPr lang="en-US" sz="1100" b="1" dirty="0">
+                <a:solidFill>
+                  <a:srgbClr val="F2A63B"/>
+                </a:solidFill>
+                <a:latin typeface="Cambria" pitchFamily="34" charset="0"/>
+                <a:ea typeface="Cambria" pitchFamily="34" charset="-122"/>
+                <a:cs typeface="Cambria" pitchFamily="34" charset="-120"/>
+              </a:rPr>
+              <a:t>47.6</a:t>
+            </a:r>
+            <a:endParaRPr lang="en-US" sz="1100" dirty="0"/>
+          </a:p>
+        </p:txBody>
+      </p:sp>
+      <p:sp>
+        <p:nvSpPr>
+          <p:cNvPr id="31" name="Text 29"/>
+          <p:cNvSpPr/>
+          <p:nvPr/>
+        </p:nvSpPr>
+        <p:spPr>
+          <a:xfrm>
+            <a:off x="685800" y="4636008"/>
+            <a:ext cx="2011680" cy="292608"/>
+          </a:xfrm>
+          <a:prstGeom prst="rect">
+            <a:avLst/>
+          </a:prstGeom>
+          <a:noFill/>
+          <a:ln/>
+        </p:spPr>
+        <p:txBody>
+          <a:bodyPr wrap="square" lIns="0" tIns="0" rIns="0" bIns="0" rtlCol="0" anchor="ctr"/>
+          <a:lstStyle/>
+          <a:p>
+            <a:pPr indent="0" marL="0">
+              <a:buNone/>
+            </a:pPr>
+            <a:r>
+              <a:rPr lang="en-US" sz="850" dirty="0">
+                <a:solidFill>
+                  <a:srgbClr val="CADCFC"/>
+                </a:solidFill>
+                <a:latin typeface="Calibri" pitchFamily="34" charset="0"/>
+                <a:ea typeface="Calibri" pitchFamily="34" charset="-122"/>
+                <a:cs typeface="Calibri" pitchFamily="34" charset="-120"/>
+              </a:rPr>
+              <a:t>+ normal L2 video silenced, L1 gate removed</a:t>
+            </a:r>
+            <a:endParaRPr lang="en-US" sz="850" dirty="0"/>
+          </a:p>
+        </p:txBody>
+      </p:sp>
+      <p:sp>
+        <p:nvSpPr>
+          <p:cNvPr id="32" name="Shape 30"/>
+          <p:cNvSpPr/>
+          <p:nvPr/>
+        </p:nvSpPr>
+        <p:spPr>
+          <a:xfrm>
+            <a:off x="2788920" y="4663440"/>
+            <a:ext cx="2599456" cy="237744"/>
+          </a:xfrm>
+          <a:prstGeom prst="rect">
+            <a:avLst/>
+          </a:prstGeom>
+          <a:solidFill>
+            <a:srgbClr val="5FCB8E"/>
+          </a:solidFill>
+          <a:ln w="12700">
+            <a:solidFill>
+              <a:srgbClr val="5FCB8E"/>
+            </a:solidFill>
+            <a:prstDash val="solid"/>
+          </a:ln>
+        </p:spPr>
+      </p:sp>
+      <p:sp>
+        <p:nvSpPr>
+          <p:cNvPr id="33" name="Text 31"/>
+          <p:cNvSpPr/>
+          <p:nvPr/>
+        </p:nvSpPr>
+        <p:spPr>
+          <a:xfrm>
+            <a:off x="5443240" y="4645152"/>
+            <a:ext cx="475488" cy="274320"/>
+          </a:xfrm>
+          <a:prstGeom prst="rect">
+            <a:avLst/>
+          </a:prstGeom>
+          <a:noFill/>
+          <a:ln/>
+        </p:spPr>
+        <p:txBody>
+          <a:bodyPr wrap="square" lIns="0" tIns="0" rIns="0" bIns="0" rtlCol="0" anchor="ctr"/>
+          <a:lstStyle/>
+          <a:p>
+            <a:pPr indent="0" marL="0">
+              <a:buNone/>
+            </a:pPr>
+            <a:r>
+              <a:rPr lang="en-US" sz="1100" b="1" dirty="0">
+                <a:solidFill>
                   <a:srgbClr val="5FCB8E"/>
                 </a:solidFill>
-                <a:latin typeface="Calibri" pitchFamily="34" charset="0"/>
-                <a:ea typeface="Calibri" pitchFamily="34" charset="-122"/>
-                <a:cs typeface="Calibri" pitchFamily="34" charset="-120"/>
-              </a:rPr>
-              <a:t>D2 16.1 → 27.6</a:t>
+                <a:latin typeface="Cambria" pitchFamily="34" charset="0"/>
+                <a:ea typeface="Cambria" pitchFamily="34" charset="-122"/>
+                <a:cs typeface="Cambria" pitchFamily="34" charset="-120"/>
+              </a:rPr>
+              <a:t>61.8</a:t>
             </a:r>
             <a:endParaRPr lang="en-US" sz="1100" dirty="0"/>
           </a:p>
@@ -3586,408 +4228,57 @@
       </p:sp>
       <p:sp>
         <p:nvSpPr>
-          <p:cNvPr id="24" name="Text 22"/>
-          <p:cNvSpPr/>
-          <p:nvPr/>
-        </p:nvSpPr>
-        <p:spPr>
-          <a:xfrm>
-            <a:off x="685800" y="3666744"/>
-            <a:ext cx="3794760" cy="292608"/>
-          </a:xfrm>
-          <a:prstGeom prst="rect">
-            <a:avLst/>
-          </a:prstGeom>
-          <a:noFill/>
-          <a:ln/>
-        </p:spPr>
-        <p:txBody>
-          <a:bodyPr wrap="square" lIns="0" tIns="0" rIns="0" bIns="0" rtlCol="0" anchor="ctr"/>
-          <a:lstStyle/>
-          <a:p>
-            <a:pPr indent="0" marL="0">
-              <a:buNone/>
-            </a:pPr>
-            <a:r>
-              <a:rPr lang="en-US" sz="1050" dirty="0">
-                <a:solidFill>
-                  <a:srgbClr val="CADCFC"/>
-                </a:solidFill>
-                <a:latin typeface="Calibri" pitchFamily="34" charset="0"/>
-                <a:ea typeface="Calibri" pitchFamily="34" charset="-122"/>
-                <a:cs typeface="Calibri" pitchFamily="34" charset="-120"/>
-              </a:rPr>
-              <a:t>Candidates on the 5 s composition lattice</a:t>
-            </a:r>
-            <a:endParaRPr lang="en-US" sz="1050" dirty="0"/>
-          </a:p>
-        </p:txBody>
-      </p:sp>
-      <p:sp>
-        <p:nvSpPr>
-          <p:cNvPr id="25" name="Text 23"/>
-          <p:cNvSpPr/>
-          <p:nvPr/>
-        </p:nvSpPr>
-        <p:spPr>
-          <a:xfrm>
-            <a:off x="4526280" y="3666744"/>
-            <a:ext cx="1389888" cy="292608"/>
-          </a:xfrm>
-          <a:prstGeom prst="rect">
-            <a:avLst/>
-          </a:prstGeom>
-          <a:noFill/>
-          <a:ln/>
-        </p:spPr>
-        <p:txBody>
-          <a:bodyPr wrap="square" lIns="0" tIns="0" rIns="0" bIns="0" rtlCol="0" anchor="ctr"/>
-          <a:lstStyle/>
-          <a:p>
-            <a:pPr algn="r" indent="0" marL="0">
-              <a:buNone/>
-            </a:pPr>
-            <a:r>
-              <a:rPr lang="en-US" sz="1100" b="1" dirty="0">
-                <a:solidFill>
-                  <a:srgbClr val="5FCB8E"/>
-                </a:solidFill>
-                <a:latin typeface="Calibri" pitchFamily="34" charset="0"/>
-                <a:ea typeface="Calibri" pitchFamily="34" charset="-122"/>
-                <a:cs typeface="Calibri" pitchFamily="34" charset="-120"/>
-              </a:rPr>
-              <a:t>D3 16.3 → 19.7</a:t>
-            </a:r>
-            <a:endParaRPr lang="en-US" sz="1100" dirty="0"/>
-          </a:p>
-        </p:txBody>
-      </p:sp>
-      <p:sp>
-        <p:nvSpPr>
-          <p:cNvPr id="26" name="Text 24"/>
-          <p:cNvSpPr/>
-          <p:nvPr/>
-        </p:nvSpPr>
-        <p:spPr>
-          <a:xfrm>
-            <a:off x="685800" y="4023360"/>
-            <a:ext cx="3794760" cy="292608"/>
-          </a:xfrm>
-          <a:prstGeom prst="rect">
-            <a:avLst/>
-          </a:prstGeom>
-          <a:noFill/>
-          <a:ln/>
-        </p:spPr>
-        <p:txBody>
-          <a:bodyPr wrap="square" lIns="0" tIns="0" rIns="0" bIns="0" rtlCol="0" anchor="ctr"/>
-          <a:lstStyle/>
-          <a:p>
-            <a:pPr indent="0" marL="0">
-              <a:buNone/>
-            </a:pPr>
-            <a:r>
-              <a:rPr lang="en-US" sz="1050" dirty="0">
-                <a:solidFill>
-                  <a:srgbClr val="CADCFC"/>
-                </a:solidFill>
-                <a:latin typeface="Calibri" pitchFamily="34" charset="0"/>
-                <a:ea typeface="Calibri" pitchFamily="34" charset="-122"/>
-                <a:cs typeface="Calibri" pitchFamily="34" charset="-120"/>
-              </a:rPr>
-              <a:t>Level 1 with no confidence gate at all</a:t>
-            </a:r>
-            <a:endParaRPr lang="en-US" sz="1050" dirty="0"/>
-          </a:p>
-        </p:txBody>
-      </p:sp>
-      <p:sp>
-        <p:nvSpPr>
-          <p:cNvPr id="27" name="Text 25"/>
-          <p:cNvSpPr/>
-          <p:nvPr/>
-        </p:nvSpPr>
-        <p:spPr>
-          <a:xfrm>
-            <a:off x="4526280" y="4023360"/>
-            <a:ext cx="1389888" cy="292608"/>
-          </a:xfrm>
-          <a:prstGeom prst="rect">
-            <a:avLst/>
-          </a:prstGeom>
-          <a:noFill/>
-          <a:ln/>
-        </p:spPr>
-        <p:txBody>
-          <a:bodyPr wrap="square" lIns="0" tIns="0" rIns="0" bIns="0" rtlCol="0" anchor="ctr"/>
-          <a:lstStyle/>
-          <a:p>
-            <a:pPr algn="r" indent="0" marL="0">
-              <a:buNone/>
-            </a:pPr>
-            <a:r>
-              <a:rPr lang="en-US" sz="1100" b="1" dirty="0">
-                <a:solidFill>
-                  <a:srgbClr val="5FCB8E"/>
-                </a:solidFill>
-                <a:latin typeface="Calibri" pitchFamily="34" charset="0"/>
-                <a:ea typeface="Calibri" pitchFamily="34" charset="-122"/>
-                <a:cs typeface="Calibri" pitchFamily="34" charset="-120"/>
-              </a:rPr>
-              <a:t>D1 11.8 → 14.5</a:t>
-            </a:r>
-            <a:endParaRPr lang="en-US" sz="1100" dirty="0"/>
-          </a:p>
-        </p:txBody>
-      </p:sp>
-      <p:sp>
-        <p:nvSpPr>
-          <p:cNvPr id="28" name="Text 26"/>
-          <p:cNvSpPr/>
-          <p:nvPr/>
-        </p:nvSpPr>
-        <p:spPr>
-          <a:xfrm>
-            <a:off x="685800" y="4379976"/>
-            <a:ext cx="3794760" cy="292608"/>
-          </a:xfrm>
-          <a:prstGeom prst="rect">
-            <a:avLst/>
-          </a:prstGeom>
-          <a:noFill/>
-          <a:ln/>
-        </p:spPr>
-        <p:txBody>
-          <a:bodyPr wrap="square" lIns="0" tIns="0" rIns="0" bIns="0" rtlCol="0" anchor="ctr"/>
-          <a:lstStyle/>
-          <a:p>
-            <a:pPr indent="0" marL="0">
-              <a:buNone/>
-            </a:pPr>
-            <a:r>
-              <a:rPr lang="en-US" sz="1050" dirty="0">
-                <a:solidFill>
-                  <a:srgbClr val="CADCFC"/>
-                </a:solidFill>
-                <a:latin typeface="Calibri" pitchFamily="34" charset="0"/>
-                <a:ea typeface="Calibri" pitchFamily="34" charset="-122"/>
-                <a:cs typeface="Calibri" pitchFamily="34" charset="-120"/>
-              </a:rPr>
-              <a:t>Collection-fingerprint class prior</a:t>
-            </a:r>
-            <a:endParaRPr lang="en-US" sz="1050" dirty="0"/>
-          </a:p>
-        </p:txBody>
-      </p:sp>
-      <p:sp>
-        <p:nvSpPr>
-          <p:cNvPr id="29" name="Text 27"/>
-          <p:cNvSpPr/>
-          <p:nvPr/>
-        </p:nvSpPr>
-        <p:spPr>
-          <a:xfrm>
-            <a:off x="4526280" y="4379976"/>
-            <a:ext cx="1389888" cy="292608"/>
-          </a:xfrm>
-          <a:prstGeom prst="rect">
-            <a:avLst/>
-          </a:prstGeom>
-          <a:noFill/>
-          <a:ln/>
-        </p:spPr>
-        <p:txBody>
-          <a:bodyPr wrap="square" lIns="0" tIns="0" rIns="0" bIns="0" rtlCol="0" anchor="ctr"/>
-          <a:lstStyle/>
-          <a:p>
-            <a:pPr algn="r" indent="0" marL="0">
-              <a:buNone/>
-            </a:pPr>
-            <a:r>
-              <a:rPr lang="en-US" sz="1100" b="1" dirty="0">
-                <a:solidFill>
-                  <a:srgbClr val="5FCB8E"/>
-                </a:solidFill>
-                <a:latin typeface="Calibri" pitchFamily="34" charset="0"/>
-                <a:ea typeface="Calibri" pitchFamily="34" charset="-122"/>
-                <a:cs typeface="Calibri" pitchFamily="34" charset="-120"/>
-              </a:rPr>
-              <a:t>37.2 → 46.2</a:t>
-            </a:r>
-            <a:endParaRPr lang="en-US" sz="1100" dirty="0"/>
-          </a:p>
-        </p:txBody>
-      </p:sp>
-      <p:sp>
-        <p:nvSpPr>
-          <p:cNvPr id="30" name="Text 28"/>
+          <p:cNvPr id="34" name="Text 32"/>
           <p:cNvSpPr/>
           <p:nvPr/>
         </p:nvSpPr>
         <p:spPr>
           <a:xfrm>
             <a:off x="685800" y="4736592"/>
-            <a:ext cx="3794760" cy="292608"/>
-          </a:xfrm>
-          <a:prstGeom prst="rect">
-            <a:avLst/>
-          </a:prstGeom>
-          <a:noFill/>
-          <a:ln/>
-        </p:spPr>
-        <p:txBody>
-          <a:bodyPr wrap="square" lIns="0" tIns="0" rIns="0" bIns="0" rtlCol="0" anchor="ctr"/>
-          <a:lstStyle/>
-          <a:p>
-            <a:pPr indent="0" marL="0">
-              <a:buNone/>
-            </a:pPr>
-            <a:r>
-              <a:rPr lang="en-US" sz="1050" dirty="0">
-                <a:solidFill>
-                  <a:srgbClr val="CADCFC"/>
-                </a:solidFill>
-                <a:latin typeface="Calibri" pitchFamily="34" charset="0"/>
-                <a:ea typeface="Calibri" pitchFamily="34" charset="-122"/>
-                <a:cs typeface="Calibri" pitchFamily="34" charset="-120"/>
-              </a:rPr>
-              <a:t>Raising the Level-1 threshold to 0.7</a:t>
-            </a:r>
-            <a:endParaRPr lang="en-US" sz="1050" dirty="0"/>
-          </a:p>
-        </p:txBody>
-      </p:sp>
-      <p:sp>
-        <p:nvSpPr>
-          <p:cNvPr id="31" name="Text 29"/>
-          <p:cNvSpPr/>
-          <p:nvPr/>
-        </p:nvSpPr>
-        <p:spPr>
-          <a:xfrm>
-            <a:off x="4526280" y="4736592"/>
-            <a:ext cx="1389888" cy="292608"/>
-          </a:xfrm>
-          <a:prstGeom prst="rect">
-            <a:avLst/>
-          </a:prstGeom>
-          <a:noFill/>
-          <a:ln/>
-        </p:spPr>
-        <p:txBody>
-          <a:bodyPr wrap="square" lIns="0" tIns="0" rIns="0" bIns="0" rtlCol="0" anchor="ctr"/>
-          <a:lstStyle/>
-          <a:p>
-            <a:pPr algn="r" indent="0" marL="0">
-              <a:buNone/>
-            </a:pPr>
-            <a:r>
-              <a:rPr lang="en-US" sz="1100" b="1" dirty="0">
-                <a:solidFill>
-                  <a:srgbClr val="E2685F"/>
-                </a:solidFill>
-                <a:latin typeface="Calibri" pitchFamily="34" charset="0"/>
-                <a:ea typeface="Calibri" pitchFamily="34" charset="-122"/>
-                <a:cs typeface="Calibri" pitchFamily="34" charset="-120"/>
-              </a:rPr>
-              <a:t>−2.0</a:t>
-            </a:r>
-            <a:endParaRPr lang="en-US" sz="1100" dirty="0"/>
-          </a:p>
-        </p:txBody>
-      </p:sp>
-      <p:sp>
-        <p:nvSpPr>
-          <p:cNvPr id="32" name="Text 30"/>
-          <p:cNvSpPr/>
-          <p:nvPr/>
-        </p:nvSpPr>
-        <p:spPr>
-          <a:xfrm>
-            <a:off x="685800" y="5093208"/>
-            <a:ext cx="3794760" cy="292608"/>
-          </a:xfrm>
-          <a:prstGeom prst="rect">
-            <a:avLst/>
-          </a:prstGeom>
-          <a:noFill/>
-          <a:ln/>
-        </p:spPr>
-        <p:txBody>
-          <a:bodyPr wrap="square" lIns="0" tIns="0" rIns="0" bIns="0" rtlCol="0" anchor="ctr"/>
-          <a:lstStyle/>
-          <a:p>
-            <a:pPr indent="0" marL="0">
-              <a:buNone/>
-            </a:pPr>
-            <a:r>
-              <a:rPr lang="en-US" sz="1050" dirty="0">
-                <a:solidFill>
-                  <a:srgbClr val="CADCFC"/>
-                </a:solidFill>
-                <a:latin typeface="Calibri" pitchFamily="34" charset="0"/>
-                <a:ea typeface="Calibri" pitchFamily="34" charset="-122"/>
-                <a:cs typeface="Calibri" pitchFamily="34" charset="-120"/>
-              </a:rPr>
-              <a:t>12 replacement rankers on Level 3</a:t>
-            </a:r>
-            <a:endParaRPr lang="en-US" sz="1050" dirty="0"/>
-          </a:p>
-        </p:txBody>
-      </p:sp>
-      <p:sp>
-        <p:nvSpPr>
-          <p:cNvPr id="33" name="Text 31"/>
-          <p:cNvSpPr/>
-          <p:nvPr/>
-        </p:nvSpPr>
-        <p:spPr>
-          <a:xfrm>
-            <a:off x="4526280" y="5093208"/>
-            <a:ext cx="1389888" cy="292608"/>
-          </a:xfrm>
-          <a:prstGeom prst="rect">
-            <a:avLst/>
-          </a:prstGeom>
-          <a:noFill/>
-          <a:ln/>
-        </p:spPr>
-        <p:txBody>
-          <a:bodyPr wrap="square" lIns="0" tIns="0" rIns="0" bIns="0" rtlCol="0" anchor="ctr"/>
-          <a:lstStyle/>
-          <a:p>
-            <a:pPr algn="r" indent="0" marL="0">
-              <a:buNone/>
-            </a:pPr>
-            <a:r>
-              <a:rPr lang="en-US" sz="1100" b="1" dirty="0">
-                <a:solidFill>
-                  <a:srgbClr val="E2685F"/>
-                </a:solidFill>
-                <a:latin typeface="Calibri" pitchFamily="34" charset="0"/>
-                <a:ea typeface="Calibri" pitchFamily="34" charset="-122"/>
-                <a:cs typeface="Calibri" pitchFamily="34" charset="-120"/>
-              </a:rPr>
-              <a:t>0 of 12</a:t>
-            </a:r>
-            <a:endParaRPr lang="en-US" sz="1100" dirty="0"/>
-          </a:p>
-        </p:txBody>
-      </p:sp>
-      <p:sp>
-        <p:nvSpPr>
-          <p:cNvPr id="34" name="Shape 32"/>
-          <p:cNvSpPr/>
-          <p:nvPr/>
-        </p:nvSpPr>
-        <p:spPr>
-          <a:xfrm>
-            <a:off x="6355080" y="2798064"/>
-            <a:ext cx="5303520" cy="2670048"/>
+            <a:ext cx="5212080" cy="329184"/>
+          </a:xfrm>
+          <a:prstGeom prst="rect">
+            <a:avLst/>
+          </a:prstGeom>
+          <a:noFill/>
+          <a:ln/>
+        </p:spPr>
+        <p:txBody>
+          <a:bodyPr wrap="square" lIns="0" tIns="0" rIns="0" bIns="0" rtlCol="0" anchor="ctr"/>
+          <a:lstStyle/>
+          <a:p>
+            <a:pPr indent="0" marL="0">
+              <a:buNone/>
+            </a:pPr>
+            <a:r>
+              <a:rPr lang="en-US" sz="850" i="1" dirty="0">
+                <a:solidFill>
+                  <a:srgbClr val="8496B4"/>
+                </a:solidFill>
+                <a:latin typeface="Calibri" pitchFamily="34" charset="0"/>
+                <a:ea typeface="Calibri" pitchFamily="34" charset="-122"/>
+                <a:cs typeface="Calibri" pitchFamily="34" charset="-120"/>
+              </a:rPr>
+              <a:t>Bar length is the total out of 100. Every gain came from re-deriving the scoring rule, not from changing the model.</a:t>
+            </a:r>
+            <a:endParaRPr lang="en-US" sz="850" dirty="0"/>
+          </a:p>
+        </p:txBody>
+      </p:sp>
+      <p:sp>
+        <p:nvSpPr>
+          <p:cNvPr id="35" name="Shape 33"/>
+          <p:cNvSpPr/>
+          <p:nvPr/>
+        </p:nvSpPr>
+        <p:spPr>
+          <a:xfrm>
+            <a:off x="6355080" y="2688336"/>
+            <a:ext cx="5303520" cy="2487168"/>
           </a:xfrm>
           <a:prstGeom prst="roundRect">
             <a:avLst>
-              <a:gd name="adj" fmla="val 2055"/>
+              <a:gd name="adj" fmla="val 2206"/>
             </a:avLst>
           </a:prstGeom>
           <a:solidFill>
@@ -4003,30 +4294,30 @@
       </p:sp>
       <p:sp>
         <p:nvSpPr>
-          <p:cNvPr id="35" name="Text 33"/>
-          <p:cNvSpPr/>
-          <p:nvPr/>
-        </p:nvSpPr>
-        <p:spPr>
-          <a:xfrm>
-            <a:off x="6537960" y="2926080"/>
-            <a:ext cx="4937760" cy="274320"/>
-          </a:xfrm>
-          <a:prstGeom prst="rect">
-            <a:avLst/>
-          </a:prstGeom>
-          <a:noFill/>
-          <a:ln/>
-        </p:spPr>
-        <p:txBody>
-          <a:bodyPr wrap="square" lIns="0" tIns="0" rIns="0" bIns="0" rtlCol="0" anchor="ctr"/>
-          <a:lstStyle/>
-          <a:p>
-            <a:pPr indent="0" marL="0">
-              <a:buNone/>
-            </a:pPr>
-            <a:r>
-              <a:rPr lang="en-US" sz="1300" b="1" dirty="0">
+          <p:cNvPr id="36" name="Text 34"/>
+          <p:cNvSpPr/>
+          <p:nvPr/>
+        </p:nvSpPr>
+        <p:spPr>
+          <a:xfrm>
+            <a:off x="6537960" y="2816352"/>
+            <a:ext cx="4937760" cy="256032"/>
+          </a:xfrm>
+          <a:prstGeom prst="rect">
+            <a:avLst/>
+          </a:prstGeom>
+          <a:noFill/>
+          <a:ln/>
+        </p:spPr>
+        <p:txBody>
+          <a:bodyPr wrap="square" lIns="0" tIns="0" rIns="0" bIns="0" rtlCol="0" anchor="ctr"/>
+          <a:lstStyle/>
+          <a:p>
+            <a:pPr indent="0" marL="0">
+              <a:buNone/>
+            </a:pPr>
+            <a:r>
+              <a:rPr lang="en-US" sz="1250" b="1" dirty="0">
                 <a:solidFill>
                   <a:srgbClr val="FFFFFF"/>
                 </a:solidFill>
@@ -4036,19 +4327,19 @@
               </a:rPr>
               <a:t>Three things we learned</a:t>
             </a:r>
-            <a:endParaRPr lang="en-US" sz="1300" dirty="0"/>
-          </a:p>
-        </p:txBody>
-      </p:sp>
-      <p:sp>
-        <p:nvSpPr>
-          <p:cNvPr id="36" name="Text 34"/>
-          <p:cNvSpPr/>
-          <p:nvPr/>
-        </p:nvSpPr>
-        <p:spPr>
-          <a:xfrm>
-            <a:off x="6537960" y="3291840"/>
+            <a:endParaRPr lang="en-US" sz="1250" dirty="0"/>
+          </a:p>
+        </p:txBody>
+      </p:sp>
+      <p:sp>
+        <p:nvSpPr>
+          <p:cNvPr id="37" name="Text 35"/>
+          <p:cNvSpPr/>
+          <p:nvPr/>
+        </p:nvSpPr>
+        <p:spPr>
+          <a:xfrm>
+            <a:off x="6537960" y="3200400"/>
             <a:ext cx="4937760" cy="219456"/>
           </a:xfrm>
           <a:prstGeom prst="rect">
@@ -4065,7 +4356,7 @@
               <a:buNone/>
             </a:pPr>
             <a:r>
-              <a:rPr lang="en-US" sz="1100" b="1" dirty="0">
+              <a:rPr lang="en-US" sz="1050" b="1" dirty="0">
                 <a:solidFill>
                   <a:srgbClr val="F2A63B"/>
                 </a:solidFill>
@@ -4075,20 +4366,20 @@
               </a:rPr>
               <a:t>We were scoring a formula we had invented.</a:t>
             </a:r>
-            <a:endParaRPr lang="en-US" sz="1100" dirty="0"/>
-          </a:p>
-        </p:txBody>
-      </p:sp>
-      <p:sp>
-        <p:nvSpPr>
-          <p:cNvPr id="37" name="Text 35"/>
-          <p:cNvSpPr/>
-          <p:nvPr/>
-        </p:nvSpPr>
-        <p:spPr>
-          <a:xfrm>
-            <a:off x="6537960" y="3511296"/>
-            <a:ext cx="4937760" cy="493776"/>
+            <a:endParaRPr lang="en-US" sz="1050" dirty="0"/>
+          </a:p>
+        </p:txBody>
+      </p:sp>
+      <p:sp>
+        <p:nvSpPr>
+          <p:cNvPr id="38" name="Text 36"/>
+          <p:cNvSpPr/>
+          <p:nvPr/>
+        </p:nvSpPr>
+        <p:spPr>
+          <a:xfrm>
+            <a:off x="6537960" y="3410712"/>
+            <a:ext cx="4937760" cy="420624"/>
           </a:xfrm>
           <a:prstGeom prst="rect">
             <a:avLst/>
@@ -4102,7 +4393,7 @@
           <a:p>
             <a:pPr indent="0" marL="0">
               <a:lnSpc>
-                <a:spcPct val="108000"/>
+                <a:spcPct val="106000"/>
               </a:lnSpc>
               <a:buNone/>
             </a:pPr>
@@ -4115,7 +4406,7 @@
                 <a:ea typeface="Calibri" pitchFamily="34" charset="-122"/>
                 <a:cs typeface="Calibri" pitchFamily="34" charset="-120"/>
               </a:rPr>
-              <a:t>A scorer fitted to the practice pack said Level 1 was F1-based, so we kept tightening a confidence gate. The leaderboard prints “found x/17”, which fixes the denominator and restores the documented rule: half the marks are binary accuracy and 17 of 20 clips carry an event, so there is no precision penalty at all. Deleting the gate was worth +2.7.</a:t>
+              <a:t>L1 is 0.5·binary + 0.5·class, not the F1 we had fitted. There is no precision penalty, so deleting our confidence gate was worth +2.7.</a:t>
             </a:r>
             <a:endParaRPr lang="en-US" sz="850" dirty="0"/>
           </a:p>
@@ -4123,13 +4414,13 @@
       </p:sp>
       <p:sp>
         <p:nvSpPr>
-          <p:cNvPr id="38" name="Text 36"/>
-          <p:cNvSpPr/>
-          <p:nvPr/>
-        </p:nvSpPr>
-        <p:spPr>
-          <a:xfrm>
-            <a:off x="6537960" y="4032504"/>
+          <p:cNvPr id="39" name="Text 37"/>
+          <p:cNvSpPr/>
+          <p:nvPr/>
+        </p:nvSpPr>
+        <p:spPr>
+          <a:xfrm>
+            <a:off x="6537960" y="3858768"/>
             <a:ext cx="4937760" cy="219456"/>
           </a:xfrm>
           <a:prstGeom prst="rect">
@@ -4146,7 +4437,7 @@
               <a:buNone/>
             </a:pPr>
             <a:r>
-              <a:rPr lang="en-US" sz="1100" b="1" dirty="0">
+              <a:rPr lang="en-US" sz="1050" b="1" dirty="0">
                 <a:solidFill>
                   <a:srgbClr val="F2A63B"/>
                 </a:solidFill>
@@ -4156,20 +4447,20 @@
               </a:rPr>
               <a:t>A normal video is worth a whole video.</a:t>
             </a:r>
-            <a:endParaRPr lang="en-US" sz="1100" dirty="0"/>
-          </a:p>
-        </p:txBody>
-      </p:sp>
-      <p:sp>
-        <p:nvSpPr>
-          <p:cNvPr id="39" name="Text 37"/>
-          <p:cNvSpPr/>
-          <p:nvPr/>
-        </p:nvSpPr>
-        <p:spPr>
-          <a:xfrm>
-            <a:off x="6537960" y="4251960"/>
-            <a:ext cx="4937760" cy="493776"/>
+            <a:endParaRPr lang="en-US" sz="1050" dirty="0"/>
+          </a:p>
+        </p:txBody>
+      </p:sp>
+      <p:sp>
+        <p:nvSpPr>
+          <p:cNvPr id="40" name="Text 38"/>
+          <p:cNvSpPr/>
+          <p:nvPr/>
+        </p:nvSpPr>
+        <p:spPr>
+          <a:xfrm>
+            <a:off x="6537960" y="4069080"/>
+            <a:ext cx="4937760" cy="420624"/>
           </a:xfrm>
           <a:prstGeom prst="rect">
             <a:avLst/>
@@ -4183,7 +4474,7 @@
           <a:p>
             <a:pPr indent="0" marL="0">
               <a:lnSpc>
-                <a:spcPct val="108000"/>
+                <a:spcPct val="106000"/>
               </a:lnSpc>
               <a:buNone/>
             </a:pPr>
@@ -4196,7 +4487,7 @@
                 <a:ea typeface="Calibri" pitchFamily="34" charset="-122"/>
                 <a:cs typeface="Calibri" pitchFamily="34" charset="-120"/>
               </a:rPr>
-              <a:t>A rival submitted nothing on Level 2 and scored exactly 17.5 of 35 — one half, so two of its four videos are normal. We had carried events on both candidates in every upload, taking a guaranteed zero on one. Silencing the right one was worth +11.5, our single largest gain.</a:t>
+              <a:t>A rival's empty L2 run scored exactly 17.5/35 — proof two of its four videos are normal. Silencing the right one: +11.5, our largest single gain.</a:t>
             </a:r>
             <a:endParaRPr lang="en-US" sz="850" dirty="0"/>
           </a:p>
@@ -4204,13 +4495,13 @@
       </p:sp>
       <p:sp>
         <p:nvSpPr>
-          <p:cNvPr id="40" name="Text 38"/>
-          <p:cNvSpPr/>
-          <p:nvPr/>
-        </p:nvSpPr>
-        <p:spPr>
-          <a:xfrm>
-            <a:off x="6537960" y="4773168"/>
+          <p:cNvPr id="41" name="Text 39"/>
+          <p:cNvSpPr/>
+          <p:nvPr/>
+        </p:nvSpPr>
+        <p:spPr>
+          <a:xfrm>
+            <a:off x="6537960" y="4517136"/>
             <a:ext cx="4937760" cy="219456"/>
           </a:xfrm>
           <a:prstGeom prst="rect">
@@ -4227,7 +4518,7 @@
               <a:buNone/>
             </a:pPr>
             <a:r>
-              <a:rPr lang="en-US" sz="1100" b="1" dirty="0">
+              <a:rPr lang="en-US" sz="1050" b="1" dirty="0">
                 <a:solidFill>
                   <a:srgbClr val="F2A63B"/>
                 </a:solidFill>
@@ -4237,20 +4528,20 @@
               </a:rPr>
               <a:t>Proposals are solved; ranking is not.</a:t>
             </a:r>
-            <a:endParaRPr lang="en-US" sz="1100" dirty="0"/>
-          </a:p>
-        </p:txBody>
-      </p:sp>
-      <p:sp>
-        <p:nvSpPr>
-          <p:cNvPr id="41" name="Text 39"/>
-          <p:cNvSpPr/>
-          <p:nvPr/>
-        </p:nvSpPr>
-        <p:spPr>
-          <a:xfrm>
-            <a:off x="6537960" y="4992624"/>
-            <a:ext cx="4937760" cy="493776"/>
+            <a:endParaRPr lang="en-US" sz="1050" dirty="0"/>
+          </a:p>
+        </p:txBody>
+      </p:sp>
+      <p:sp>
+        <p:nvSpPr>
+          <p:cNvPr id="42" name="Text 40"/>
+          <p:cNvSpPr/>
+          <p:nvPr/>
+        </p:nvSpPr>
+        <p:spPr>
+          <a:xfrm>
+            <a:off x="6537960" y="4727448"/>
+            <a:ext cx="4937760" cy="420624"/>
           </a:xfrm>
           <a:prstGeom prst="rect">
             <a:avLst/>
@@ -4264,7 +4555,7 @@
           <a:p>
             <a:pPr indent="0" marL="0">
               <a:lnSpc>
-                <a:spcPct val="108000"/>
+                <a:spcPct val="106000"/>
               </a:lnSpc>
               <a:buNone/>
             </a:pPr>
@@ -4277,7 +4568,7 @@
                 <a:ea typeface="Calibri" pitchFamily="34" charset="-122"/>
                 <a:cs typeface="Calibri" pitchFamily="34" charset="-120"/>
               </a:rPr>
-              <a:t>A 2.5 s lattice covers 100% of public truths at IoU 0.5 and our recall now leads the field. But the head’s anomaly curve is saturated at exactly 1.0000, zero variance, on three private videos, and twelve replacement scores all reach 0% recall@128 on Level 3.</a:t>
+              <a:t>Our 2.5 s lattice covers 100% of truths and leads the field on recall. Twelve replacement rankers still reach 0% recall@128 on L3.</a:t>
             </a:r>
             <a:endParaRPr lang="en-US" sz="850" dirty="0"/>
           </a:p>
@@ -4285,30 +4576,110 @@
       </p:sp>
       <p:sp>
         <p:nvSpPr>
-          <p:cNvPr id="42" name="Text 40"/>
-          <p:cNvSpPr/>
-          <p:nvPr/>
-        </p:nvSpPr>
-        <p:spPr>
-          <a:xfrm>
-            <a:off x="502920" y="5614416"/>
-            <a:ext cx="11155680" cy="411480"/>
-          </a:xfrm>
-          <a:prstGeom prst="rect">
-            <a:avLst/>
-          </a:prstGeom>
-          <a:noFill/>
-          <a:ln/>
-        </p:spPr>
-        <p:txBody>
-          <a:bodyPr wrap="square" lIns="0" tIns="0" rIns="0" bIns="0" rtlCol="0" anchor="ctr"/>
-          <a:lstStyle/>
-          <a:p>
-            <a:pPr indent="0" marL="0">
-              <a:buNone/>
-            </a:pPr>
-            <a:r>
-              <a:rPr lang="en-US" sz="1100" i="1" dirty="0">
+          <p:cNvPr id="43" name="Shape 41"/>
+          <p:cNvSpPr/>
+          <p:nvPr/>
+        </p:nvSpPr>
+        <p:spPr>
+          <a:xfrm>
+            <a:off x="502920" y="5321808"/>
+            <a:ext cx="11155680" cy="548640"/>
+          </a:xfrm>
+          <a:prstGeom prst="roundRect">
+            <a:avLst>
+              <a:gd name="adj" fmla="val 10000"/>
+            </a:avLst>
+          </a:prstGeom>
+          <a:solidFill>
+            <a:srgbClr val="222E44"/>
+          </a:solidFill>
+          <a:ln w="12700">
+            <a:solidFill>
+              <a:srgbClr val="222E44"/>
+            </a:solidFill>
+            <a:prstDash val="solid"/>
+          </a:ln>
+        </p:spPr>
+      </p:sp>
+      <p:sp>
+        <p:nvSpPr>
+          <p:cNvPr id="44" name="Text 42"/>
+          <p:cNvSpPr/>
+          <p:nvPr/>
+        </p:nvSpPr>
+        <p:spPr>
+          <a:xfrm>
+            <a:off x="685800" y="5413248"/>
+            <a:ext cx="1737360" cy="201168"/>
+          </a:xfrm>
+          <a:prstGeom prst="rect">
+            <a:avLst/>
+          </a:prstGeom>
+          <a:noFill/>
+          <a:ln/>
+        </p:spPr>
+        <p:txBody>
+          <a:bodyPr wrap="square" lIns="0" tIns="0" rIns="0" bIns="0" rtlCol="0" anchor="ctr"/>
+          <a:lstStyle/>
+          <a:p>
+            <a:pPr indent="0" marL="0">
+              <a:buNone/>
+            </a:pPr>
+            <a:r>
+              <a:rPr lang="en-US" sz="850" b="1" spc="100" kern="0" dirty="0">
+                <a:solidFill>
+                  <a:srgbClr val="E2685F"/>
+                </a:solidFill>
+                <a:latin typeface="Calibri" pitchFamily="34" charset="0"/>
+                <a:ea typeface="Calibri" pitchFamily="34" charset="-122"/>
+                <a:cs typeface="Calibri" pitchFamily="34" charset="-120"/>
+              </a:rPr>
+              <a:t>TRIED AND DROPPED</a:t>
+            </a:r>
+            <a:endParaRPr lang="en-US" sz="850" dirty="0"/>
+          </a:p>
+        </p:txBody>
+      </p:sp>
+      <p:sp>
+        <p:nvSpPr>
+          <p:cNvPr id="45" name="Text 43"/>
+          <p:cNvSpPr/>
+          <p:nvPr/>
+        </p:nvSpPr>
+        <p:spPr>
+          <a:xfrm>
+            <a:off x="2514600" y="5394960"/>
+            <a:ext cx="9006840" cy="402336"/>
+          </a:xfrm>
+          <a:prstGeom prst="rect">
+            <a:avLst/>
+          </a:prstGeom>
+          <a:noFill/>
+          <a:ln/>
+        </p:spPr>
+        <p:txBody>
+          <a:bodyPr wrap="square" lIns="0" tIns="0" rIns="0" bIns="0" rtlCol="0" anchor="ctr"/>
+          <a:lstStyle/>
+          <a:p>
+            <a:pPr indent="0" marL="0">
+              <a:buNone/>
+            </a:pPr>
+            <a:r>
+              <a:rPr lang="en-US" sz="900" b="1" dirty="0">
+                <a:solidFill>
+                  <a:srgbClr val="CADCFC"/>
+                </a:solidFill>
+                <a:latin typeface="Calibri" pitchFamily="34" charset="0"/>
+                <a:ea typeface="Calibri" pitchFamily="34" charset="-122"/>
+                <a:cs typeface="Calibri" pitchFamily="34" charset="-120"/>
+              </a:rPr>
+              <a:t>Zero-shot Qwen3-VL 2B and 4B</a:t>
+            </a:r>
+            <a:pPr indent="0" marL="0">
+              <a:buNone/>
+            </a:pPr>
+            <a:r>
+              <a:rPr lang="en-US" sz="900" dirty="0">
                 <a:solidFill>
                   <a:srgbClr val="8496B4"/>
                 </a:solidFill>
@@ -4316,9 +4687,216 @@
                 <a:ea typeface="Calibri" pitchFamily="34" charset="-122"/>
                 <a:cs typeface="Calibri" pitchFamily="34" charset="-120"/>
               </a:rPr>
-              <a:t>Where the marks still are: we hold the highest recall in the field at both temporal difficulties — 5 of 6 at Level 3, 5 of 12 at Level 2 — and convert the least of it, because we cannot say which of our candidates are the right ones. That one gap is worth about thirteen marks.</a:t>
-            </a:r>
-            <a:endParaRPr lang="en-US" sz="1100" dirty="0"/>
+              <a:t> relabelled correct answers to wrong ones, 1/6 vs the head's 3/6, at 7.4× latency  </a:t>
+            </a:r>
+            <a:pPr indent="0" marL="0">
+              <a:buNone/>
+            </a:pPr>
+            <a:r>
+              <a:rPr lang="en-US" sz="900" b="1" dirty="0">
+                <a:solidFill>
+                  <a:srgbClr val="E2685F"/>
+                </a:solidFill>
+                <a:latin typeface="Calibri" pitchFamily="34" charset="0"/>
+                <a:ea typeface="Calibri" pitchFamily="34" charset="-122"/>
+                <a:cs typeface="Calibri" pitchFamily="34" charset="-120"/>
+              </a:rPr>
+              <a:t>−3.7</a:t>
+            </a:r>
+            <a:pPr indent="0" marL="0">
+              <a:buNone/>
+            </a:pPr>
+            <a:r>
+              <a:rPr lang="en-US" sz="900" dirty="0">
+                <a:solidFill>
+                  <a:srgbClr val="8496B4"/>
+                </a:solidFill>
+                <a:latin typeface="Calibri" pitchFamily="34" charset="0"/>
+                <a:ea typeface="Calibri" pitchFamily="34" charset="-122"/>
+                <a:cs typeface="Calibri" pitchFamily="34" charset="-120"/>
+              </a:rPr>
+              <a:t>   ·   </a:t>
+            </a:r>
+            <a:pPr indent="0" marL="0">
+              <a:buNone/>
+            </a:pPr>
+            <a:r>
+              <a:rPr lang="en-US" sz="900" b="1" dirty="0">
+                <a:solidFill>
+                  <a:srgbClr val="CADCFC"/>
+                </a:solidFill>
+                <a:latin typeface="Calibri" pitchFamily="34" charset="0"/>
+                <a:ea typeface="Calibri" pitchFamily="34" charset="-122"/>
+                <a:cs typeface="Calibri" pitchFamily="34" charset="-120"/>
+              </a:rPr>
+              <a:t>Training window 512</a:t>
+            </a:r>
+            <a:pPr indent="0" marL="0">
+              <a:buNone/>
+            </a:pPr>
+            <a:r>
+              <a:rPr lang="en-US" sz="900" dirty="0">
+                <a:solidFill>
+                  <a:srgbClr val="8496B4"/>
+                </a:solidFill>
+                <a:latin typeface="Calibri" pitchFamily="34" charset="0"/>
+                <a:ea typeface="Calibri" pitchFamily="34" charset="-122"/>
+                <a:cs typeface="Calibri" pitchFamily="34" charset="-120"/>
+              </a:rPr>
+              <a:t>  </a:t>
+            </a:r>
+            <a:pPr indent="0" marL="0">
+              <a:buNone/>
+            </a:pPr>
+            <a:r>
+              <a:rPr lang="en-US" sz="900" b="1" dirty="0">
+                <a:solidFill>
+                  <a:srgbClr val="E2685F"/>
+                </a:solidFill>
+                <a:latin typeface="Calibri" pitchFamily="34" charset="0"/>
+                <a:ea typeface="Calibri" pitchFamily="34" charset="-122"/>
+                <a:cs typeface="Calibri" pitchFamily="34" charset="-120"/>
+              </a:rPr>
+              <a:t>−3.5</a:t>
+            </a:r>
+            <a:pPr indent="0" marL="0">
+              <a:buNone/>
+            </a:pPr>
+            <a:r>
+              <a:rPr lang="en-US" sz="900" dirty="0">
+                <a:solidFill>
+                  <a:srgbClr val="8496B4"/>
+                </a:solidFill>
+                <a:latin typeface="Calibri" pitchFamily="34" charset="0"/>
+                <a:ea typeface="Calibri" pitchFamily="34" charset="-122"/>
+                <a:cs typeface="Calibri" pitchFamily="34" charset="-120"/>
+              </a:rPr>
+              <a:t>   ·   </a:t>
+            </a:r>
+            <a:pPr indent="0" marL="0">
+              <a:buNone/>
+            </a:pPr>
+            <a:r>
+              <a:rPr lang="en-US" sz="900" b="1" dirty="0">
+                <a:solidFill>
+                  <a:srgbClr val="CADCFC"/>
+                </a:solidFill>
+                <a:latin typeface="Calibri" pitchFamily="34" charset="0"/>
+                <a:ea typeface="Calibri" pitchFamily="34" charset="-122"/>
+                <a:cs typeface="Calibri" pitchFamily="34" charset="-120"/>
+              </a:rPr>
+              <a:t>Raising the L1 gate to 0.7</a:t>
+            </a:r>
+            <a:pPr indent="0" marL="0">
+              <a:buNone/>
+            </a:pPr>
+            <a:r>
+              <a:rPr lang="en-US" sz="900" dirty="0">
+                <a:solidFill>
+                  <a:srgbClr val="8496B4"/>
+                </a:solidFill>
+                <a:latin typeface="Calibri" pitchFamily="34" charset="0"/>
+                <a:ea typeface="Calibri" pitchFamily="34" charset="-122"/>
+                <a:cs typeface="Calibri" pitchFamily="34" charset="-120"/>
+              </a:rPr>
+              <a:t>  </a:t>
+            </a:r>
+            <a:pPr indent="0" marL="0">
+              <a:buNone/>
+            </a:pPr>
+            <a:r>
+              <a:rPr lang="en-US" sz="900" b="1" dirty="0">
+                <a:solidFill>
+                  <a:srgbClr val="E2685F"/>
+                </a:solidFill>
+                <a:latin typeface="Calibri" pitchFamily="34" charset="0"/>
+                <a:ea typeface="Calibri" pitchFamily="34" charset="-122"/>
+                <a:cs typeface="Calibri" pitchFamily="34" charset="-120"/>
+              </a:rPr>
+              <a:t>−2.0</a:t>
+            </a:r>
+            <a:pPr indent="0" marL="0">
+              <a:buNone/>
+            </a:pPr>
+            <a:r>
+              <a:rPr lang="en-US" sz="900" dirty="0">
+                <a:solidFill>
+                  <a:srgbClr val="8496B4"/>
+                </a:solidFill>
+                <a:latin typeface="Calibri" pitchFamily="34" charset="0"/>
+                <a:ea typeface="Calibri" pitchFamily="34" charset="-122"/>
+                <a:cs typeface="Calibri" pitchFamily="34" charset="-120"/>
+              </a:rPr>
+              <a:t>   ·   </a:t>
+            </a:r>
+            <a:pPr indent="0" marL="0">
+              <a:buNone/>
+            </a:pPr>
+            <a:r>
+              <a:rPr lang="en-US" sz="900" b="1" dirty="0">
+                <a:solidFill>
+                  <a:srgbClr val="CADCFC"/>
+                </a:solidFill>
+                <a:latin typeface="Calibri" pitchFamily="34" charset="0"/>
+                <a:ea typeface="Calibri" pitchFamily="34" charset="-122"/>
+                <a:cs typeface="Calibri" pitchFamily="34" charset="-120"/>
+              </a:rPr>
+              <a:t>12 replacement rankers on L3</a:t>
+            </a:r>
+            <a:pPr indent="0" marL="0">
+              <a:buNone/>
+            </a:pPr>
+            <a:r>
+              <a:rPr lang="en-US" sz="900" b="1" dirty="0">
+                <a:solidFill>
+                  <a:srgbClr val="E2685F"/>
+                </a:solidFill>
+                <a:latin typeface="Calibri" pitchFamily="34" charset="0"/>
+                <a:ea typeface="Calibri" pitchFamily="34" charset="-122"/>
+                <a:cs typeface="Calibri" pitchFamily="34" charset="-120"/>
+              </a:rPr>
+              <a:t>  0 of 12</a:t>
+            </a:r>
+            <a:endParaRPr lang="en-US" sz="900" dirty="0"/>
+          </a:p>
+        </p:txBody>
+      </p:sp>
+      <p:sp>
+        <p:nvSpPr>
+          <p:cNvPr id="46" name="Text 44"/>
+          <p:cNvSpPr/>
+          <p:nvPr/>
+        </p:nvSpPr>
+        <p:spPr>
+          <a:xfrm>
+            <a:off x="502920" y="5989320"/>
+            <a:ext cx="11155680" cy="365760"/>
+          </a:xfrm>
+          <a:prstGeom prst="rect">
+            <a:avLst/>
+          </a:prstGeom>
+          <a:noFill/>
+          <a:ln/>
+        </p:spPr>
+        <p:txBody>
+          <a:bodyPr wrap="square" lIns="0" tIns="0" rIns="0" bIns="0" rtlCol="0" anchor="ctr"/>
+          <a:lstStyle/>
+          <a:p>
+            <a:pPr indent="0" marL="0">
+              <a:buNone/>
+            </a:pPr>
+            <a:r>
+              <a:rPr lang="en-US" sz="1000" i="1" dirty="0">
+                <a:solidFill>
+                  <a:srgbClr val="8496B4"/>
+                </a:solidFill>
+                <a:latin typeface="Calibri" pitchFamily="34" charset="0"/>
+                <a:ea typeface="Calibri" pitchFamily="34" charset="-122"/>
+                <a:cs typeface="Calibri" pitchFamily="34" charset="-120"/>
+              </a:rPr>
+              <a:t>Still on the table: the highest recall in the field — 5 of 6 at L3, 5 of 12 at L2 — and the lowest conversion of it, because we cannot say which candidates are right. Worth about thirteen marks.</a:t>
+            </a:r>
+            <a:endParaRPr lang="en-US" sz="1000" dirty="0"/>
           </a:p>
         </p:txBody>
       </p:sp>
